--- a/system-design-101/vi/lessons/sd-10-007/slides/sd-10-007.pptx
+++ b/system-design-101/vi/lessons/sd-10-007/slides/sd-10-007.pptx
@@ -1934,40 +1934,51 @@
               <a:t> và</a:t>
             </a:r>
             <a:r>
+              <a:rPr lang="en-US" sz="2850" dirty="0" spc="0" kern="0">
+                <a:solidFill>
+                  <a:srgbClr val="C4C8D6"/>
+                </a:solidFill>
+                <a:latin typeface="Be Vietnam Pro" pitchFamily="34" charset="0"/>
+                <a:ea typeface="Be Vietnam Pro" pitchFamily="34" charset="-122"/>
+                <a:cs typeface="Be Vietnam Pro" pitchFamily="34" charset="-120"/>
+              </a:rPr>
+              <a:t> mỗi</a:t>
+            </a:r>
+            <a:r>
+              <a:rPr lang="en-US" sz="2850" dirty="0" spc="2" kern="0">
+                <a:solidFill>
+                  <a:srgbClr val="C4C8D6"/>
+                </a:solidFill>
+                <a:latin typeface="Be Vietnam Pro" pitchFamily="34" charset="0"/>
+                <a:ea typeface="Be Vietnam Pro" pitchFamily="34" charset="-122"/>
+                <a:cs typeface="Be Vietnam Pro" pitchFamily="34" charset="-120"/>
+              </a:rPr>
+              <a:t> nơi</a:t>
+            </a:r>
+            <a:r>
+              <a:rPr lang="en-US" sz="2850" dirty="0" spc="15" kern="0">
+                <a:solidFill>
+                  <a:srgbClr val="C4C8D6"/>
+                </a:solidFill>
+                <a:latin typeface="Be Vietnam Pro" pitchFamily="34" charset="0"/>
+                <a:ea typeface="Be Vietnam Pro" pitchFamily="34" charset="-122"/>
+                <a:cs typeface="Be Vietnam Pro" pitchFamily="34" charset="-120"/>
+              </a:rPr>
+              <a:t> đòi</a:t>
+            </a:r>
+            <a:r>
+              <a:rPr lang="en-US" sz="2850" dirty="0" spc="1" kern="0">
+                <a:solidFill>
+                  <a:srgbClr val="C4C8D6"/>
+                </a:solidFill>
+                <a:latin typeface="Be Vietnam Pro" pitchFamily="34" charset="0"/>
+                <a:ea typeface="Be Vietnam Pro" pitchFamily="34" charset="-122"/>
+                <a:cs typeface="Be Vietnam Pro" pitchFamily="34" charset="-120"/>
+              </a:rPr>
+              <a:t> hỏi</a:t>
+            </a:r>
+            <a:r>
               <a:rPr lang="en-US" sz="2850" dirty="0" spc="-2" kern="0">
-                <a:solidFill>
-                  <a:srgbClr val="C4C8D6"/>
-                </a:solidFill>
-                <a:latin typeface="Be Vietnam Pro" pitchFamily="34" charset="0"/>
-                <a:ea typeface="Be Vietnam Pro" pitchFamily="34" charset="-122"/>
-                <a:cs typeface="Be Vietnam Pro" pitchFamily="34" charset="-120"/>
-              </a:rPr>
-              <a:t> nguồn</a:t>
-            </a:r>
-            <a:r>
-              <a:rPr lang="en-US" sz="2850" dirty="0" spc="0" kern="0">
-                <a:solidFill>
-                  <a:srgbClr val="C4C8D6"/>
-                </a:solidFill>
-                <a:latin typeface="Be Vietnam Pro" pitchFamily="34" charset="0"/>
-                <a:ea typeface="Be Vietnam Pro" pitchFamily="34" charset="-122"/>
-                <a:cs typeface="Be Vietnam Pro" pitchFamily="34" charset="-120"/>
-              </a:rPr>
-              <a:t> nêu</a:t>
-            </a:r>
-            <a:r>
-              <a:rPr lang="en-US" sz="2850" dirty="0" spc="2" kern="0">
-                <a:solidFill>
-                  <a:srgbClr val="C4C8D6"/>
-                </a:solidFill>
-                <a:latin typeface="Be Vietnam Pro" pitchFamily="34" charset="0"/>
-                <a:ea typeface="Be Vietnam Pro" pitchFamily="34" charset="-122"/>
-                <a:cs typeface="Be Vietnam Pro" pitchFamily="34" charset="-120"/>
-              </a:rPr>
-              <a:t> lý do</a:t>
-            </a:r>
-            <a:r>
-              <a:rPr lang="en-US" sz="2850" dirty="0" spc="-1" kern="0">
                 <a:solidFill>
                   <a:srgbClr val="C4C8D6"/>
                 </a:solidFill>
@@ -2198,7 +2209,7 @@
               <a:buNone/>
             </a:pPr>
             <a:r>
-              <a:rPr lang="en-US" sz="7800" dirty="0" spc="5" kern="0">
+              <a:rPr lang="en-US" sz="7800" dirty="0" spc="-5" kern="0">
                 <a:solidFill>
                   <a:srgbClr val="FFB454"/>
                 </a:solidFill>
@@ -2206,7 +2217,7 @@
                 <a:ea typeface="Bricolage Grotesque ExtraBold" pitchFamily="34" charset="-122"/>
                 <a:cs typeface="Bricolage Grotesque ExtraBold" pitchFamily="34" charset="-120"/>
               </a:rPr>
-              <a:t>1</a:t>
+              <a:t>3</a:t>
             </a:r>
             <a:endParaRPr lang="en-US" sz="7800" dirty="0"/>
           </a:p>
@@ -2237,7 +2248,7 @@
               <a:buNone/>
             </a:pPr>
             <a:r>
-              <a:rPr lang="en-US" sz="1950" dirty="0" spc="1" kern="0">
+              <a:rPr lang="en-US" sz="1950" dirty="0" spc="-3" kern="0">
                 <a:solidFill>
                   <a:srgbClr val="9AA0B5"/>
                 </a:solidFill>
@@ -2245,7 +2256,29 @@
                 <a:ea typeface="Be Vietnam Pro" pitchFamily="34" charset="-122"/>
                 <a:cs typeface="Be Vietnam Pro" pitchFamily="34" charset="-120"/>
               </a:rPr>
-              <a:t>mục</a:t>
+              <a:t>chỗ</a:t>
+            </a:r>
+            <a:r>
+              <a:rPr lang="en-US" sz="1950" dirty="0" spc="0" kern="0">
+                <a:solidFill>
+                  <a:srgbClr val="9AA0B5"/>
+                </a:solidFill>
+                <a:latin typeface="Be Vietnam Pro" pitchFamily="34" charset="0"/>
+                <a:ea typeface="Be Vietnam Pro" pitchFamily="34" charset="-122"/>
+                <a:cs typeface="Be Vietnam Pro" pitchFamily="34" charset="-120"/>
+              </a:rPr>
+              <a:t> dẫn</a:t>
+            </a:r>
+            <a:r>
+              <a:rPr lang="en-US" sz="1950" dirty="0" spc="-15" kern="0">
+                <a:solidFill>
+                  <a:srgbClr val="9AA0B5"/>
+                </a:solidFill>
+                <a:latin typeface="Be Vietnam Pro" pitchFamily="34" charset="0"/>
+                <a:ea typeface="Be Vietnam Pro" pitchFamily="34" charset="-122"/>
+                <a:cs typeface="Be Vietnam Pro" pitchFamily="34" charset="-120"/>
+              </a:rPr>
+              <a:t> Core</a:t>
             </a:r>
             <a:r>
               <a:rPr lang="en-US" sz="1950" dirty="0" spc="2" kern="0">
@@ -2256,29 +2289,7 @@
                 <a:ea typeface="Be Vietnam Pro" pitchFamily="34" charset="-122"/>
                 <a:cs typeface="Be Vietnam Pro" pitchFamily="34" charset="-120"/>
               </a:rPr>
-              <a:t> nguồn</a:t>
-            </a:r>
-            <a:r>
-              <a:rPr lang="en-US" sz="1950" dirty="0" spc="13" kern="0">
-                <a:solidFill>
-                  <a:srgbClr val="9AA0B5"/>
-                </a:solidFill>
-                <a:latin typeface="Be Vietnam Pro" pitchFamily="34" charset="0"/>
-                <a:ea typeface="Be Vietnam Pro" pitchFamily="34" charset="-122"/>
-                <a:cs typeface="Be Vietnam Pro" pitchFamily="34" charset="-120"/>
-              </a:rPr>
-              <a:t> để</a:t>
-            </a:r>
-            <a:r>
-              <a:rPr lang="en-US" sz="1950" dirty="0" spc="-12" kern="0">
-                <a:solidFill>
-                  <a:srgbClr val="9AA0B5"/>
-                </a:solidFill>
-                <a:latin typeface="Be Vietnam Pro" pitchFamily="34" charset="0"/>
-                <a:ea typeface="Be Vietnam Pro" pitchFamily="34" charset="-122"/>
-                <a:cs typeface="Be Vietnam Pro" pitchFamily="34" charset="-120"/>
-              </a:rPr>
-              <a:t> trống</a:t>
+              <a:t> Guidelines</a:t>
             </a:r>
             <a:endParaRPr lang="en-US" sz="1950" dirty="0"/>
           </a:p>
@@ -2395,7 +2406,7 @@
               <a:buNone/>
             </a:pPr>
             <a:r>
-              <a:rPr lang="en-US" sz="3000" b="1" dirty="0" spc="2" kern="0">
+              <a:rPr lang="en-US" sz="3000" b="1" dirty="0" spc="0" kern="0">
                 <a:solidFill>
                   <a:srgbClr val="F3EEE3"/>
                 </a:solidFill>
@@ -2403,10 +2414,10 @@
                 <a:ea typeface="Be Vietnam Pro" pitchFamily="34" charset="-122"/>
                 <a:cs typeface="Be Vietnam Pro" pitchFamily="34" charset="-120"/>
               </a:rPr>
-              <a:t>Điều</a:t>
-            </a:r>
-            <a:r>
-              <a:rPr lang="en-US" sz="3000" b="1" dirty="0" spc="-4" kern="0">
+              <a:t>Gần</a:t>
+            </a:r>
+            <a:r>
+              <a:rPr lang="en-US" sz="3000" b="1" dirty="0" spc="-5" kern="0">
                 <a:solidFill>
                   <a:srgbClr val="F3EEE3"/>
                 </a:solidFill>
@@ -2414,10 +2425,10 @@
                 <a:ea typeface="Be Vietnam Pro" pitchFamily="34" charset="-122"/>
                 <a:cs typeface="Be Vietnam Pro" pitchFamily="34" charset="-120"/>
               </a:rPr>
-              <a:t> khiển</a:t>
-            </a:r>
-            <a:r>
-              <a:rPr lang="en-US" sz="3000" b="1" dirty="0" spc="-5" kern="0">
+              <a:t> phần</a:t>
+            </a:r>
+            <a:r>
+              <a:rPr lang="en-US" sz="3000" b="1" dirty="0" spc="27" kern="0">
                 <a:solidFill>
                   <a:srgbClr val="F3EEE3"/>
                 </a:solidFill>
@@ -2425,21 +2436,242 @@
                 <a:ea typeface="Be Vietnam Pro" pitchFamily="34" charset="-122"/>
                 <a:cs typeface="Be Vietnam Pro" pitchFamily="34" charset="-120"/>
               </a:rPr>
-              <a:t> phần</a:t>
-            </a:r>
-            <a:r>
-              <a:rPr lang="en-US" sz="3000" b="1" dirty="0" spc="28" kern="0">
-                <a:solidFill>
-                  <a:srgbClr val="F3EEE3"/>
-                </a:solidFill>
-                <a:latin typeface="Be Vietnam Pro" pitchFamily="34" charset="0"/>
-                <a:ea typeface="Be Vietnam Pro" pitchFamily="34" charset="-122"/>
-                <a:cs typeface="Be Vietnam Pro" pitchFamily="34" charset="-120"/>
-              </a:rPr>
               <a:t> cứng</a:t>
             </a:r>
             <a:endParaRPr lang="en-US" sz="3000" dirty="0"/>
           </a:p>
+        </p:txBody>
+      </p:sp>
+      <p:sp>
+        <p:nvSpPr>
+          <p:cNvPr id="16" name="Text 14"/>
+          <p:cNvSpPr/>
+          <p:nvPr/>
+        </p:nvSpPr>
+        <p:spPr>
+          <a:xfrm>
+            <a:off x="11334750" y="2819400"/>
+            <a:ext cx="5905500" cy="342900"/>
+          </a:xfrm>
+          <a:prstGeom prst="rect">
+            <a:avLst/>
+          </a:prstGeom>
+          <a:noFill/>
+          <a:ln/>
+        </p:spPr>
+        <p:txBody>
+          <a:bodyPr wrap="square" lIns="0" tIns="0" rIns="0" bIns="0" rtlCol="0" anchor="t"/>
+          <a:lstStyle/>
+          <a:p>
+            <a:pPr algn="l" indent="0" marL="0">
+              <a:buNone/>
+            </a:pPr>
+            <a:r>
+              <a:rPr lang="en-US" sz="1800" dirty="0" spc="-2" kern="0">
+                <a:solidFill>
+                  <a:srgbClr val="C4C8D6"/>
+                </a:solidFill>
+                <a:latin typeface="Be Vietnam Pro" pitchFamily="34" charset="0"/>
+                <a:ea typeface="Be Vietnam Pro" pitchFamily="34" charset="-122"/>
+                <a:cs typeface="Be Vietnam Pro" pitchFamily="34" charset="-120"/>
+              </a:rPr>
+              <a:t>hệ</a:t>
+            </a:r>
+            <a:r>
+              <a:rPr lang="en-US" sz="1800" dirty="0" spc="-3" kern="0">
+                <a:solidFill>
+                  <a:srgbClr val="C4C8D6"/>
+                </a:solidFill>
+                <a:latin typeface="Be Vietnam Pro" pitchFamily="34" charset="0"/>
+                <a:ea typeface="Be Vietnam Pro" pitchFamily="34" charset="-122"/>
+                <a:cs typeface="Be Vietnam Pro" pitchFamily="34" charset="-120"/>
+              </a:rPr>
+              <a:t> thống</a:t>
+            </a:r>
+            <a:r>
+              <a:rPr lang="en-US" sz="1800" dirty="0" spc="-2" kern="0">
+                <a:solidFill>
+                  <a:srgbClr val="C4C8D6"/>
+                </a:solidFill>
+                <a:latin typeface="Be Vietnam Pro" pitchFamily="34" charset="0"/>
+                <a:ea typeface="Be Vietnam Pro" pitchFamily="34" charset="-122"/>
+                <a:cs typeface="Be Vietnam Pro" pitchFamily="34" charset="-120"/>
+              </a:rPr>
+              <a:t> nhúng ·</a:t>
+            </a:r>
+            <a:r>
+              <a:rPr lang="en-US" sz="1800" dirty="0" spc="-1" kern="0">
+                <a:solidFill>
+                  <a:srgbClr val="C4C8D6"/>
+                </a:solidFill>
+                <a:latin typeface="Be Vietnam Pro" pitchFamily="34" charset="0"/>
+                <a:ea typeface="Be Vietnam Pro" pitchFamily="34" charset="-122"/>
+                <a:cs typeface="Be Vietnam Pro" pitchFamily="34" charset="-120"/>
+              </a:rPr>
+              <a:t> hệ</a:t>
+            </a:r>
+            <a:r>
+              <a:rPr lang="en-US" sz="1800" dirty="0" spc="14" kern="0">
+                <a:solidFill>
+                  <a:srgbClr val="C4C8D6"/>
+                </a:solidFill>
+                <a:latin typeface="Be Vietnam Pro" pitchFamily="34" charset="0"/>
+                <a:ea typeface="Be Vietnam Pro" pitchFamily="34" charset="-122"/>
+                <a:cs typeface="Be Vietnam Pro" pitchFamily="34" charset="-120"/>
+              </a:rPr>
+              <a:t> điều</a:t>
+            </a:r>
+            <a:r>
+              <a:rPr lang="en-US" sz="1800" dirty="0" spc="-1" kern="0">
+                <a:solidFill>
+                  <a:srgbClr val="C4C8D6"/>
+                </a:solidFill>
+                <a:latin typeface="Be Vietnam Pro" pitchFamily="34" charset="0"/>
+                <a:ea typeface="Be Vietnam Pro" pitchFamily="34" charset="-122"/>
+                <a:cs typeface="Be Vietnam Pro" pitchFamily="34" charset="-120"/>
+              </a:rPr>
+              <a:t> hành</a:t>
+            </a:r>
+            <a:r>
+              <a:rPr lang="en-US" sz="1800" dirty="0" spc="-2" kern="0">
+                <a:solidFill>
+                  <a:srgbClr val="C4C8D6"/>
+                </a:solidFill>
+                <a:latin typeface="Be Vietnam Pro" pitchFamily="34" charset="0"/>
+                <a:ea typeface="Be Vietnam Pro" pitchFamily="34" charset="-122"/>
+                <a:cs typeface="Be Vietnam Pro" pitchFamily="34" charset="-120"/>
+              </a:rPr>
+              <a:t> ·</a:t>
+            </a:r>
+            <a:r>
+              <a:rPr lang="en-US" sz="1800" dirty="0" spc="-3" kern="0">
+                <a:solidFill>
+                  <a:srgbClr val="C4C8D6"/>
+                </a:solidFill>
+                <a:latin typeface="Be Vietnam Pro" pitchFamily="34" charset="0"/>
+                <a:ea typeface="Be Vietnam Pro" pitchFamily="34" charset="-122"/>
+                <a:cs typeface="Be Vietnam Pro" pitchFamily="34" charset="-120"/>
+              </a:rPr>
+              <a:t> mạng</a:t>
+            </a:r>
+            <a:endParaRPr lang="en-US" sz="1800" dirty="0"/>
+          </a:p>
+        </p:txBody>
+      </p:sp>
+      <p:sp>
+        <p:nvSpPr>
+          <p:cNvPr id="17" name="Shape 15"/>
+          <p:cNvSpPr/>
+          <p:nvPr/>
+        </p:nvSpPr>
+        <p:spPr>
+          <a:xfrm>
+            <a:off x="10668000" y="3981450"/>
+            <a:ext cx="6705600" cy="2247900"/>
+          </a:xfrm>
+          <a:prstGeom prst="roundRect">
+            <a:avLst>
+              <a:gd name="adj" fmla="val 11864"/>
+            </a:avLst>
+          </a:prstGeom>
+          <a:solidFill>
+            <a:srgbClr val="1E212B"/>
+          </a:solidFill>
+          <a:ln/>
+        </p:spPr>
+      </p:sp>
+      <p:sp>
+        <p:nvSpPr>
+          <p:cNvPr id="18" name="Shape 16"/>
+          <p:cNvSpPr/>
+          <p:nvPr/>
+        </p:nvSpPr>
+        <p:spPr>
+          <a:xfrm>
+            <a:off x="10972800" y="4324350"/>
+            <a:ext cx="95250" cy="1562100"/>
+          </a:xfrm>
+          <a:prstGeom prst="roundRect">
+            <a:avLst>
+              <a:gd name="adj" fmla="val 50000"/>
+            </a:avLst>
+          </a:prstGeom>
+          <a:solidFill>
+            <a:srgbClr val="3DD6A0"/>
+          </a:solidFill>
+          <a:ln/>
+        </p:spPr>
+      </p:sp>
+      <p:sp>
+        <p:nvSpPr>
+          <p:cNvPr id="19" name="Text 17"/>
+          <p:cNvSpPr/>
+          <p:nvPr/>
+        </p:nvSpPr>
+        <p:spPr>
+          <a:xfrm>
+            <a:off x="11334750" y="4362450"/>
+            <a:ext cx="5715000" cy="304800"/>
+          </a:xfrm>
+          <a:prstGeom prst="rect">
+            <a:avLst/>
+          </a:prstGeom>
+          <a:noFill/>
+          <a:ln/>
+        </p:spPr>
+        <p:txBody>
+          <a:bodyPr wrap="square" lIns="0" tIns="0" rIns="0" bIns="0" rtlCol="0" anchor="t"/>
+          <a:lstStyle/>
+          <a:p>
+            <a:pPr algn="l" indent="0" marL="0">
+              <a:buNone/>
+            </a:pPr>
+            <a:r>
+              <a:rPr lang="en-US" sz="1800" b="1" spc="226" kern="0" dirty="0">
+                <a:solidFill>
+                  <a:srgbClr val="3DD6A0"/>
+                </a:solidFill>
+                <a:latin typeface="Be Vietnam Pro" pitchFamily="34" charset="0"/>
+                <a:ea typeface="Be Vietnam Pro" pitchFamily="34" charset="-122"/>
+                <a:cs typeface="Be Vietnam Pro" pitchFamily="34" charset="-120"/>
+              </a:rPr>
+              <a:t>NHÓM</a:t>
+            </a:r>
+            <a:r>
+              <a:rPr lang="en-US" sz="1800" b="1" spc="224" kern="0" dirty="0">
+                <a:solidFill>
+                  <a:srgbClr val="3DD6A0"/>
+                </a:solidFill>
+                <a:latin typeface="Be Vietnam Pro" pitchFamily="34" charset="0"/>
+                <a:ea typeface="Be Vietnam Pro" pitchFamily="34" charset="-122"/>
+                <a:cs typeface="Be Vietnam Pro" pitchFamily="34" charset="-120"/>
+              </a:rPr>
+              <a:t> 2</a:t>
+            </a:r>
+            <a:endParaRPr lang="en-US" sz="1800" dirty="0"/>
+          </a:p>
+        </p:txBody>
+      </p:sp>
+      <p:sp>
+        <p:nvSpPr>
+          <p:cNvPr id="20" name="Text 18"/>
+          <p:cNvSpPr/>
+          <p:nvPr/>
+        </p:nvSpPr>
+        <p:spPr>
+          <a:xfrm>
+            <a:off x="11334750" y="4762500"/>
+            <a:ext cx="5810250" cy="533400"/>
+          </a:xfrm>
+          <a:prstGeom prst="rect">
+            <a:avLst/>
+          </a:prstGeom>
+          <a:noFill/>
+          <a:ln/>
+        </p:spPr>
+        <p:txBody>
+          <a:bodyPr wrap="square" lIns="0" tIns="20955" rIns="0" bIns="-20955" rtlCol="0" anchor="ctr"/>
+          <a:lstStyle/>
           <a:p>
             <a:pPr algn="l" indent="0" marL="0">
               <a:lnSpc>
@@ -2448,7 +2680,7 @@
               <a:buNone/>
             </a:pPr>
             <a:r>
-              <a:rPr lang="en-US" sz="3000" b="1" dirty="0" spc="-41" kern="0">
+              <a:rPr lang="en-US" sz="3000" b="1" dirty="0" spc="2" kern="0">
                 <a:solidFill>
                   <a:srgbClr val="F3EEE3"/>
                 </a:solidFill>
@@ -2456,7 +2688,18 @@
                 <a:ea typeface="Be Vietnam Pro" pitchFamily="34" charset="-122"/>
                 <a:cs typeface="Be Vietnam Pro" pitchFamily="34" charset="-120"/>
               </a:rPr>
-              <a:t>và</a:t>
+              <a:t>Cần</a:t>
+            </a:r>
+            <a:r>
+              <a:rPr lang="en-US" sz="3000" b="1" dirty="0" spc="-9" kern="0">
+                <a:solidFill>
+                  <a:srgbClr val="F3EEE3"/>
+                </a:solidFill>
+                <a:latin typeface="Be Vietnam Pro" pitchFamily="34" charset="0"/>
+                <a:ea typeface="Be Vietnam Pro" pitchFamily="34" charset="-122"/>
+                <a:cs typeface="Be Vietnam Pro" pitchFamily="34" charset="-120"/>
+              </a:rPr>
+              <a:t> chạy</a:t>
             </a:r>
             <a:r>
               <a:rPr lang="en-US" sz="3000" b="1" dirty="0" spc="-4" kern="0">
@@ -2467,18 +2710,7 @@
                 <a:ea typeface="Be Vietnam Pro" pitchFamily="34" charset="-122"/>
                 <a:cs typeface="Be Vietnam Pro" pitchFamily="34" charset="-120"/>
               </a:rPr>
-              <a:t> hệ</a:t>
-            </a:r>
-            <a:r>
-              <a:rPr lang="en-US" sz="3000" b="1" dirty="0" spc="-9" kern="0">
-                <a:solidFill>
-                  <a:srgbClr val="F3EEE3"/>
-                </a:solidFill>
-                <a:latin typeface="Be Vietnam Pro" pitchFamily="34" charset="0"/>
-                <a:ea typeface="Be Vietnam Pro" pitchFamily="34" charset="-122"/>
-                <a:cs typeface="Be Vietnam Pro" pitchFamily="34" charset="-120"/>
-              </a:rPr>
-              <a:t> thống</a:t>
+              <a:t> nhanh</a:t>
             </a:r>
             <a:endParaRPr lang="en-US" sz="3000" dirty="0"/>
           </a:p>
@@ -2486,13 +2718,13 @@
       </p:sp>
       <p:sp>
         <p:nvSpPr>
-          <p:cNvPr id="16" name="Text 14"/>
-          <p:cNvSpPr/>
-          <p:nvPr/>
-        </p:nvSpPr>
-        <p:spPr>
-          <a:xfrm>
-            <a:off x="11334750" y="2819400"/>
+          <p:cNvPr id="21" name="Text 19"/>
+          <p:cNvSpPr/>
+          <p:nvPr/>
+        </p:nvSpPr>
+        <p:spPr>
+          <a:xfrm>
+            <a:off x="11334750" y="5410200"/>
             <a:ext cx="5905500" cy="342900"/>
           </a:xfrm>
           <a:prstGeom prst="rect">
@@ -2509,6 +2741,17 @@
               <a:buNone/>
             </a:pPr>
             <a:r>
+              <a:rPr lang="en-US" sz="1800" dirty="0" spc="-9" kern="0">
+                <a:solidFill>
+                  <a:srgbClr val="C4C8D6"/>
+                </a:solidFill>
+                <a:latin typeface="Be Vietnam Pro" pitchFamily="34" charset="0"/>
+                <a:ea typeface="Be Vietnam Pro" pitchFamily="34" charset="-122"/>
+                <a:cs typeface="Be Vietnam Pro" pitchFamily="34" charset="-120"/>
+              </a:rPr>
+              <a:t>game</a:t>
+            </a:r>
+            <a:r>
               <a:rPr lang="en-US" sz="1800" dirty="0" spc="-2" kern="0">
                 <a:solidFill>
                   <a:srgbClr val="C4C8D6"/>
@@ -2517,7 +2760,51 @@
                 <a:ea typeface="Be Vietnam Pro" pitchFamily="34" charset="-122"/>
                 <a:cs typeface="Be Vietnam Pro" pitchFamily="34" charset="-120"/>
               </a:rPr>
-              <a:t>hệ</a:t>
+              <a:t> ·</a:t>
+            </a:r>
+            <a:r>
+              <a:rPr lang="en-US" sz="1800" dirty="0" spc="4" kern="0">
+                <a:solidFill>
+                  <a:srgbClr val="C4C8D6"/>
+                </a:solidFill>
+                <a:latin typeface="Be Vietnam Pro" pitchFamily="34" charset="0"/>
+                <a:ea typeface="Be Vietnam Pro" pitchFamily="34" charset="-122"/>
+                <a:cs typeface="Be Vietnam Pro" pitchFamily="34" charset="-120"/>
+              </a:rPr>
+              <a:t> cơ</a:t>
+            </a:r>
+            <a:r>
+              <a:rPr lang="en-US" sz="1800" dirty="0" spc="-6" kern="0">
+                <a:solidFill>
+                  <a:srgbClr val="C4C8D6"/>
+                </a:solidFill>
+                <a:latin typeface="Be Vietnam Pro" pitchFamily="34" charset="0"/>
+                <a:ea typeface="Be Vietnam Pro" pitchFamily="34" charset="-122"/>
+                <a:cs typeface="Be Vietnam Pro" pitchFamily="34" charset="-120"/>
+              </a:rPr>
+              <a:t> sở</a:t>
+            </a:r>
+            <a:r>
+              <a:rPr lang="en-US" sz="1800" dirty="0" spc="1" kern="0">
+                <a:solidFill>
+                  <a:srgbClr val="C4C8D6"/>
+                </a:solidFill>
+                <a:latin typeface="Be Vietnam Pro" pitchFamily="34" charset="0"/>
+                <a:ea typeface="Be Vietnam Pro" pitchFamily="34" charset="-122"/>
+                <a:cs typeface="Be Vietnam Pro" pitchFamily="34" charset="-120"/>
+              </a:rPr>
+              <a:t> dữ</a:t>
+            </a:r>
+            <a:r>
+              <a:rPr lang="en-US" sz="1800" dirty="0" spc="-2" kern="0">
+                <a:solidFill>
+                  <a:srgbClr val="C4C8D6"/>
+                </a:solidFill>
+                <a:latin typeface="Be Vietnam Pro" pitchFamily="34" charset="0"/>
+                <a:ea typeface="Be Vietnam Pro" pitchFamily="34" charset="-122"/>
+                <a:cs typeface="Be Vietnam Pro" pitchFamily="34" charset="-120"/>
+              </a:rPr>
+              <a:t> liệu ·</a:t>
             </a:r>
             <a:r>
               <a:rPr lang="en-US" sz="1800" dirty="0" spc="-3" kern="0">
@@ -2528,10 +2815,10 @@
                 <a:ea typeface="Be Vietnam Pro" pitchFamily="34" charset="-122"/>
                 <a:cs typeface="Be Vietnam Pro" pitchFamily="34" charset="-120"/>
               </a:rPr>
-              <a:t> thống</a:t>
-            </a:r>
-            <a:r>
-              <a:rPr lang="en-US" sz="1800" dirty="0" spc="-2" kern="0">
+              <a:t> tính</a:t>
+            </a:r>
+            <a:r>
+              <a:rPr lang="en-US" sz="1800" dirty="0" spc="-9" kern="0">
                 <a:solidFill>
                   <a:srgbClr val="C4C8D6"/>
                 </a:solidFill>
@@ -2539,7 +2826,18 @@
                 <a:ea typeface="Be Vietnam Pro" pitchFamily="34" charset="-122"/>
                 <a:cs typeface="Be Vietnam Pro" pitchFamily="34" charset="-120"/>
               </a:rPr>
-              <a:t> nhúng ·</a:t>
+              <a:t> toán</a:t>
+            </a:r>
+            <a:r>
+              <a:rPr lang="en-US" sz="1800" dirty="0" spc="0" kern="0">
+                <a:solidFill>
+                  <a:srgbClr val="C4C8D6"/>
+                </a:solidFill>
+                <a:latin typeface="Be Vietnam Pro" pitchFamily="34" charset="0"/>
+                <a:ea typeface="Be Vietnam Pro" pitchFamily="34" charset="-122"/>
+                <a:cs typeface="Be Vietnam Pro" pitchFamily="34" charset="-120"/>
+              </a:rPr>
+              <a:t> khoa</a:t>
             </a:r>
             <a:r>
               <a:rPr lang="en-US" sz="1800" dirty="0" spc="-1" kern="0">
@@ -2550,51 +2848,7 @@
                 <a:ea typeface="Be Vietnam Pro" pitchFamily="34" charset="-122"/>
                 <a:cs typeface="Be Vietnam Pro" pitchFamily="34" charset="-120"/>
               </a:rPr>
-              <a:t> hệ</a:t>
-            </a:r>
-            <a:r>
-              <a:rPr lang="en-US" sz="1800" dirty="0" spc="14" kern="0">
-                <a:solidFill>
-                  <a:srgbClr val="C4C8D6"/>
-                </a:solidFill>
-                <a:latin typeface="Be Vietnam Pro" pitchFamily="34" charset="0"/>
-                <a:ea typeface="Be Vietnam Pro" pitchFamily="34" charset="-122"/>
-                <a:cs typeface="Be Vietnam Pro" pitchFamily="34" charset="-120"/>
-              </a:rPr>
-              <a:t> điều</a:t>
-            </a:r>
-            <a:r>
-              <a:rPr lang="en-US" sz="1800" dirty="0" spc="-1" kern="0">
-                <a:solidFill>
-                  <a:srgbClr val="C4C8D6"/>
-                </a:solidFill>
-                <a:latin typeface="Be Vietnam Pro" pitchFamily="34" charset="0"/>
-                <a:ea typeface="Be Vietnam Pro" pitchFamily="34" charset="-122"/>
-                <a:cs typeface="Be Vietnam Pro" pitchFamily="34" charset="-120"/>
-              </a:rPr>
-              <a:t> hành</a:t>
-            </a:r>
-            <a:r>
-              <a:rPr lang="en-US" sz="1800" dirty="0" spc="-2" kern="0">
-                <a:solidFill>
-                  <a:srgbClr val="C4C8D6"/>
-                </a:solidFill>
-                <a:latin typeface="Be Vietnam Pro" pitchFamily="34" charset="0"/>
-                <a:ea typeface="Be Vietnam Pro" pitchFamily="34" charset="-122"/>
-                <a:cs typeface="Be Vietnam Pro" pitchFamily="34" charset="-120"/>
-              </a:rPr>
-              <a:t> ·</a:t>
-            </a:r>
-            <a:r>
-              <a:rPr lang="en-US" sz="1800" dirty="0" spc="-3" kern="0">
-                <a:solidFill>
-                  <a:srgbClr val="C4C8D6"/>
-                </a:solidFill>
-                <a:latin typeface="Be Vietnam Pro" pitchFamily="34" charset="0"/>
-                <a:ea typeface="Be Vietnam Pro" pitchFamily="34" charset="-122"/>
-                <a:cs typeface="Be Vietnam Pro" pitchFamily="34" charset="-120"/>
-              </a:rPr>
-              <a:t> mạng</a:t>
+              <a:t> học</a:t>
             </a:r>
             <a:endParaRPr lang="en-US" sz="1800" dirty="0"/>
           </a:p>
@@ -2602,13 +2856,13 @@
       </p:sp>
       <p:sp>
         <p:nvSpPr>
-          <p:cNvPr id="17" name="Shape 15"/>
-          <p:cNvSpPr/>
-          <p:nvPr/>
-        </p:nvSpPr>
-        <p:spPr>
-          <a:xfrm>
-            <a:off x="10668000" y="3981450"/>
+          <p:cNvPr id="22" name="Shape 20"/>
+          <p:cNvSpPr/>
+          <p:nvPr/>
+        </p:nvSpPr>
+        <p:spPr>
+          <a:xfrm>
+            <a:off x="10668000" y="6515100"/>
             <a:ext cx="6705600" cy="2247900"/>
           </a:xfrm>
           <a:prstGeom prst="roundRect">
@@ -2624,13 +2878,13 @@
       </p:sp>
       <p:sp>
         <p:nvSpPr>
-          <p:cNvPr id="18" name="Shape 16"/>
-          <p:cNvSpPr/>
-          <p:nvPr/>
-        </p:nvSpPr>
-        <p:spPr>
-          <a:xfrm>
-            <a:off x="10972800" y="4324350"/>
+          <p:cNvPr id="23" name="Shape 21"/>
+          <p:cNvSpPr/>
+          <p:nvPr/>
+        </p:nvSpPr>
+        <p:spPr>
+          <a:xfrm>
+            <a:off x="10972800" y="6858000"/>
             <a:ext cx="95250" cy="1562100"/>
           </a:xfrm>
           <a:prstGeom prst="roundRect">
@@ -2639,20 +2893,20 @@
             </a:avLst>
           </a:prstGeom>
           <a:solidFill>
-            <a:srgbClr val="3DD6A0"/>
+            <a:srgbClr val="FFB454"/>
           </a:solidFill>
           <a:ln/>
         </p:spPr>
       </p:sp>
       <p:sp>
         <p:nvSpPr>
-          <p:cNvPr id="19" name="Text 17"/>
-          <p:cNvSpPr/>
-          <p:nvPr/>
-        </p:nvSpPr>
-        <p:spPr>
-          <a:xfrm>
-            <a:off x="11334750" y="4362450"/>
+          <p:cNvPr id="24" name="Text 22"/>
+          <p:cNvSpPr/>
+          <p:nvPr/>
+        </p:nvSpPr>
+        <p:spPr>
+          <a:xfrm>
+            <a:off x="11334750" y="6896100"/>
             <a:ext cx="5715000" cy="304800"/>
           </a:xfrm>
           <a:prstGeom prst="rect">
@@ -2671,24 +2925,13 @@
             <a:r>
               <a:rPr lang="en-US" sz="1800" b="1" spc="226" kern="0" dirty="0">
                 <a:solidFill>
-                  <a:srgbClr val="3DD6A0"/>
-                </a:solidFill>
-                <a:latin typeface="Be Vietnam Pro" pitchFamily="34" charset="0"/>
-                <a:ea typeface="Be Vietnam Pro" pitchFamily="34" charset="-122"/>
-                <a:cs typeface="Be Vietnam Pro" pitchFamily="34" charset="-120"/>
-              </a:rPr>
-              <a:t>NHÓM</a:t>
-            </a:r>
-            <a:r>
-              <a:rPr lang="en-US" sz="1800" b="1" spc="224" kern="0" dirty="0">
-                <a:solidFill>
-                  <a:srgbClr val="3DD6A0"/>
-                </a:solidFill>
-                <a:latin typeface="Be Vietnam Pro" pitchFamily="34" charset="0"/>
-                <a:ea typeface="Be Vietnam Pro" pitchFamily="34" charset="-122"/>
-                <a:cs typeface="Be Vietnam Pro" pitchFamily="34" charset="-120"/>
-              </a:rPr>
-              <a:t> 2</a:t>
+                  <a:srgbClr val="FFB454"/>
+                </a:solidFill>
+                <a:latin typeface="Be Vietnam Pro" pitchFamily="34" charset="0"/>
+                <a:ea typeface="Be Vietnam Pro" pitchFamily="34" charset="-122"/>
+                <a:cs typeface="Be Vietnam Pro" pitchFamily="34" charset="-120"/>
+              </a:rPr>
+              <a:t>NHÓM 3</a:t>
             </a:r>
             <a:endParaRPr lang="en-US" sz="1800" dirty="0"/>
           </a:p>
@@ -2696,13 +2939,13 @@
       </p:sp>
       <p:sp>
         <p:nvSpPr>
-          <p:cNvPr id="20" name="Text 18"/>
-          <p:cNvSpPr/>
-          <p:nvPr/>
-        </p:nvSpPr>
-        <p:spPr>
-          <a:xfrm>
-            <a:off x="11334750" y="4762500"/>
+          <p:cNvPr id="25" name="Text 23"/>
+          <p:cNvSpPr/>
+          <p:nvPr/>
+        </p:nvSpPr>
+        <p:spPr>
+          <a:xfrm>
+            <a:off x="11334750" y="7296150"/>
             <a:ext cx="5810250" cy="533400"/>
           </a:xfrm>
           <a:prstGeom prst="rect">
@@ -2722,7 +2965,7 @@
               <a:buNone/>
             </a:pPr>
             <a:r>
-              <a:rPr lang="en-US" sz="3000" b="1" dirty="0" spc="2" kern="0">
+              <a:rPr lang="en-US" sz="3000" b="1" dirty="0" spc="-5" kern="0">
                 <a:solidFill>
                   <a:srgbClr val="F3EEE3"/>
                 </a:solidFill>
@@ -2730,10 +2973,10 @@
                 <a:ea typeface="Be Vietnam Pro" pitchFamily="34" charset="-122"/>
                 <a:cs typeface="Be Vietnam Pro" pitchFamily="34" charset="-120"/>
               </a:rPr>
-              <a:t>Cần hiệu</a:t>
-            </a:r>
-            <a:r>
-              <a:rPr lang="en-US" sz="3000" b="1" dirty="0" spc="-7" kern="0">
+              <a:t>Hai</a:t>
+            </a:r>
+            <a:r>
+              <a:rPr lang="en-US" sz="3000" b="1" dirty="0" spc="1" kern="0">
                 <a:solidFill>
                   <a:srgbClr val="F3EEE3"/>
                 </a:solidFill>
@@ -2741,10 +2984,10 @@
                 <a:ea typeface="Be Vietnam Pro" pitchFamily="34" charset="-122"/>
                 <a:cs typeface="Be Vietnam Pro" pitchFamily="34" charset="-120"/>
               </a:rPr>
-              <a:t> năng</a:t>
-            </a:r>
-            <a:r>
-              <a:rPr lang="en-US" sz="3000" b="1" dirty="0" spc="0" kern="0">
+              <a:t> lĩnh</a:t>
+            </a:r>
+            <a:r>
+              <a:rPr lang="en-US" sz="3000" b="1" dirty="0" spc="15" kern="0">
                 <a:solidFill>
                   <a:srgbClr val="F3EEE3"/>
                 </a:solidFill>
@@ -2752,262 +2995,10 @@
                 <a:ea typeface="Be Vietnam Pro" pitchFamily="34" charset="-122"/>
                 <a:cs typeface="Be Vietnam Pro" pitchFamily="34" charset="-120"/>
               </a:rPr>
-              <a:t> cao</a:t>
-            </a:r>
-            <a:endParaRPr lang="en-US" sz="3000" dirty="0"/>
-          </a:p>
-        </p:txBody>
-      </p:sp>
-      <p:sp>
-        <p:nvSpPr>
-          <p:cNvPr id="21" name="Text 19"/>
-          <p:cNvSpPr/>
-          <p:nvPr/>
-        </p:nvSpPr>
-        <p:spPr>
-          <a:xfrm>
-            <a:off x="11334750" y="5410200"/>
-            <a:ext cx="5905500" cy="342900"/>
-          </a:xfrm>
-          <a:prstGeom prst="rect">
-            <a:avLst/>
-          </a:prstGeom>
-          <a:noFill/>
-          <a:ln/>
-        </p:spPr>
-        <p:txBody>
-          <a:bodyPr wrap="square" lIns="0" tIns="0" rIns="0" bIns="0" rtlCol="0" anchor="t"/>
-          <a:lstStyle/>
-          <a:p>
-            <a:pPr algn="l" indent="0" marL="0">
-              <a:buNone/>
-            </a:pPr>
-            <a:r>
-              <a:rPr lang="en-US" sz="1800" dirty="0" spc="-9" kern="0">
-                <a:solidFill>
-                  <a:srgbClr val="C4C8D6"/>
-                </a:solidFill>
-                <a:latin typeface="Be Vietnam Pro" pitchFamily="34" charset="0"/>
-                <a:ea typeface="Be Vietnam Pro" pitchFamily="34" charset="-122"/>
-                <a:cs typeface="Be Vietnam Pro" pitchFamily="34" charset="-120"/>
-              </a:rPr>
-              <a:t>game</a:t>
-            </a:r>
-            <a:r>
-              <a:rPr lang="en-US" sz="1800" dirty="0" spc="-2" kern="0">
-                <a:solidFill>
-                  <a:srgbClr val="C4C8D6"/>
-                </a:solidFill>
-                <a:latin typeface="Be Vietnam Pro" pitchFamily="34" charset="0"/>
-                <a:ea typeface="Be Vietnam Pro" pitchFamily="34" charset="-122"/>
-                <a:cs typeface="Be Vietnam Pro" pitchFamily="34" charset="-120"/>
-              </a:rPr>
-              <a:t> ·</a:t>
-            </a:r>
-            <a:r>
-              <a:rPr lang="en-US" sz="1800" dirty="0" spc="4" kern="0">
-                <a:solidFill>
-                  <a:srgbClr val="C4C8D6"/>
-                </a:solidFill>
-                <a:latin typeface="Be Vietnam Pro" pitchFamily="34" charset="0"/>
-                <a:ea typeface="Be Vietnam Pro" pitchFamily="34" charset="-122"/>
-                <a:cs typeface="Be Vietnam Pro" pitchFamily="34" charset="-120"/>
-              </a:rPr>
-              <a:t> cơ</a:t>
-            </a:r>
-            <a:r>
-              <a:rPr lang="en-US" sz="1800" dirty="0" spc="-6" kern="0">
-                <a:solidFill>
-                  <a:srgbClr val="C4C8D6"/>
-                </a:solidFill>
-                <a:latin typeface="Be Vietnam Pro" pitchFamily="34" charset="0"/>
-                <a:ea typeface="Be Vietnam Pro" pitchFamily="34" charset="-122"/>
-                <a:cs typeface="Be Vietnam Pro" pitchFamily="34" charset="-120"/>
-              </a:rPr>
-              <a:t> sở</a:t>
-            </a:r>
-            <a:r>
-              <a:rPr lang="en-US" sz="1800" dirty="0" spc="1" kern="0">
-                <a:solidFill>
-                  <a:srgbClr val="C4C8D6"/>
-                </a:solidFill>
-                <a:latin typeface="Be Vietnam Pro" pitchFamily="34" charset="0"/>
-                <a:ea typeface="Be Vietnam Pro" pitchFamily="34" charset="-122"/>
-                <a:cs typeface="Be Vietnam Pro" pitchFamily="34" charset="-120"/>
-              </a:rPr>
-              <a:t> dữ</a:t>
-            </a:r>
-            <a:r>
-              <a:rPr lang="en-US" sz="1800" dirty="0" spc="-2" kern="0">
-                <a:solidFill>
-                  <a:srgbClr val="C4C8D6"/>
-                </a:solidFill>
-                <a:latin typeface="Be Vietnam Pro" pitchFamily="34" charset="0"/>
-                <a:ea typeface="Be Vietnam Pro" pitchFamily="34" charset="-122"/>
-                <a:cs typeface="Be Vietnam Pro" pitchFamily="34" charset="-120"/>
-              </a:rPr>
-              <a:t> liệu ·</a:t>
-            </a:r>
-            <a:r>
-              <a:rPr lang="en-US" sz="1800" dirty="0" spc="-3" kern="0">
-                <a:solidFill>
-                  <a:srgbClr val="C4C8D6"/>
-                </a:solidFill>
-                <a:latin typeface="Be Vietnam Pro" pitchFamily="34" charset="0"/>
-                <a:ea typeface="Be Vietnam Pro" pitchFamily="34" charset="-122"/>
-                <a:cs typeface="Be Vietnam Pro" pitchFamily="34" charset="-120"/>
-              </a:rPr>
-              <a:t> tính</a:t>
-            </a:r>
-            <a:r>
-              <a:rPr lang="en-US" sz="1800" dirty="0" spc="-9" kern="0">
-                <a:solidFill>
-                  <a:srgbClr val="C4C8D6"/>
-                </a:solidFill>
-                <a:latin typeface="Be Vietnam Pro" pitchFamily="34" charset="0"/>
-                <a:ea typeface="Be Vietnam Pro" pitchFamily="34" charset="-122"/>
-                <a:cs typeface="Be Vietnam Pro" pitchFamily="34" charset="-120"/>
-              </a:rPr>
-              <a:t> toán</a:t>
-            </a:r>
-            <a:r>
-              <a:rPr lang="en-US" sz="1800" dirty="0" spc="0" kern="0">
-                <a:solidFill>
-                  <a:srgbClr val="C4C8D6"/>
-                </a:solidFill>
-                <a:latin typeface="Be Vietnam Pro" pitchFamily="34" charset="0"/>
-                <a:ea typeface="Be Vietnam Pro" pitchFamily="34" charset="-122"/>
-                <a:cs typeface="Be Vietnam Pro" pitchFamily="34" charset="-120"/>
-              </a:rPr>
-              <a:t> khoa</a:t>
-            </a:r>
-            <a:r>
-              <a:rPr lang="en-US" sz="1800" dirty="0" spc="-1" kern="0">
-                <a:solidFill>
-                  <a:srgbClr val="C4C8D6"/>
-                </a:solidFill>
-                <a:latin typeface="Be Vietnam Pro" pitchFamily="34" charset="0"/>
-                <a:ea typeface="Be Vietnam Pro" pitchFamily="34" charset="-122"/>
-                <a:cs typeface="Be Vietnam Pro" pitchFamily="34" charset="-120"/>
-              </a:rPr>
-              <a:t> học</a:t>
-            </a:r>
-            <a:endParaRPr lang="en-US" sz="1800" dirty="0"/>
-          </a:p>
-        </p:txBody>
-      </p:sp>
-      <p:sp>
-        <p:nvSpPr>
-          <p:cNvPr id="22" name="Shape 20"/>
-          <p:cNvSpPr/>
-          <p:nvPr/>
-        </p:nvSpPr>
-        <p:spPr>
-          <a:xfrm>
-            <a:off x="10668000" y="6515100"/>
-            <a:ext cx="6705600" cy="2247900"/>
-          </a:xfrm>
-          <a:prstGeom prst="roundRect">
-            <a:avLst>
-              <a:gd name="adj" fmla="val 11864"/>
-            </a:avLst>
-          </a:prstGeom>
-          <a:solidFill>
-            <a:srgbClr val="1E212B"/>
-          </a:solidFill>
-          <a:ln/>
-        </p:spPr>
-      </p:sp>
-      <p:sp>
-        <p:nvSpPr>
-          <p:cNvPr id="23" name="Shape 21"/>
-          <p:cNvSpPr/>
-          <p:nvPr/>
-        </p:nvSpPr>
-        <p:spPr>
-          <a:xfrm>
-            <a:off x="10972800" y="6858000"/>
-            <a:ext cx="95250" cy="1562100"/>
-          </a:xfrm>
-          <a:prstGeom prst="roundRect">
-            <a:avLst>
-              <a:gd name="adj" fmla="val 50000"/>
-            </a:avLst>
-          </a:prstGeom>
-          <a:solidFill>
-            <a:srgbClr val="FFB454"/>
-          </a:solidFill>
-          <a:ln/>
-        </p:spPr>
-      </p:sp>
-      <p:sp>
-        <p:nvSpPr>
-          <p:cNvPr id="24" name="Text 22"/>
-          <p:cNvSpPr/>
-          <p:nvPr/>
-        </p:nvSpPr>
-        <p:spPr>
-          <a:xfrm>
-            <a:off x="11334750" y="6896100"/>
-            <a:ext cx="5715000" cy="304800"/>
-          </a:xfrm>
-          <a:prstGeom prst="rect">
-            <a:avLst/>
-          </a:prstGeom>
-          <a:noFill/>
-          <a:ln/>
-        </p:spPr>
-        <p:txBody>
-          <a:bodyPr wrap="square" lIns="0" tIns="0" rIns="0" bIns="0" rtlCol="0" anchor="t"/>
-          <a:lstStyle/>
-          <a:p>
-            <a:pPr algn="l" indent="0" marL="0">
-              <a:buNone/>
-            </a:pPr>
-            <a:r>
-              <a:rPr lang="en-US" sz="1800" b="1" spc="226" kern="0" dirty="0">
-                <a:solidFill>
-                  <a:srgbClr val="FFB454"/>
-                </a:solidFill>
-                <a:latin typeface="Be Vietnam Pro" pitchFamily="34" charset="0"/>
-                <a:ea typeface="Be Vietnam Pro" pitchFamily="34" charset="-122"/>
-                <a:cs typeface="Be Vietnam Pro" pitchFamily="34" charset="-120"/>
-              </a:rPr>
-              <a:t>NHÓM 3</a:t>
-            </a:r>
-            <a:endParaRPr lang="en-US" sz="1800" dirty="0"/>
-          </a:p>
-        </p:txBody>
-      </p:sp>
-      <p:sp>
-        <p:nvSpPr>
-          <p:cNvPr id="25" name="Text 23"/>
-          <p:cNvSpPr/>
-          <p:nvPr/>
-        </p:nvSpPr>
-        <p:spPr>
-          <a:xfrm>
-            <a:off x="11334750" y="7296150"/>
-            <a:ext cx="5810250" cy="533400"/>
-          </a:xfrm>
-          <a:prstGeom prst="rect">
-            <a:avLst/>
-          </a:prstGeom>
-          <a:noFill/>
-          <a:ln/>
-        </p:spPr>
-        <p:txBody>
-          <a:bodyPr wrap="square" lIns="0" tIns="20955" rIns="0" bIns="-20955" rtlCol="0" anchor="ctr"/>
-          <a:lstStyle/>
-          <a:p>
-            <a:pPr algn="l" indent="0" marL="0">
-              <a:lnSpc>
-                <a:spcPts val="3750"/>
-              </a:lnSpc>
-              <a:buNone/>
-            </a:pPr>
-            <a:r>
-              <a:rPr lang="en-US" sz="3000" b="1" dirty="0" spc="-5" kern="0">
+              <a:t> vực</a:t>
+            </a:r>
+            <a:r>
+              <a:rPr lang="en-US" sz="3000" b="1" dirty="0" spc="-10" kern="0">
                 <a:solidFill>
                   <a:srgbClr val="F3EEE3"/>
                 </a:solidFill>
@@ -3015,32 +3006,10 @@
                 <a:ea typeface="Be Vietnam Pro" pitchFamily="34" charset="-122"/>
                 <a:cs typeface="Be Vietnam Pro" pitchFamily="34" charset="-120"/>
               </a:rPr>
-              <a:t>Hai</a:t>
-            </a:r>
-            <a:r>
-              <a:rPr lang="en-US" sz="3000" b="1" dirty="0" spc="2" kern="0">
-                <a:solidFill>
-                  <a:srgbClr val="F3EEE3"/>
-                </a:solidFill>
-                <a:latin typeface="Be Vietnam Pro" pitchFamily="34" charset="0"/>
-                <a:ea typeface="Be Vietnam Pro" pitchFamily="34" charset="-122"/>
-                <a:cs typeface="Be Vietnam Pro" pitchFamily="34" charset="-120"/>
-              </a:rPr>
-              <a:t> mục</a:t>
-            </a:r>
-            <a:r>
-              <a:rPr lang="en-US" sz="3000" b="1" dirty="0" spc="-11" kern="0">
-                <a:solidFill>
-                  <a:srgbClr val="F3EEE3"/>
-                </a:solidFill>
-                <a:latin typeface="Be Vietnam Pro" pitchFamily="34" charset="0"/>
-                <a:ea typeface="Be Vietnam Pro" pitchFamily="34" charset="-122"/>
-                <a:cs typeface="Be Vietnam Pro" pitchFamily="34" charset="-120"/>
-              </a:rPr>
               <a:t> còn</a:t>
             </a:r>
             <a:r>
-              <a:rPr lang="en-US" sz="3000" b="1" dirty="0" spc="0" kern="0">
+              <a:rPr lang="en-US" sz="3000" b="1" dirty="0" spc="-1" kern="0">
                 <a:solidFill>
                   <a:srgbClr val="F3EEE3"/>
                 </a:solidFill>
@@ -3560,6 +3529,50 @@
               <a:t>C++</a:t>
             </a:r>
             <a:r>
+              <a:rPr lang="en-US" sz="2700" dirty="0" spc="6" kern="0">
+                <a:solidFill>
+                  <a:srgbClr val="14161C"/>
+                </a:solidFill>
+                <a:latin typeface="Be Vietnam Pro" pitchFamily="34" charset="0"/>
+                <a:ea typeface="Be Vietnam Pro" pitchFamily="34" charset="-122"/>
+                <a:cs typeface="Be Vietnam Pro" pitchFamily="34" charset="-120"/>
+              </a:rPr>
+              <a:t> thường</a:t>
+            </a:r>
+            <a:r>
+              <a:rPr lang="en-US" sz="2700" dirty="0" spc="9" kern="0">
+                <a:solidFill>
+                  <a:srgbClr val="14161C"/>
+                </a:solidFill>
+                <a:latin typeface="Be Vietnam Pro" pitchFamily="34" charset="0"/>
+                <a:ea typeface="Be Vietnam Pro" pitchFamily="34" charset="-122"/>
+                <a:cs typeface="Be Vietnam Pro" pitchFamily="34" charset="-120"/>
+              </a:rPr>
+              <a:t> được</a:t>
+            </a:r>
+            <a:r>
+              <a:rPr lang="en-US" sz="2700" dirty="0" spc="-1" kern="0">
+                <a:solidFill>
+                  <a:srgbClr val="14161C"/>
+                </a:solidFill>
+                <a:latin typeface="Be Vietnam Pro" pitchFamily="34" charset="0"/>
+                <a:ea typeface="Be Vietnam Pro" pitchFamily="34" charset="-122"/>
+                <a:cs typeface="Be Vietnam Pro" pitchFamily="34" charset="-120"/>
+              </a:rPr>
+              <a:t> chọn</a:t>
+            </a:r>
+            <a:r>
+              <a:rPr lang="en-US" sz="2700" dirty="0" spc="-2" kern="0">
+                <a:solidFill>
+                  <a:srgbClr val="14161C"/>
+                </a:solidFill>
+                <a:latin typeface="Be Vietnam Pro" pitchFamily="34" charset="0"/>
+                <a:ea typeface="Be Vietnam Pro" pitchFamily="34" charset="-122"/>
+                <a:cs typeface="Be Vietnam Pro" pitchFamily="34" charset="-120"/>
+              </a:rPr>
+              <a:t> khi</a:t>
+            </a:r>
+            <a:r>
               <a:rPr lang="en-US" sz="2700" dirty="0" spc="0" kern="0">
                 <a:solidFill>
                   <a:srgbClr val="14161C"/>
@@ -3568,18 +3581,18 @@
                 <a:ea typeface="Be Vietnam Pro" pitchFamily="34" charset="-122"/>
                 <a:cs typeface="Be Vietnam Pro" pitchFamily="34" charset="-120"/>
               </a:rPr>
-              <a:t> là</a:t>
-            </a:r>
-            <a:r>
-              <a:rPr lang="en-US" sz="2700" dirty="0" spc="-14" kern="0">
-                <a:solidFill>
-                  <a:srgbClr val="14161C"/>
-                </a:solidFill>
-                <a:latin typeface="Be Vietnam Pro" pitchFamily="34" charset="0"/>
-                <a:ea typeface="Be Vietnam Pro" pitchFamily="34" charset="-122"/>
-                <a:cs typeface="Be Vietnam Pro" pitchFamily="34" charset="-120"/>
-              </a:rPr>
-              <a:t> ngôn</a:t>
+              <a:t> cần</a:t>
+            </a:r>
+            <a:r>
+              <a:rPr lang="en-US" sz="2700" dirty="0" spc="-8" kern="0">
+                <a:solidFill>
+                  <a:srgbClr val="14161C"/>
+                </a:solidFill>
+                <a:latin typeface="Be Vietnam Pro" pitchFamily="34" charset="0"/>
+                <a:ea typeface="Be Vietnam Pro" pitchFamily="34" charset="-122"/>
+                <a:cs typeface="Be Vietnam Pro" pitchFamily="34" charset="-120"/>
+              </a:rPr>
+              <a:t> chạy</a:t>
             </a:r>
             <a:r>
               <a:rPr lang="en-US" sz="2700" dirty="0" spc="-3" kern="0">
@@ -3590,29 +3603,18 @@
                 <a:ea typeface="Be Vietnam Pro" pitchFamily="34" charset="-122"/>
                 <a:cs typeface="Be Vietnam Pro" pitchFamily="34" charset="-120"/>
               </a:rPr>
-              <a:t> ngữ</a:t>
-            </a:r>
-            <a:r>
-              <a:rPr lang="en-US" sz="2700" dirty="0" spc="16" kern="0">
-                <a:solidFill>
-                  <a:srgbClr val="14161C"/>
-                </a:solidFill>
-                <a:latin typeface="Be Vietnam Pro" pitchFamily="34" charset="0"/>
-                <a:ea typeface="Be Vietnam Pro" pitchFamily="34" charset="-122"/>
-                <a:cs typeface="Be Vietnam Pro" pitchFamily="34" charset="-120"/>
-              </a:rPr>
-              <a:t> đa</a:t>
-            </a:r>
-            <a:r>
-              <a:rPr lang="en-US" sz="2700" dirty="0" spc="-3" kern="0">
-                <a:solidFill>
-                  <a:srgbClr val="14161C"/>
-                </a:solidFill>
-                <a:latin typeface="Be Vietnam Pro" pitchFamily="34" charset="0"/>
-                <a:ea typeface="Be Vietnam Pro" pitchFamily="34" charset="-122"/>
-                <a:cs typeface="Be Vietnam Pro" pitchFamily="34" charset="-120"/>
-              </a:rPr>
-              <a:t> dụng.</a:t>
+              <a:t> nhanh</a:t>
+            </a:r>
+            <a:r>
+              <a:rPr lang="en-US" sz="2700" dirty="0" spc="-17" kern="0">
+                <a:solidFill>
+                  <a:srgbClr val="14161C"/>
+                </a:solidFill>
+                <a:latin typeface="Be Vietnam Pro" pitchFamily="34" charset="0"/>
+                <a:ea typeface="Be Vietnam Pro" pitchFamily="34" charset="-122"/>
+                <a:cs typeface="Be Vietnam Pro" pitchFamily="34" charset="-120"/>
+              </a:rPr>
+              <a:t> và</a:t>
             </a:r>
             <a:r>
               <a:rPr lang="en-US" sz="2700" dirty="0" spc="-1" kern="0">
@@ -3623,7 +3625,62 @@
                 <a:ea typeface="Be Vietnam Pro" pitchFamily="34" charset="-122"/>
                 <a:cs typeface="Be Vietnam Pro" pitchFamily="34" charset="-120"/>
               </a:rPr>
-              <a:t> Nguồn</a:t>
+              <a:t> tự quản lý</a:t>
+            </a:r>
+            <a:r>
+              <a:rPr lang="en-US" sz="2700" dirty="0" spc="-13" kern="0">
+                <a:solidFill>
+                  <a:srgbClr val="14161C"/>
+                </a:solidFill>
+                <a:latin typeface="Be Vietnam Pro" pitchFamily="34" charset="0"/>
+                <a:ea typeface="Be Vietnam Pro" pitchFamily="34" charset="-122"/>
+                <a:cs typeface="Be Vietnam Pro" pitchFamily="34" charset="-120"/>
+              </a:rPr>
+              <a:t> tài</a:t>
+            </a:r>
+            <a:r>
+              <a:rPr lang="en-US" sz="2700" dirty="0" spc="-16" kern="0">
+                <a:solidFill>
+                  <a:srgbClr val="14161C"/>
+                </a:solidFill>
+                <a:latin typeface="Be Vietnam Pro" pitchFamily="34" charset="0"/>
+                <a:ea typeface="Be Vietnam Pro" pitchFamily="34" charset="-122"/>
+                <a:cs typeface="Be Vietnam Pro" pitchFamily="34" charset="-120"/>
+              </a:rPr>
+              <a:t> nguyên</a:t>
+            </a:r>
+            <a:r>
+              <a:rPr lang="en-US" sz="2700" dirty="0" spc="-1" kern="0">
+                <a:solidFill>
+                  <a:srgbClr val="14161C"/>
+                </a:solidFill>
+                <a:latin typeface="Be Vietnam Pro" pitchFamily="34" charset="0"/>
+                <a:ea typeface="Be Vietnam Pro" pitchFamily="34" charset="-122"/>
+                <a:cs typeface="Be Vietnam Pro" pitchFamily="34" charset="-120"/>
+              </a:rPr>
+              <a:t> của</a:t>
+            </a:r>
+            <a:r>
+              <a:rPr lang="en-US" sz="2700" dirty="0" spc="-10" kern="0">
+                <a:solidFill>
+                  <a:srgbClr val="14161C"/>
+                </a:solidFill>
+                <a:latin typeface="Be Vietnam Pro" pitchFamily="34" charset="0"/>
+                <a:ea typeface="Be Vietnam Pro" pitchFamily="34" charset="-122"/>
+                <a:cs typeface="Be Vietnam Pro" pitchFamily="34" charset="-120"/>
+              </a:rPr>
+              <a:t> máy.</a:t>
+            </a:r>
+            <a:r>
+              <a:rPr lang="en-US" sz="2700" dirty="0" spc="-61" kern="0">
+                <a:solidFill>
+                  <a:srgbClr val="14161C"/>
+                </a:solidFill>
+                <a:latin typeface="Be Vietnam Pro" pitchFamily="34" charset="0"/>
+                <a:ea typeface="Be Vietnam Pro" pitchFamily="34" charset="-122"/>
+                <a:cs typeface="Be Vietnam Pro" pitchFamily="34" charset="-120"/>
+              </a:rPr>
+              <a:t> Tám</a:t>
             </a:r>
             <a:r>
               <a:rPr lang="en-US" sz="2700" dirty="0" spc="-2" kern="0">
@@ -3634,18 +3691,62 @@
                 <a:ea typeface="Be Vietnam Pro" pitchFamily="34" charset="-122"/>
                 <a:cs typeface="Be Vietnam Pro" pitchFamily="34" charset="-120"/>
               </a:rPr>
-              <a:t> nêu</a:t>
-            </a:r>
-            <a:r>
-              <a:rPr lang="en-US" sz="2700" dirty="0" spc="-14" kern="0">
-                <a:solidFill>
-                  <a:srgbClr val="14161C"/>
-                </a:solidFill>
-                <a:latin typeface="Be Vietnam Pro" pitchFamily="34" charset="0"/>
-                <a:ea typeface="Be Vietnam Pro" pitchFamily="34" charset="-122"/>
-                <a:cs typeface="Be Vietnam Pro" pitchFamily="34" charset="-120"/>
-              </a:rPr>
-              <a:t> tám</a:t>
+              <a:t> lĩnh</a:t>
+            </a:r>
+            <a:r>
+              <a:rPr lang="en-US" sz="2700" dirty="0" spc="11" kern="0">
+                <a:solidFill>
+                  <a:srgbClr val="14161C"/>
+                </a:solidFill>
+                <a:latin typeface="Be Vietnam Pro" pitchFamily="34" charset="0"/>
+                <a:ea typeface="Be Vietnam Pro" pitchFamily="34" charset="-122"/>
+                <a:cs typeface="Be Vietnam Pro" pitchFamily="34" charset="-120"/>
+              </a:rPr>
+              <a:t> vực</a:t>
+            </a:r>
+            <a:r>
+              <a:rPr lang="en-US" sz="2700" dirty="0" spc="7" kern="0">
+                <a:solidFill>
+                  <a:srgbClr val="14161C"/>
+                </a:solidFill>
+                <a:latin typeface="Be Vietnam Pro" pitchFamily="34" charset="0"/>
+                <a:ea typeface="Be Vietnam Pro" pitchFamily="34" charset="-122"/>
+                <a:cs typeface="Be Vietnam Pro" pitchFamily="34" charset="-120"/>
+              </a:rPr>
+              <a:t> dưới</a:t>
+            </a:r>
+            <a:r>
+              <a:rPr lang="en-US" sz="2700" dirty="0" spc="3" kern="0">
+                <a:solidFill>
+                  <a:srgbClr val="14161C"/>
+                </a:solidFill>
+                <a:latin typeface="Be Vietnam Pro" pitchFamily="34" charset="0"/>
+                <a:ea typeface="Be Vietnam Pro" pitchFamily="34" charset="-122"/>
+                <a:cs typeface="Be Vietnam Pro" pitchFamily="34" charset="-120"/>
+              </a:rPr>
+              <a:t> đây</a:t>
+            </a:r>
+            <a:r>
+              <a:rPr lang="en-US" sz="2700" dirty="0" spc="-13" kern="0">
+                <a:solidFill>
+                  <a:srgbClr val="14161C"/>
+                </a:solidFill>
+                <a:latin typeface="Be Vietnam Pro" pitchFamily="34" charset="0"/>
+                <a:ea typeface="Be Vietnam Pro" pitchFamily="34" charset="-122"/>
+                <a:cs typeface="Be Vietnam Pro" pitchFamily="34" charset="-120"/>
+              </a:rPr>
+              <a:t> hay</a:t>
+            </a:r>
+            <a:r>
+              <a:rPr lang="en-US" sz="2700" dirty="0" spc="12" kern="0">
+                <a:solidFill>
+                  <a:srgbClr val="14161C"/>
+                </a:solidFill>
+                <a:latin typeface="Be Vietnam Pro" pitchFamily="34" charset="0"/>
+                <a:ea typeface="Be Vietnam Pro" pitchFamily="34" charset="-122"/>
+                <a:cs typeface="Be Vietnam Pro" pitchFamily="34" charset="-120"/>
+              </a:rPr>
+              <a:t> đòi</a:t>
             </a:r>
             <a:r>
               <a:rPr lang="en-US" sz="2700" dirty="0" spc="-2" kern="0">
@@ -3656,98 +3757,10 @@
                 <a:ea typeface="Be Vietnam Pro" pitchFamily="34" charset="-122"/>
                 <a:cs typeface="Be Vietnam Pro" pitchFamily="34" charset="-120"/>
               </a:rPr>
-              <a:t> lĩnh</a:t>
-            </a:r>
-            <a:r>
-              <a:rPr lang="en-US" sz="2700" dirty="0" spc="10" kern="0">
-                <a:solidFill>
-                  <a:srgbClr val="14161C"/>
-                </a:solidFill>
-                <a:latin typeface="Be Vietnam Pro" pitchFamily="34" charset="0"/>
-                <a:ea typeface="Be Vietnam Pro" pitchFamily="34" charset="-122"/>
-                <a:cs typeface="Be Vietnam Pro" pitchFamily="34" charset="-120"/>
-              </a:rPr>
-              <a:t> vực</a:t>
-            </a:r>
-            <a:r>
-              <a:rPr lang="en-US" sz="2700" dirty="0" spc="-3" kern="0">
-                <a:solidFill>
-                  <a:srgbClr val="14161C"/>
-                </a:solidFill>
-                <a:latin typeface="Be Vietnam Pro" pitchFamily="34" charset="0"/>
-                <a:ea typeface="Be Vietnam Pro" pitchFamily="34" charset="-122"/>
-                <a:cs typeface="Be Vietnam Pro" pitchFamily="34" charset="-120"/>
-              </a:rPr>
-              <a:t> dùng</a:t>
-            </a:r>
-            <a:r>
-              <a:rPr lang="en-US" sz="2700" dirty="0" spc="0" kern="0">
-                <a:solidFill>
-                  <a:srgbClr val="14161C"/>
-                </a:solidFill>
-                <a:latin typeface="Be Vietnam Pro" pitchFamily="34" charset="0"/>
-                <a:ea typeface="Be Vietnam Pro" pitchFamily="34" charset="-122"/>
-                <a:cs typeface="Be Vietnam Pro" pitchFamily="34" charset="-120"/>
-              </a:rPr>
-              <a:t> nó,</a:t>
-            </a:r>
-            <a:r>
-              <a:rPr lang="en-US" sz="2700" dirty="0" spc="-2" kern="0">
-                <a:solidFill>
-                  <a:srgbClr val="14161C"/>
-                </a:solidFill>
-                <a:latin typeface="Be Vietnam Pro" pitchFamily="34" charset="0"/>
-                <a:ea typeface="Be Vietnam Pro" pitchFamily="34" charset="-122"/>
-                <a:cs typeface="Be Vietnam Pro" pitchFamily="34" charset="-120"/>
-              </a:rPr>
-              <a:t> phần lớn</a:t>
-            </a:r>
-            <a:r>
-              <a:rPr lang="en-US" sz="2700" dirty="0" spc="-1" kern="0">
-                <a:solidFill>
-                  <a:srgbClr val="14161C"/>
-                </a:solidFill>
-                <a:latin typeface="Be Vietnam Pro" pitchFamily="34" charset="0"/>
-                <a:ea typeface="Be Vietnam Pro" pitchFamily="34" charset="-122"/>
-                <a:cs typeface="Be Vietnam Pro" pitchFamily="34" charset="-120"/>
-              </a:rPr>
-              <a:t> vì</a:t>
-            </a:r>
-            <a:r>
-              <a:rPr lang="en-US" sz="2700" dirty="0" spc="-2" kern="0">
-                <a:solidFill>
-                  <a:srgbClr val="14161C"/>
-                </a:solidFill>
-                <a:latin typeface="Be Vietnam Pro" pitchFamily="34" charset="0"/>
-                <a:ea typeface="Be Vietnam Pro" pitchFamily="34" charset="-122"/>
-                <a:cs typeface="Be Vietnam Pro" pitchFamily="34" charset="-120"/>
-              </a:rPr>
-              <a:t> hiệu năng</a:t>
-            </a:r>
-            <a:r>
-              <a:rPr lang="en-US" sz="2700" dirty="0" spc="-17" kern="0">
-                <a:solidFill>
-                  <a:srgbClr val="14161C"/>
-                </a:solidFill>
-                <a:latin typeface="Be Vietnam Pro" pitchFamily="34" charset="0"/>
-                <a:ea typeface="Be Vietnam Pro" pitchFamily="34" charset="-122"/>
-                <a:cs typeface="Be Vietnam Pro" pitchFamily="34" charset="-120"/>
-              </a:rPr>
-              <a:t> và</a:t>
-            </a:r>
-            <a:r>
-              <a:rPr lang="en-US" sz="2700" dirty="0" spc="-18" kern="0">
-                <a:solidFill>
-                  <a:srgbClr val="14161C"/>
-                </a:solidFill>
-                <a:latin typeface="Be Vietnam Pro" pitchFamily="34" charset="0"/>
-                <a:ea typeface="Be Vietnam Pro" pitchFamily="34" charset="-122"/>
-                <a:cs typeface="Be Vietnam Pro" pitchFamily="34" charset="-120"/>
-              </a:rPr>
-              <a:t> quyền</a:t>
-            </a:r>
-            <a:r>
-              <a:rPr lang="en-US" sz="2700" dirty="0" spc="21" kern="0">
+              <a:t> hai</a:t>
+            </a:r>
+            <a:r>
+              <a:rPr lang="en-US" sz="2700" dirty="0" spc="20" kern="0">
                 <a:solidFill>
                   <a:srgbClr val="14161C"/>
                 </a:solidFill>
@@ -3758,37 +3771,15 @@
               <a:t> điều</a:t>
             </a:r>
             <a:r>
-              <a:rPr lang="en-US" sz="2700" dirty="0" spc="-3" kern="0">
-                <a:solidFill>
-                  <a:srgbClr val="14161C"/>
-                </a:solidFill>
-                <a:latin typeface="Be Vietnam Pro" pitchFamily="34" charset="0"/>
-                <a:ea typeface="Be Vietnam Pro" pitchFamily="34" charset="-122"/>
-                <a:cs typeface="Be Vietnam Pro" pitchFamily="34" charset="-120"/>
-              </a:rPr>
-              <a:t> khiển</a:t>
-            </a:r>
-            <a:r>
-              <a:rPr lang="en-US" sz="2700" dirty="0" spc="-13" kern="0">
-                <a:solidFill>
-                  <a:srgbClr val="14161C"/>
-                </a:solidFill>
-                <a:latin typeface="Be Vietnam Pro" pitchFamily="34" charset="0"/>
-                <a:ea typeface="Be Vietnam Pro" pitchFamily="34" charset="-122"/>
-                <a:cs typeface="Be Vietnam Pro" pitchFamily="34" charset="-120"/>
-              </a:rPr>
-              <a:t> tài</a:t>
-            </a:r>
-            <a:r>
-              <a:rPr lang="en-US" sz="2700" dirty="0" spc="-14" kern="0">
-                <a:solidFill>
-                  <a:srgbClr val="14161C"/>
-                </a:solidFill>
-                <a:latin typeface="Be Vietnam Pro" pitchFamily="34" charset="0"/>
-                <a:ea typeface="Be Vietnam Pro" pitchFamily="34" charset="-122"/>
-                <a:cs typeface="Be Vietnam Pro" pitchFamily="34" charset="-120"/>
-              </a:rPr>
-              <a:t> nguyên.</a:t>
+              <a:rPr lang="en-US" sz="2700" dirty="0" spc="12" kern="0">
+                <a:solidFill>
+                  <a:srgbClr val="14161C"/>
+                </a:solidFill>
+                <a:latin typeface="Be Vietnam Pro" pitchFamily="34" charset="0"/>
+                <a:ea typeface="Be Vietnam Pro" pitchFamily="34" charset="-122"/>
+                <a:cs typeface="Be Vietnam Pro" pitchFamily="34" charset="-120"/>
+              </a:rPr>
+              <a:t> đó.</a:t>
             </a:r>
             <a:endParaRPr lang="en-US" sz="2700" dirty="0"/>
           </a:p>
@@ -3949,6 +3940,17 @@
               <a:t> theo</a:t>
             </a:r>
             <a:r>
+              <a:rPr lang="en-US" sz="2550" dirty="0" spc="22" kern="0">
+                <a:solidFill>
+                  <a:srgbClr val="14161C"/>
+                </a:solidFill>
+                <a:latin typeface="Be Vietnam Pro" pitchFamily="34" charset="0"/>
+                <a:ea typeface="Be Vietnam Pro" pitchFamily="34" charset="-122"/>
+                <a:cs typeface="Be Vietnam Pro" pitchFamily="34" charset="-120"/>
+              </a:rPr>
+              <a:t> điều</a:t>
+            </a:r>
+            <a:r>
               <a:rPr lang="en-US" sz="2550" dirty="0" spc="-1" kern="0">
                 <a:solidFill>
                   <a:srgbClr val="14161C"/>
@@ -3957,7 +3959,40 @@
                 <a:ea typeface="Be Vietnam Pro" pitchFamily="34" charset="-122"/>
                 <a:cs typeface="Be Vietnam Pro" pitchFamily="34" charset="-120"/>
               </a:rPr>
-              <a:t> lý</a:t>
+              <a:t> mỗi nơi</a:t>
+            </a:r>
+            <a:r>
+              <a:rPr lang="en-US" sz="2550" dirty="0" spc="13" kern="0">
+                <a:solidFill>
+                  <a:srgbClr val="14161C"/>
+                </a:solidFill>
+                <a:latin typeface="Be Vietnam Pro" pitchFamily="34" charset="0"/>
+                <a:ea typeface="Be Vietnam Pro" pitchFamily="34" charset="-122"/>
+                <a:cs typeface="Be Vietnam Pro" pitchFamily="34" charset="-120"/>
+              </a:rPr>
+              <a:t> đòi</a:t>
+            </a:r>
+            <a:r>
+              <a:rPr lang="en-US" sz="2550" dirty="0" spc="-2" kern="0">
+                <a:solidFill>
+                  <a:srgbClr val="14161C"/>
+                </a:solidFill>
+                <a:latin typeface="Be Vietnam Pro" pitchFamily="34" charset="0"/>
+                <a:ea typeface="Be Vietnam Pro" pitchFamily="34" charset="-122"/>
+                <a:cs typeface="Be Vietnam Pro" pitchFamily="34" charset="-120"/>
+              </a:rPr>
+              <a:t> hỏi,</a:t>
+            </a:r>
+            <a:r>
+              <a:rPr lang="en-US" sz="2550" dirty="0" spc="-18" kern="0">
+                <a:solidFill>
+                  <a:srgbClr val="14161C"/>
+                </a:solidFill>
+                <a:latin typeface="Be Vietnam Pro" pitchFamily="34" charset="0"/>
+                <a:ea typeface="Be Vietnam Pro" pitchFamily="34" charset="-122"/>
+                <a:cs typeface="Be Vietnam Pro" pitchFamily="34" charset="-120"/>
+              </a:rPr>
+              <a:t> và</a:t>
             </a:r>
             <a:r>
               <a:rPr lang="en-US" sz="2550" dirty="0" spc="0" kern="0">
@@ -3968,7 +4003,51 @@
                 <a:ea typeface="Be Vietnam Pro" pitchFamily="34" charset="-122"/>
                 <a:cs typeface="Be Vietnam Pro" pitchFamily="34" charset="-120"/>
               </a:rPr>
-              <a:t> do</a:t>
+              <a:t> nhận</a:t>
+            </a:r>
+            <a:r>
+              <a:rPr lang="en-US" sz="2550" dirty="0" spc="-35" kern="0">
+                <a:solidFill>
+                  <a:srgbClr val="14161C"/>
+                </a:solidFill>
+                <a:latin typeface="Be Vietnam Pro" pitchFamily="34" charset="0"/>
+                <a:ea typeface="Be Vietnam Pro" pitchFamily="34" charset="-122"/>
+                <a:cs typeface="Be Vietnam Pro" pitchFamily="34" charset="-120"/>
+              </a:rPr>
+              <a:t> ra</a:t>
+            </a:r>
+            <a:r>
+              <a:rPr lang="en-US" sz="2550" dirty="0" spc="0" kern="0">
+                <a:solidFill>
+                  <a:srgbClr val="14161C"/>
+                </a:solidFill>
+                <a:latin typeface="Be Vietnam Pro" pitchFamily="34" charset="0"/>
+                <a:ea typeface="Be Vietnam Pro" pitchFamily="34" charset="-122"/>
+                <a:cs typeface="Be Vietnam Pro" pitchFamily="34" charset="-120"/>
+              </a:rPr>
+              <a:t> chỗ nào</a:t>
+            </a:r>
+            <a:r>
+              <a:rPr lang="en-US" sz="2550" dirty="0" spc="17" kern="0">
+                <a:solidFill>
+                  <a:srgbClr val="14161C"/>
+                </a:solidFill>
+                <a:latin typeface="Be Vietnam Pro" pitchFamily="34" charset="0"/>
+                <a:ea typeface="Be Vietnam Pro" pitchFamily="34" charset="-122"/>
+                <a:cs typeface="Be Vietnam Pro" pitchFamily="34" charset="-120"/>
+              </a:rPr>
+              <a:t> đã</a:t>
+            </a:r>
+            <a:r>
+              <a:rPr lang="en-US" sz="2550" dirty="0" spc="12" kern="0">
+                <a:solidFill>
+                  <a:srgbClr val="14161C"/>
+                </a:solidFill>
+                <a:latin typeface="Be Vietnam Pro" pitchFamily="34" charset="0"/>
+                <a:ea typeface="Be Vietnam Pro" pitchFamily="34" charset="-122"/>
+                <a:cs typeface="Be Vietnam Pro" pitchFamily="34" charset="-120"/>
+              </a:rPr>
+              <a:t> đối</a:t>
             </a:r>
             <a:r>
               <a:rPr lang="en-US" sz="2550" dirty="0" spc="1" kern="0">
@@ -3979,29 +4058,18 @@
                 <a:ea typeface="Be Vietnam Pro" pitchFamily="34" charset="-122"/>
                 <a:cs typeface="Be Vietnam Pro" pitchFamily="34" charset="-120"/>
               </a:rPr>
-              <a:t> nguồn</a:t>
-            </a:r>
-            <a:r>
-              <a:rPr lang="en-US" sz="2550" dirty="0" spc="-1" kern="0">
-                <a:solidFill>
-                  <a:srgbClr val="14161C"/>
-                </a:solidFill>
-                <a:latin typeface="Be Vietnam Pro" pitchFamily="34" charset="0"/>
-                <a:ea typeface="Be Vietnam Pro" pitchFamily="34" charset="-122"/>
-                <a:cs typeface="Be Vietnam Pro" pitchFamily="34" charset="-120"/>
-              </a:rPr>
-              <a:t> ghi,</a:t>
-            </a:r>
-            <a:r>
-              <a:rPr lang="en-US" sz="2550" dirty="0" spc="-19" kern="0">
-                <a:solidFill>
-                  <a:srgbClr val="14161C"/>
-                </a:solidFill>
-                <a:latin typeface="Be Vietnam Pro" pitchFamily="34" charset="0"/>
-                <a:ea typeface="Be Vietnam Pro" pitchFamily="34" charset="-122"/>
-                <a:cs typeface="Be Vietnam Pro" pitchFamily="34" charset="-120"/>
-              </a:rPr>
-              <a:t> và</a:t>
+              <a:t> chiếu</a:t>
+            </a:r>
+            <a:r>
+              <a:rPr lang="en-US" sz="2550" dirty="0" spc="-11" kern="0">
+                <a:solidFill>
+                  <a:srgbClr val="14161C"/>
+                </a:solidFill>
+                <a:latin typeface="Be Vietnam Pro" pitchFamily="34" charset="0"/>
+                <a:ea typeface="Be Vietnam Pro" pitchFamily="34" charset="-122"/>
+                <a:cs typeface="Be Vietnam Pro" pitchFamily="34" charset="-120"/>
+              </a:rPr>
+              <a:t> tài</a:t>
             </a:r>
             <a:r>
               <a:rPr lang="en-US" sz="2550" dirty="0" spc="1" kern="0">
@@ -4012,73 +4080,7 @@
                 <a:ea typeface="Be Vietnam Pro" pitchFamily="34" charset="-122"/>
                 <a:cs typeface="Be Vietnam Pro" pitchFamily="34" charset="-120"/>
               </a:rPr>
-              <a:t> chỉ</a:t>
-            </a:r>
-            <a:r>
-              <a:rPr lang="en-US" sz="2550" dirty="0" spc="-35" kern="0">
-                <a:solidFill>
-                  <a:srgbClr val="14161C"/>
-                </a:solidFill>
-                <a:latin typeface="Be Vietnam Pro" pitchFamily="34" charset="0"/>
-                <a:ea typeface="Be Vietnam Pro" pitchFamily="34" charset="-122"/>
-                <a:cs typeface="Be Vietnam Pro" pitchFamily="34" charset="-120"/>
-              </a:rPr>
-              <a:t> ra</a:t>
-            </a:r>
-            <a:r>
-              <a:rPr lang="en-US" sz="2550" dirty="0" spc="-5" kern="0">
-                <a:solidFill>
-                  <a:srgbClr val="14161C"/>
-                </a:solidFill>
-                <a:latin typeface="Be Vietnam Pro" pitchFamily="34" charset="0"/>
-                <a:ea typeface="Be Vietnam Pro" pitchFamily="34" charset="-122"/>
-                <a:cs typeface="Be Vietnam Pro" pitchFamily="34" charset="-120"/>
-              </a:rPr>
-              <a:t> một</a:t>
-            </a:r>
-            <a:r>
-              <a:rPr lang="en-US" sz="2550" dirty="0" spc="-1" kern="0">
-                <a:solidFill>
-                  <a:srgbClr val="14161C"/>
-                </a:solidFill>
-                <a:latin typeface="Be Vietnam Pro" pitchFamily="34" charset="0"/>
-                <a:ea typeface="Be Vietnam Pro" pitchFamily="34" charset="-122"/>
-                <a:cs typeface="Be Vietnam Pro" pitchFamily="34" charset="-120"/>
-              </a:rPr>
-              <a:t> mục</a:t>
-            </a:r>
-            <a:r>
-              <a:rPr lang="en-US" sz="2550" dirty="0" spc="1" kern="0">
-                <a:solidFill>
-                  <a:srgbClr val="14161C"/>
-                </a:solidFill>
-                <a:latin typeface="Be Vietnam Pro" pitchFamily="34" charset="0"/>
-                <a:ea typeface="Be Vietnam Pro" pitchFamily="34" charset="-122"/>
-                <a:cs typeface="Be Vietnam Pro" pitchFamily="34" charset="-120"/>
-              </a:rPr>
-              <a:t> nguồn</a:t>
-            </a:r>
-            <a:r>
-              <a:rPr lang="en-US" sz="2550" dirty="0" spc="17" kern="0">
-                <a:solidFill>
-                  <a:srgbClr val="14161C"/>
-                </a:solidFill>
-                <a:latin typeface="Be Vietnam Pro" pitchFamily="34" charset="0"/>
-                <a:ea typeface="Be Vietnam Pro" pitchFamily="34" charset="-122"/>
-                <a:cs typeface="Be Vietnam Pro" pitchFamily="34" charset="-120"/>
-              </a:rPr>
-              <a:t> để</a:t>
-            </a:r>
-            <a:r>
-              <a:rPr lang="en-US" sz="2550" dirty="0" spc="-13" kern="0">
-                <a:solidFill>
-                  <a:srgbClr val="14161C"/>
-                </a:solidFill>
-                <a:latin typeface="Be Vietnam Pro" pitchFamily="34" charset="0"/>
-                <a:ea typeface="Be Vietnam Pro" pitchFamily="34" charset="-122"/>
-                <a:cs typeface="Be Vietnam Pro" pitchFamily="34" charset="-120"/>
-              </a:rPr>
-              <a:t> trống.</a:t>
+              <a:t> liệu.</a:t>
             </a:r>
             <a:endParaRPr lang="en-US" sz="2550" dirty="0"/>
           </a:p>
@@ -4241,7 +4243,7 @@
               <a:buNone/>
             </a:pPr>
             <a:r>
-              <a:rPr lang="en-US" sz="2400" b="1" dirty="0" spc="-3" kern="0">
+              <a:rPr lang="en-US" sz="2400" b="1" dirty="0" spc="2" kern="0">
                 <a:solidFill>
                   <a:srgbClr val="1F3FD1"/>
                 </a:solidFill>
@@ -4249,7 +4251,7 @@
                 <a:ea typeface="Be Vietnam Pro" pitchFamily="34" charset="-122"/>
                 <a:cs typeface="Be Vietnam Pro" pitchFamily="34" charset="-120"/>
               </a:rPr>
-              <a:t>Điều</a:t>
+              <a:t>Gần</a:t>
             </a:r>
             <a:r>
               <a:rPr lang="en-US" sz="2400" b="1" dirty="0" spc="-4" kern="0">
@@ -4260,7 +4262,7 @@
                 <a:ea typeface="Be Vietnam Pro" pitchFamily="34" charset="-122"/>
                 <a:cs typeface="Be Vietnam Pro" pitchFamily="34" charset="-120"/>
               </a:rPr>
-              <a:t> khiển phần</a:t>
+              <a:t> phần</a:t>
             </a:r>
             <a:r>
               <a:rPr lang="en-US" sz="2400" b="1" dirty="0" spc="21" kern="0">
@@ -4272,39 +4274,6 @@
                 <a:cs typeface="Be Vietnam Pro" pitchFamily="34" charset="-120"/>
               </a:rPr>
               <a:t> cứng</a:t>
-            </a:r>
-            <a:r>
-              <a:rPr lang="en-US" sz="2400" b="1" dirty="0" spc="-18" kern="0">
-                <a:solidFill>
-                  <a:srgbClr val="1F3FD1"/>
-                </a:solidFill>
-                <a:latin typeface="Be Vietnam Pro" pitchFamily="34" charset="0"/>
-                <a:ea typeface="Be Vietnam Pro" pitchFamily="34" charset="-122"/>
-                <a:cs typeface="Be Vietnam Pro" pitchFamily="34" charset="-120"/>
-              </a:rPr>
-              <a:t> và</a:t>
-            </a:r>
-            <a:r>
-              <a:rPr lang="en-US" sz="2400" b="1" dirty="0" spc="-7" kern="0">
-                <a:solidFill>
-                  <a:srgbClr val="1F3FD1"/>
-                </a:solidFill>
-                <a:latin typeface="Be Vietnam Pro" pitchFamily="34" charset="0"/>
-                <a:ea typeface="Be Vietnam Pro" pitchFamily="34" charset="-122"/>
-                <a:cs typeface="Be Vietnam Pro" pitchFamily="34" charset="-120"/>
-              </a:rPr>
-              <a:t> hệ</a:t>
-            </a:r>
-            <a:r>
-              <a:rPr lang="en-US" sz="2400" b="1" dirty="0" spc="-8" kern="0">
-                <a:solidFill>
-                  <a:srgbClr val="1F3FD1"/>
-                </a:solidFill>
-                <a:latin typeface="Be Vietnam Pro" pitchFamily="34" charset="0"/>
-                <a:ea typeface="Be Vietnam Pro" pitchFamily="34" charset="-122"/>
-                <a:cs typeface="Be Vietnam Pro" pitchFamily="34" charset="-120"/>
-              </a:rPr>
-              <a:t> thống</a:t>
             </a:r>
             <a:endParaRPr lang="en-US" sz="2400" dirty="0"/>
           </a:p>
@@ -4541,6 +4510,17 @@
               <a:t>Cần</a:t>
             </a:r>
             <a:r>
+              <a:rPr lang="en-US" sz="2400" b="1" dirty="0" spc="-10" kern="0">
+                <a:solidFill>
+                  <a:srgbClr val="0F766E"/>
+                </a:solidFill>
+                <a:latin typeface="Be Vietnam Pro" pitchFamily="34" charset="0"/>
+                <a:ea typeface="Be Vietnam Pro" pitchFamily="34" charset="-122"/>
+                <a:cs typeface="Be Vietnam Pro" pitchFamily="34" charset="-120"/>
+              </a:rPr>
+              <a:t> chạy</a:t>
+            </a:r>
+            <a:r>
               <a:rPr lang="en-US" sz="2400" b="1" dirty="0" spc="-2" kern="0">
                 <a:solidFill>
                   <a:srgbClr val="0F766E"/>
@@ -4549,29 +4529,7 @@
                 <a:ea typeface="Be Vietnam Pro" pitchFamily="34" charset="-122"/>
                 <a:cs typeface="Be Vietnam Pro" pitchFamily="34" charset="-120"/>
               </a:rPr>
-              <a:t> hiệu</a:t>
-            </a:r>
-            <a:r>
-              <a:rPr lang="en-US" sz="2400" b="1" dirty="0" spc="-5" kern="0">
-                <a:solidFill>
-                  <a:srgbClr val="0F766E"/>
-                </a:solidFill>
-                <a:latin typeface="Be Vietnam Pro" pitchFamily="34" charset="0"/>
-                <a:ea typeface="Be Vietnam Pro" pitchFamily="34" charset="-122"/>
-                <a:cs typeface="Be Vietnam Pro" pitchFamily="34" charset="-120"/>
-              </a:rPr>
-              <a:t> năng</a:t>
-            </a:r>
-            <a:r>
-              <a:rPr lang="en-US" sz="2400" b="1" dirty="0" spc="2" kern="0">
-                <a:solidFill>
-                  <a:srgbClr val="0F766E"/>
-                </a:solidFill>
-                <a:latin typeface="Be Vietnam Pro" pitchFamily="34" charset="0"/>
-                <a:ea typeface="Be Vietnam Pro" pitchFamily="34" charset="-122"/>
-                <a:cs typeface="Be Vietnam Pro" pitchFamily="34" charset="-120"/>
-              </a:rPr>
-              <a:t> cao</a:t>
+              <a:t> nhanh</a:t>
             </a:r>
             <a:endParaRPr lang="en-US" sz="2400" dirty="0"/>
           </a:p>
@@ -4830,7 +4788,7 @@
               <a:t>Hai</a:t>
             </a:r>
             <a:r>
-              <a:rPr lang="en-US" sz="2400" b="1" dirty="0" spc="1" kern="0">
+              <a:rPr lang="en-US" sz="2400" b="1" dirty="0" spc="0" kern="0">
                 <a:solidFill>
                   <a:srgbClr val="B45309"/>
                 </a:solidFill>
@@ -4838,7 +4796,18 @@
                 <a:ea typeface="Be Vietnam Pro" pitchFamily="34" charset="-122"/>
                 <a:cs typeface="Be Vietnam Pro" pitchFamily="34" charset="-120"/>
               </a:rPr>
-              <a:t> mục</a:t>
+              <a:t> lĩnh</a:t>
+            </a:r>
+            <a:r>
+              <a:rPr lang="en-US" sz="2400" b="1" dirty="0" spc="14" kern="0">
+                <a:solidFill>
+                  <a:srgbClr val="B45309"/>
+                </a:solidFill>
+                <a:latin typeface="Be Vietnam Pro" pitchFamily="34" charset="0"/>
+                <a:ea typeface="Be Vietnam Pro" pitchFamily="34" charset="-122"/>
+                <a:cs typeface="Be Vietnam Pro" pitchFamily="34" charset="-120"/>
+              </a:rPr>
+              <a:t> vực</a:t>
             </a:r>
             <a:r>
               <a:rPr lang="en-US" sz="2400" b="1" dirty="0" spc="-7" kern="0">
@@ -5463,7 +5432,7 @@
               <a:t> ·</a:t>
             </a:r>
             <a:r>
-              <a:rPr lang="en-US" sz="1950" b="1" spc="226" kern="0" dirty="0">
+              <a:rPr lang="en-US" sz="1950" b="1" spc="225" kern="0" dirty="0">
                 <a:solidFill>
                   <a:srgbClr val="7C93FF"/>
                 </a:solidFill>
@@ -5471,7 +5440,7 @@
                 <a:ea typeface="Be Vietnam Pro" pitchFamily="34" charset="-122"/>
                 <a:cs typeface="Be Vietnam Pro" pitchFamily="34" charset="-120"/>
               </a:rPr>
-              <a:t> ĐIỀU</a:t>
+              <a:t> GẦN</a:t>
             </a:r>
             <a:r>
               <a:rPr lang="en-US" sz="1950" b="1" spc="224" kern="0" dirty="0">
@@ -5482,7 +5451,7 @@
                 <a:ea typeface="Be Vietnam Pro" pitchFamily="34" charset="-122"/>
                 <a:cs typeface="Be Vietnam Pro" pitchFamily="34" charset="-120"/>
               </a:rPr>
-              <a:t> KHIỂN PHẦN</a:t>
+              <a:t> PHẦN</a:t>
             </a:r>
             <a:r>
               <a:rPr lang="en-US" sz="1950" b="1" spc="246" kern="0" dirty="0">
@@ -5494,39 +5463,6 @@
                 <a:cs typeface="Be Vietnam Pro" pitchFamily="34" charset="-120"/>
               </a:rPr>
               <a:t> CỨNG</a:t>
-            </a:r>
-            <a:r>
-              <a:rPr lang="en-US" sz="1950" b="1" spc="174" kern="0" dirty="0">
-                <a:solidFill>
-                  <a:srgbClr val="7C93FF"/>
-                </a:solidFill>
-                <a:latin typeface="Be Vietnam Pro" pitchFamily="34" charset="0"/>
-                <a:ea typeface="Be Vietnam Pro" pitchFamily="34" charset="-122"/>
-                <a:cs typeface="Be Vietnam Pro" pitchFamily="34" charset="-120"/>
-              </a:rPr>
-              <a:t> VÀ</a:t>
-            </a:r>
-            <a:r>
-              <a:rPr lang="en-US" sz="1950" b="1" spc="225" kern="0" dirty="0">
-                <a:solidFill>
-                  <a:srgbClr val="7C93FF"/>
-                </a:solidFill>
-                <a:latin typeface="Be Vietnam Pro" pitchFamily="34" charset="0"/>
-                <a:ea typeface="Be Vietnam Pro" pitchFamily="34" charset="-122"/>
-                <a:cs typeface="Be Vietnam Pro" pitchFamily="34" charset="-120"/>
-              </a:rPr>
-              <a:t> HỆ</a:t>
-            </a:r>
-            <a:r>
-              <a:rPr lang="en-US" sz="1950" b="1" spc="226" kern="0" dirty="0">
-                <a:solidFill>
-                  <a:srgbClr val="7C93FF"/>
-                </a:solidFill>
-                <a:latin typeface="Be Vietnam Pro" pitchFamily="34" charset="0"/>
-                <a:ea typeface="Be Vietnam Pro" pitchFamily="34" charset="-122"/>
-                <a:cs typeface="Be Vietnam Pro" pitchFamily="34" charset="-120"/>
-              </a:rPr>
-              <a:t> THỐNG</a:t>
             </a:r>
             <a:endParaRPr lang="en-US" sz="1950" dirty="0"/>
           </a:p>
@@ -5560,7 +5496,7 @@
               <a:buNone/>
             </a:pPr>
             <a:r>
-              <a:rPr lang="en-US" sz="7500" dirty="0" spc="-1" kern="0">
+              <a:rPr lang="en-US" sz="7500" dirty="0" spc="2" kern="0">
                 <a:solidFill>
                   <a:srgbClr val="F3EEE3"/>
                 </a:solidFill>
@@ -5568,10 +5504,10 @@
                 <a:ea typeface="Bricolage Grotesque ExtraBold" pitchFamily="34" charset="-122"/>
                 <a:cs typeface="Bricolage Grotesque ExtraBold" pitchFamily="34" charset="-120"/>
               </a:rPr>
-              <a:t>Phần</a:t>
-            </a:r>
-            <a:r>
-              <a:rPr lang="en-US" sz="7500" dirty="0" spc="11" kern="0">
+              <a:t>Gần</a:t>
+            </a:r>
+            <a:r>
+              <a:rPr lang="en-US" sz="7500" dirty="0" spc="4" kern="0">
                 <a:solidFill>
                   <a:srgbClr val="F3EEE3"/>
                 </a:solidFill>
@@ -5579,19 +5515,10 @@
                 <a:ea typeface="Bricolage Grotesque ExtraBold" pitchFamily="34" charset="-122"/>
                 <a:cs typeface="Bricolage Grotesque ExtraBold" pitchFamily="34" charset="-120"/>
               </a:rPr>
-              <a:t> cứng</a:t>
-            </a:r>
-            <a:endParaRPr lang="en-US" sz="7500" dirty="0"/>
-          </a:p>
-          <a:p>
-            <a:pPr algn="l" indent="0" marL="0">
-              <a:lnSpc>
-                <a:spcPts val="7875"/>
-              </a:lnSpc>
-              <a:buNone/>
-            </a:pPr>
-            <a:r>
-              <a:rPr lang="en-US" sz="7500" dirty="0" spc="-121" kern="0">
+              <a:t> phần</a:t>
+            </a:r>
+            <a:r>
+              <a:rPr lang="en-US" sz="7500" dirty="0" spc="10" kern="0">
                 <a:solidFill>
                   <a:srgbClr val="F3EEE3"/>
                 </a:solidFill>
@@ -5599,18 +5526,7 @@
                 <a:ea typeface="Bricolage Grotesque ExtraBold" pitchFamily="34" charset="-122"/>
                 <a:cs typeface="Bricolage Grotesque ExtraBold" pitchFamily="34" charset="-120"/>
               </a:rPr>
-              <a:t>và</a:t>
-            </a:r>
-            <a:r>
-              <a:rPr lang="en-US" sz="7500" dirty="0" spc="1" kern="0">
-                <a:solidFill>
-                  <a:srgbClr val="F3EEE3"/>
-                </a:solidFill>
-                <a:latin typeface="Bricolage Grotesque ExtraBold" pitchFamily="34" charset="0"/>
-                <a:ea typeface="Bricolage Grotesque ExtraBold" pitchFamily="34" charset="-122"/>
-                <a:cs typeface="Bricolage Grotesque ExtraBold" pitchFamily="34" charset="-120"/>
-              </a:rPr>
-              <a:t> hệ thống</a:t>
+              <a:t> cứng</a:t>
             </a:r>
             <a:endParaRPr lang="en-US" sz="7500" dirty="0"/>
           </a:p>
@@ -5685,7 +5601,7 @@
               <a:t> ba</a:t>
             </a:r>
             <a:r>
-              <a:rPr lang="en-US" sz="3000" b="1" dirty="0" spc="3" kern="0">
+              <a:rPr lang="en-US" sz="3000" b="1" dirty="0" spc="7" kern="0">
                 <a:solidFill>
                   <a:srgbClr val="7C93FF"/>
                 </a:solidFill>
@@ -5693,7 +5609,7 @@
                 <a:ea typeface="Be Vietnam Pro" pitchFamily="34" charset="-122"/>
                 <a:cs typeface="Be Vietnam Pro" pitchFamily="34" charset="-120"/>
               </a:rPr>
-              <a:t> lý</a:t>
+              <a:t> đòi</a:t>
             </a:r>
             <a:r>
               <a:rPr lang="en-US" sz="3000" b="1" dirty="0" spc="-4" kern="0">
@@ -5704,7 +5620,7 @@
                 <a:ea typeface="Be Vietnam Pro" pitchFamily="34" charset="-122"/>
                 <a:cs typeface="Be Vietnam Pro" pitchFamily="34" charset="-120"/>
               </a:rPr>
-              <a:t> do</a:t>
+              <a:t> hỏi</a:t>
             </a:r>
             <a:endParaRPr lang="en-US" sz="3000" dirty="0"/>
           </a:p>
@@ -5746,7 +5662,95 @@
                 <a:ea typeface="Be Vietnam Pro" pitchFamily="34" charset="-122"/>
                 <a:cs typeface="Be Vietnam Pro" pitchFamily="34" charset="-120"/>
               </a:rPr>
-              <a:t>Nguồn</a:t>
+              <a:t>Mỗi</a:t>
+            </a:r>
+            <a:r>
+              <a:rPr lang="en-US" sz="2700" dirty="0" spc="-2" kern="0">
+                <a:solidFill>
+                  <a:srgbClr val="C4C8D6"/>
+                </a:solidFill>
+                <a:latin typeface="Be Vietnam Pro" pitchFamily="34" charset="0"/>
+                <a:ea typeface="Be Vietnam Pro" pitchFamily="34" charset="-122"/>
+                <a:cs typeface="Be Vietnam Pro" pitchFamily="34" charset="-120"/>
+              </a:rPr>
+              <a:t> lĩnh</a:t>
+            </a:r>
+            <a:r>
+              <a:rPr lang="en-US" sz="2700" dirty="0" spc="11" kern="0">
+                <a:solidFill>
+                  <a:srgbClr val="C4C8D6"/>
+                </a:solidFill>
+                <a:latin typeface="Be Vietnam Pro" pitchFamily="34" charset="0"/>
+                <a:ea typeface="Be Vietnam Pro" pitchFamily="34" charset="-122"/>
+                <a:cs typeface="Be Vietnam Pro" pitchFamily="34" charset="-120"/>
+              </a:rPr>
+              <a:t> vực</a:t>
+            </a:r>
+            <a:r>
+              <a:rPr lang="en-US" sz="2700" dirty="0" spc="12" kern="0">
+                <a:solidFill>
+                  <a:srgbClr val="C4C8D6"/>
+                </a:solidFill>
+                <a:latin typeface="Be Vietnam Pro" pitchFamily="34" charset="0"/>
+                <a:ea typeface="Be Vietnam Pro" pitchFamily="34" charset="-122"/>
+                <a:cs typeface="Be Vietnam Pro" pitchFamily="34" charset="-120"/>
+              </a:rPr>
+              <a:t> đòi</a:t>
+            </a:r>
+            <a:r>
+              <a:rPr lang="en-US" sz="2700" dirty="0" spc="-8" kern="0">
+                <a:solidFill>
+                  <a:srgbClr val="C4C8D6"/>
+                </a:solidFill>
+                <a:latin typeface="Be Vietnam Pro" pitchFamily="34" charset="0"/>
+                <a:ea typeface="Be Vietnam Pro" pitchFamily="34" charset="-122"/>
+                <a:cs typeface="Be Vietnam Pro" pitchFamily="34" charset="-120"/>
+              </a:rPr>
+              <a:t> một</a:t>
+            </a:r>
+            <a:r>
+              <a:rPr lang="en-US" sz="2700" dirty="0" spc="21" kern="0">
+                <a:solidFill>
+                  <a:srgbClr val="C4C8D6"/>
+                </a:solidFill>
+                <a:latin typeface="Be Vietnam Pro" pitchFamily="34" charset="0"/>
+                <a:ea typeface="Be Vietnam Pro" pitchFamily="34" charset="-122"/>
+                <a:cs typeface="Be Vietnam Pro" pitchFamily="34" charset="-120"/>
+              </a:rPr>
+              <a:t> điều</a:t>
+            </a:r>
+            <a:r>
+              <a:rPr lang="en-US" sz="2700" dirty="0" spc="-1" kern="0">
+                <a:solidFill>
+                  <a:srgbClr val="C4C8D6"/>
+                </a:solidFill>
+                <a:latin typeface="Be Vietnam Pro" pitchFamily="34" charset="0"/>
+                <a:ea typeface="Be Vietnam Pro" pitchFamily="34" charset="-122"/>
+                <a:cs typeface="Be Vietnam Pro" pitchFamily="34" charset="-120"/>
+              </a:rPr>
+              <a:t> khác.</a:t>
+            </a:r>
+            <a:r>
+              <a:rPr lang="en-US" sz="2700" dirty="0" spc="1" kern="0">
+                <a:solidFill>
+                  <a:srgbClr val="C4C8D6"/>
+                </a:solidFill>
+                <a:latin typeface="Be Vietnam Pro" pitchFamily="34" charset="0"/>
+                <a:ea typeface="Be Vietnam Pro" pitchFamily="34" charset="-122"/>
+                <a:cs typeface="Be Vietnam Pro" pitchFamily="34" charset="-120"/>
+              </a:rPr>
+              <a:t> Cách</a:t>
+            </a:r>
+            <a:r>
+              <a:rPr lang="en-US" sz="2700" dirty="0" spc="0" kern="0">
+                <a:solidFill>
+                  <a:srgbClr val="C4C8D6"/>
+                </a:solidFill>
+                <a:latin typeface="Be Vietnam Pro" pitchFamily="34" charset="0"/>
+                <a:ea typeface="Be Vietnam Pro" pitchFamily="34" charset="-122"/>
+                <a:cs typeface="Be Vietnam Pro" pitchFamily="34" charset="-120"/>
+              </a:rPr>
+              <a:t> chia</a:t>
             </a:r>
             <a:r>
               <a:rPr lang="en-US" sz="2700" dirty="0" spc="-3" kern="0">
@@ -5757,10 +5761,10 @@
                 <a:ea typeface="Be Vietnam Pro" pitchFamily="34" charset="-122"/>
                 <a:cs typeface="Be Vietnam Pro" pitchFamily="34" charset="-120"/>
               </a:rPr>
-              <a:t> nêu</a:t>
-            </a:r>
-            <a:r>
-              <a:rPr lang="en-US" sz="2700" dirty="0" spc="-7" kern="0">
+              <a:t> nhóm</a:t>
+            </a:r>
+            <a:r>
+              <a:rPr lang="en-US" sz="2700" dirty="0" spc="-17" kern="0">
                 <a:solidFill>
                   <a:srgbClr val="C4C8D6"/>
                 </a:solidFill>
@@ -5768,7 +5772,7 @@
                 <a:ea typeface="Be Vietnam Pro" pitchFamily="34" charset="-122"/>
                 <a:cs typeface="Be Vietnam Pro" pitchFamily="34" charset="-120"/>
               </a:rPr>
-              <a:t> một</a:t>
+              <a:t> và</a:t>
             </a:r>
             <a:r>
               <a:rPr lang="en-US" sz="2700" dirty="0" spc="-1" kern="0">
@@ -5779,10 +5783,10 @@
                 <a:ea typeface="Be Vietnam Pro" pitchFamily="34" charset="-122"/>
                 <a:cs typeface="Be Vietnam Pro" pitchFamily="34" charset="-120"/>
               </a:rPr>
-              <a:t> lý</a:t>
-            </a:r>
-            <a:r>
-              <a:rPr lang="en-US" sz="2700" dirty="0" spc="-4" kern="0">
+              <a:t> lời giải</a:t>
+            </a:r>
+            <a:r>
+              <a:rPr lang="en-US" sz="2700" dirty="0" spc="0" kern="0">
                 <a:solidFill>
                   <a:srgbClr val="C4C8D6"/>
                 </a:solidFill>
@@ -5790,7 +5794,29 @@
                 <a:ea typeface="Be Vietnam Pro" pitchFamily="34" charset="-122"/>
                 <a:cs typeface="Be Vietnam Pro" pitchFamily="34" charset="-120"/>
               </a:rPr>
-              <a:t> do</a:t>
+              <a:t> thích</a:t>
+            </a:r>
+            <a:r>
+              <a:rPr lang="en-US" sz="2700" dirty="0" spc="-1" kern="0">
+                <a:solidFill>
+                  <a:srgbClr val="C4C8D6"/>
+                </a:solidFill>
+                <a:latin typeface="Be Vietnam Pro" pitchFamily="34" charset="0"/>
+                <a:ea typeface="Be Vietnam Pro" pitchFamily="34" charset="-122"/>
+                <a:cs typeface="Be Vietnam Pro" pitchFamily="34" charset="-120"/>
+              </a:rPr>
+              <a:t> là</a:t>
+            </a:r>
+            <a:r>
+              <a:rPr lang="en-US" sz="2700" dirty="0" spc="-2" kern="0">
+                <a:solidFill>
+                  <a:srgbClr val="C4C8D6"/>
+                </a:solidFill>
+                <a:latin typeface="Be Vietnam Pro" pitchFamily="34" charset="0"/>
+                <a:ea typeface="Be Vietnam Pro" pitchFamily="34" charset="-122"/>
+                <a:cs typeface="Be Vietnam Pro" pitchFamily="34" charset="-120"/>
+              </a:rPr>
+              <a:t> của</a:t>
             </a:r>
             <a:r>
               <a:rPr lang="en-US" sz="2700" dirty="0" spc="6" kern="0">
@@ -5801,10 +5827,10 @@
                 <a:ea typeface="Be Vietnam Pro" pitchFamily="34" charset="-122"/>
                 <a:cs typeface="Be Vietnam Pro" pitchFamily="34" charset="-120"/>
               </a:rPr>
-              <a:t> riêng</a:t>
-            </a:r>
-            <a:r>
-              <a:rPr lang="en-US" sz="2700" dirty="0" spc="-1" kern="0">
+              <a:t> người</a:t>
+            </a:r>
+            <a:r>
+              <a:rPr lang="en-US" sz="2700" dirty="0" spc="-3" kern="0">
                 <a:solidFill>
                   <a:srgbClr val="C4C8D6"/>
                 </a:solidFill>
@@ -5812,120 +5838,10 @@
                 <a:ea typeface="Be Vietnam Pro" pitchFamily="34" charset="-122"/>
                 <a:cs typeface="Be Vietnam Pro" pitchFamily="34" charset="-120"/>
               </a:rPr>
-              <a:t> cho</a:t>
-            </a:r>
-            <a:r>
-              <a:rPr lang="en-US" sz="2700" dirty="0" spc="20" kern="0">
-                <a:solidFill>
-                  <a:srgbClr val="C4C8D6"/>
-                </a:solidFill>
-                <a:latin typeface="Be Vietnam Pro" pitchFamily="34" charset="0"/>
-                <a:ea typeface="Be Vietnam Pro" pitchFamily="34" charset="-122"/>
-                <a:cs typeface="Be Vietnam Pro" pitchFamily="34" charset="-120"/>
-              </a:rPr>
-              <a:t> từng</a:t>
-            </a:r>
-            <a:r>
-              <a:rPr lang="en-US" sz="2700" dirty="0" spc="-2" kern="0">
-                <a:solidFill>
-                  <a:srgbClr val="C4C8D6"/>
-                </a:solidFill>
-                <a:latin typeface="Be Vietnam Pro" pitchFamily="34" charset="0"/>
-                <a:ea typeface="Be Vietnam Pro" pitchFamily="34" charset="-122"/>
-                <a:cs typeface="Be Vietnam Pro" pitchFamily="34" charset="-120"/>
-              </a:rPr>
-              <a:t> lĩnh</a:t>
-            </a:r>
-            <a:r>
-              <a:rPr lang="en-US" sz="2700" dirty="0" spc="8" kern="0">
-                <a:solidFill>
-                  <a:srgbClr val="C4C8D6"/>
-                </a:solidFill>
-                <a:latin typeface="Be Vietnam Pro" pitchFamily="34" charset="0"/>
-                <a:ea typeface="Be Vietnam Pro" pitchFamily="34" charset="-122"/>
-                <a:cs typeface="Be Vietnam Pro" pitchFamily="34" charset="-120"/>
-              </a:rPr>
-              <a:t> vực.</a:t>
-            </a:r>
-            <a:r>
-              <a:rPr lang="en-US" sz="2700" dirty="0" spc="1" kern="0">
-                <a:solidFill>
-                  <a:srgbClr val="C4C8D6"/>
-                </a:solidFill>
-                <a:latin typeface="Be Vietnam Pro" pitchFamily="34" charset="0"/>
-                <a:ea typeface="Be Vietnam Pro" pitchFamily="34" charset="-122"/>
-                <a:cs typeface="Be Vietnam Pro" pitchFamily="34" charset="-120"/>
-              </a:rPr>
-              <a:t> Cách</a:t>
-            </a:r>
-            <a:r>
-              <a:rPr lang="en-US" sz="2700" dirty="0" spc="-1" kern="0">
-                <a:solidFill>
-                  <a:srgbClr val="C4C8D6"/>
-                </a:solidFill>
-                <a:latin typeface="Be Vietnam Pro" pitchFamily="34" charset="0"/>
-                <a:ea typeface="Be Vietnam Pro" pitchFamily="34" charset="-122"/>
-                <a:cs typeface="Be Vietnam Pro" pitchFamily="34" charset="-120"/>
-              </a:rPr>
-              <a:t> chia</a:t>
-            </a:r>
-            <a:r>
-              <a:rPr lang="en-US" sz="2700" dirty="0" spc="-2" kern="0">
-                <a:solidFill>
-                  <a:srgbClr val="C4C8D6"/>
-                </a:solidFill>
-                <a:latin typeface="Be Vietnam Pro" pitchFamily="34" charset="0"/>
-                <a:ea typeface="Be Vietnam Pro" pitchFamily="34" charset="-122"/>
-                <a:cs typeface="Be Vietnam Pro" pitchFamily="34" charset="-120"/>
-              </a:rPr>
-              <a:t> nhóm</a:t>
-            </a:r>
-            <a:r>
-              <a:rPr lang="en-US" sz="2700" dirty="0" spc="0" kern="0">
-                <a:solidFill>
-                  <a:srgbClr val="C4C8D6"/>
-                </a:solidFill>
-                <a:latin typeface="Be Vietnam Pro" pitchFamily="34" charset="0"/>
-                <a:ea typeface="Be Vietnam Pro" pitchFamily="34" charset="-122"/>
-                <a:cs typeface="Be Vietnam Pro" pitchFamily="34" charset="-120"/>
-              </a:rPr>
-              <a:t> là</a:t>
-            </a:r>
-            <a:r>
-              <a:rPr lang="en-US" sz="2700" dirty="0" spc="-2" kern="0">
-                <a:solidFill>
-                  <a:srgbClr val="C4C8D6"/>
-                </a:solidFill>
-                <a:latin typeface="Be Vietnam Pro" pitchFamily="34" charset="0"/>
-                <a:ea typeface="Be Vietnam Pro" pitchFamily="34" charset="-122"/>
-                <a:cs typeface="Be Vietnam Pro" pitchFamily="34" charset="-120"/>
-              </a:rPr>
-              <a:t> của</a:t>
-            </a:r>
-            <a:r>
-              <a:rPr lang="en-US" sz="2700" dirty="0" spc="6" kern="0">
-                <a:solidFill>
-                  <a:srgbClr val="C4C8D6"/>
-                </a:solidFill>
-                <a:latin typeface="Be Vietnam Pro" pitchFamily="34" charset="0"/>
-                <a:ea typeface="Be Vietnam Pro" pitchFamily="34" charset="-122"/>
-                <a:cs typeface="Be Vietnam Pro" pitchFamily="34" charset="-120"/>
-              </a:rPr>
-              <a:t> người</a:t>
-            </a:r>
-            <a:r>
-              <a:rPr lang="en-US" sz="2700" dirty="0" spc="-3" kern="0">
-                <a:solidFill>
-                  <a:srgbClr val="C4C8D6"/>
-                </a:solidFill>
-                <a:latin typeface="Be Vietnam Pro" pitchFamily="34" charset="0"/>
-                <a:ea typeface="Be Vietnam Pro" pitchFamily="34" charset="-122"/>
-                <a:cs typeface="Be Vietnam Pro" pitchFamily="34" charset="-120"/>
-              </a:rPr>
               <a:t> biên</a:t>
             </a:r>
             <a:r>
-              <a:rPr lang="en-US" sz="2700" dirty="0" spc="-10" kern="0">
+              <a:rPr lang="en-US" sz="2700" dirty="0" spc="-9" kern="0">
                 <a:solidFill>
                   <a:srgbClr val="C4C8D6"/>
                 </a:solidFill>
@@ -6039,7 +5955,7 @@
               <a:buNone/>
             </a:pPr>
             <a:r>
-              <a:rPr lang="en-US" sz="2550" dirty="0" spc="2" kern="0">
+              <a:rPr lang="en-US" sz="2550" dirty="0" spc="-3" kern="0">
                 <a:solidFill>
                   <a:srgbClr val="F3EEE3"/>
                 </a:solidFill>
@@ -6047,7 +5963,7 @@
                 <a:ea typeface="Be Vietnam Pro" pitchFamily="34" charset="-122"/>
                 <a:cs typeface="Be Vietnam Pro" pitchFamily="34" charset="-120"/>
               </a:rPr>
-              <a:t>Nguồn</a:t>
+              <a:t>Dùng</a:t>
             </a:r>
             <a:r>
               <a:rPr lang="en-US" sz="2550" dirty="0" spc="1" kern="0">
@@ -6058,7 +5974,7 @@
                 <a:ea typeface="Be Vietnam Pro" pitchFamily="34" charset="-122"/>
                 <a:cs typeface="Be Vietnam Pro" pitchFamily="34" charset="-120"/>
               </a:rPr>
-              <a:t> chỉ</a:t>
+              <a:t> C++</a:t>
             </a:r>
             <a:r>
               <a:rPr lang="en-US" sz="2550" dirty="0" spc="-1" kern="0">
@@ -6069,7 +5985,18 @@
                 <a:ea typeface="Be Vietnam Pro" pitchFamily="34" charset="-122"/>
                 <a:cs typeface="Be Vietnam Pro" pitchFamily="34" charset="-120"/>
               </a:rPr>
-              <a:t> nói</a:t>
+              <a:t> ở</a:t>
+            </a:r>
+            <a:r>
+              <a:rPr lang="en-US" sz="2550" dirty="0" spc="15" kern="0">
+                <a:solidFill>
+                  <a:srgbClr val="F3EEE3"/>
+                </a:solidFill>
+                <a:latin typeface="Be Vietnam Pro" pitchFamily="34" charset="0"/>
+                <a:ea typeface="Be Vietnam Pro" pitchFamily="34" charset="-122"/>
+                <a:cs typeface="Be Vietnam Pro" pitchFamily="34" charset="-120"/>
+              </a:rPr>
+              <a:t> đâu</a:t>
             </a:r>
             <a:r>
               <a:rPr lang="en-US" sz="2550" dirty="0" spc="0" kern="0">
@@ -6080,10 +6007,10 @@
                 <a:ea typeface="Be Vietnam Pro" pitchFamily="34" charset="-122"/>
                 <a:cs typeface="Be Vietnam Pro" pitchFamily="34" charset="-120"/>
               </a:rPr>
-              <a:t> C++ hợp</a:t>
-            </a:r>
-            <a:r>
-              <a:rPr lang="en-US" sz="2550" dirty="0" spc="-3" kern="0">
+              <a:t> không có nghĩa</a:t>
+            </a:r>
+            <a:r>
+              <a:rPr lang="en-US" sz="2550" dirty="0" spc="1" kern="0">
                 <a:solidFill>
                   <a:srgbClr val="F3EEE3"/>
                 </a:solidFill>
@@ -6091,51 +6018,7 @@
                 <a:ea typeface="Be Vietnam Pro" pitchFamily="34" charset="-122"/>
                 <a:cs typeface="Be Vietnam Pro" pitchFamily="34" charset="-120"/>
               </a:rPr>
-              <a:t> hoặc</a:t>
-            </a:r>
-            <a:r>
-              <a:rPr lang="en-US" sz="2550" dirty="0" spc="7" kern="0">
-                <a:solidFill>
-                  <a:srgbClr val="F3EEE3"/>
-                </a:solidFill>
-                <a:latin typeface="Be Vietnam Pro" pitchFamily="34" charset="0"/>
-                <a:ea typeface="Be Vietnam Pro" pitchFamily="34" charset="-122"/>
-                <a:cs typeface="Be Vietnam Pro" pitchFamily="34" charset="-120"/>
-              </a:rPr>
-              <a:t> được</a:t>
-            </a:r>
-            <a:r>
-              <a:rPr lang="en-US" sz="2550" dirty="0" spc="-1" kern="0">
-                <a:solidFill>
-                  <a:srgbClr val="F3EEE3"/>
-                </a:solidFill>
-                <a:latin typeface="Be Vietnam Pro" pitchFamily="34" charset="0"/>
-                <a:ea typeface="Be Vietnam Pro" pitchFamily="34" charset="-122"/>
-                <a:cs typeface="Be Vietnam Pro" pitchFamily="34" charset="-120"/>
-              </a:rPr>
-              <a:t> dùng,</a:t>
-            </a:r>
-            <a:r>
-              <a:rPr lang="en-US" sz="2550" dirty="0" spc="0" kern="0">
-                <a:solidFill>
-                  <a:srgbClr val="F3EEE3"/>
-                </a:solidFill>
-                <a:latin typeface="Be Vietnam Pro" pitchFamily="34" charset="0"/>
-                <a:ea typeface="Be Vietnam Pro" pitchFamily="34" charset="-122"/>
-                <a:cs typeface="Be Vietnam Pro" pitchFamily="34" charset="-120"/>
-              </a:rPr>
-              <a:t> không</a:t>
-            </a:r>
-            <a:r>
-              <a:rPr lang="en-US" sz="2550" dirty="0" spc="-1" kern="0">
-                <a:solidFill>
-                  <a:srgbClr val="F3EEE3"/>
-                </a:solidFill>
-                <a:latin typeface="Be Vietnam Pro" pitchFamily="34" charset="0"/>
-                <a:ea typeface="Be Vietnam Pro" pitchFamily="34" charset="-122"/>
-                <a:cs typeface="Be Vietnam Pro" pitchFamily="34" charset="-120"/>
-              </a:rPr>
-              <a:t> nói</a:t>
+              <a:t> C++</a:t>
             </a:r>
             <a:r>
               <a:rPr lang="en-US" sz="2550" dirty="0" spc="0" kern="0">
@@ -6372,6 +6255,61 @@
               <a:buNone/>
             </a:pPr>
             <a:r>
+              <a:rPr lang="en-US" sz="2250" dirty="0" spc="-7" kern="0">
+                <a:solidFill>
+                  <a:srgbClr val="C4C8D6"/>
+                </a:solidFill>
+                <a:latin typeface="Be Vietnam Pro" pitchFamily="34" charset="0"/>
+                <a:ea typeface="Be Vietnam Pro" pitchFamily="34" charset="-122"/>
+                <a:cs typeface="Be Vietnam Pro" pitchFamily="34" charset="-120"/>
+              </a:rPr>
+              <a:t>Thiết</a:t>
+            </a:r>
+            <a:r>
+              <a:rPr lang="en-US" sz="2250" dirty="0" spc="2" kern="0">
+                <a:solidFill>
+                  <a:srgbClr val="C4C8D6"/>
+                </a:solidFill>
+                <a:latin typeface="Be Vietnam Pro" pitchFamily="34" charset="0"/>
+                <a:ea typeface="Be Vietnam Pro" pitchFamily="34" charset="-122"/>
+                <a:cs typeface="Be Vietnam Pro" pitchFamily="34" charset="-120"/>
+              </a:rPr>
+              <a:t> bị</a:t>
+            </a:r>
+            <a:r>
+              <a:rPr lang="en-US" sz="2250" dirty="0" spc="3" kern="0">
+                <a:solidFill>
+                  <a:srgbClr val="C4C8D6"/>
+                </a:solidFill>
+                <a:latin typeface="Be Vietnam Pro" pitchFamily="34" charset="0"/>
+                <a:ea typeface="Be Vietnam Pro" pitchFamily="34" charset="-122"/>
+                <a:cs typeface="Be Vietnam Pro" pitchFamily="34" charset="-120"/>
+              </a:rPr>
+              <a:t> nhỏ:</a:t>
+            </a:r>
+            <a:r>
+              <a:rPr lang="en-US" sz="2250" dirty="0" spc="0" kern="0">
+                <a:solidFill>
+                  <a:srgbClr val="C4C8D6"/>
+                </a:solidFill>
+                <a:latin typeface="Be Vietnam Pro" pitchFamily="34" charset="0"/>
+                <a:ea typeface="Be Vietnam Pro" pitchFamily="34" charset="-122"/>
+                <a:cs typeface="Be Vietnam Pro" pitchFamily="34" charset="-120"/>
+              </a:rPr>
+              <a:t> phải tính</a:t>
+            </a:r>
+            <a:r>
+              <a:rPr lang="en-US" sz="2250" dirty="0" spc="2" kern="0">
+                <a:solidFill>
+                  <a:srgbClr val="C4C8D6"/>
+                </a:solidFill>
+                <a:latin typeface="Be Vietnam Pro" pitchFamily="34" charset="0"/>
+                <a:ea typeface="Be Vietnam Pro" pitchFamily="34" charset="-122"/>
+                <a:cs typeface="Be Vietnam Pro" pitchFamily="34" charset="-120"/>
+              </a:rPr>
+              <a:t> kỹ</a:t>
+            </a:r>
+            <a:r>
               <a:rPr lang="en-US" sz="2250" dirty="0" spc="-4" kern="0">
                 <a:solidFill>
                   <a:srgbClr val="C4C8D6"/>
@@ -6380,10 +6318,10 @@
                 <a:ea typeface="Be Vietnam Pro" pitchFamily="34" charset="-122"/>
                 <a:cs typeface="Be Vietnam Pro" pitchFamily="34" charset="-120"/>
               </a:rPr>
-              <a:t>Hiệu</a:t>
-            </a:r>
-            <a:r>
-              <a:rPr lang="en-US" sz="2250" dirty="0" spc="0" kern="0">
+              <a:t> việc</a:t>
+            </a:r>
+            <a:r>
+              <a:rPr lang="en-US" sz="2250" dirty="0" spc="3" kern="0">
                 <a:solidFill>
                   <a:srgbClr val="C4C8D6"/>
                 </a:solidFill>
@@ -6391,10 +6329,10 @@
                 <a:ea typeface="Be Vietnam Pro" pitchFamily="34" charset="-122"/>
                 <a:cs typeface="Be Vietnam Pro" pitchFamily="34" charset="-120"/>
               </a:rPr>
-              <a:t> quả</a:t>
-            </a:r>
-            <a:r>
-              <a:rPr lang="en-US" sz="2250" dirty="0" spc="-16" kern="0">
+              <a:t> cấp</a:t>
+            </a:r>
+            <a:r>
+              <a:rPr lang="en-US" sz="2250" dirty="0" spc="-9" kern="0">
                 <a:solidFill>
                   <a:srgbClr val="C4C8D6"/>
                 </a:solidFill>
@@ -6402,10 +6340,10 @@
                 <a:ea typeface="Be Vietnam Pro" pitchFamily="34" charset="-122"/>
                 <a:cs typeface="Be Vietnam Pro" pitchFamily="34" charset="-120"/>
               </a:rPr>
-              <a:t> và</a:t>
-            </a:r>
-            <a:r>
-              <a:rPr lang="en-US" sz="2250" dirty="0" spc="17" kern="0">
+              <a:t> phát</a:t>
+            </a:r>
+            <a:r>
+              <a:rPr lang="en-US" sz="2250" dirty="0" spc="1" kern="0">
                 <a:solidFill>
                   <a:srgbClr val="C4C8D6"/>
                 </a:solidFill>
@@ -6413,10 +6351,10 @@
                 <a:ea typeface="Be Vietnam Pro" pitchFamily="34" charset="-122"/>
                 <a:cs typeface="Be Vietnam Pro" pitchFamily="34" charset="-120"/>
               </a:rPr>
-              <a:t> điều</a:t>
-            </a:r>
-            <a:r>
-              <a:rPr lang="en-US" sz="2250" dirty="0" spc="-1" kern="0">
+              <a:t> bộ</a:t>
+            </a:r>
+            <a:r>
+              <a:rPr lang="en-US" sz="2250" dirty="0" spc="3" kern="0">
                 <a:solidFill>
                   <a:srgbClr val="C4C8D6"/>
                 </a:solidFill>
@@ -6424,10 +6362,10 @@
                 <a:ea typeface="Be Vietnam Pro" pitchFamily="34" charset="-122"/>
                 <a:cs typeface="Be Vietnam Pro" pitchFamily="34" charset="-120"/>
               </a:rPr>
-              <a:t> khiển</a:t>
-            </a:r>
-            <a:r>
-              <a:rPr lang="en-US" sz="2250" dirty="0" spc="0" kern="0">
+              <a:t> nhớ</a:t>
+            </a:r>
+            <a:r>
+              <a:rPr lang="en-US" sz="2250" dirty="0" spc="10" kern="0">
                 <a:solidFill>
                   <a:srgbClr val="C4C8D6"/>
                 </a:solidFill>
@@ -6435,62 +6373,7 @@
                 <a:ea typeface="Be Vietnam Pro" pitchFamily="34" charset="-122"/>
                 <a:cs typeface="Be Vietnam Pro" pitchFamily="34" charset="-120"/>
               </a:rPr>
-              <a:t> chi</a:t>
-            </a:r>
-            <a:r>
-              <a:rPr lang="en-US" sz="2250" dirty="0" spc="-5" kern="0">
-                <a:solidFill>
-                  <a:srgbClr val="C4C8D6"/>
-                </a:solidFill>
-                <a:latin typeface="Be Vietnam Pro" pitchFamily="34" charset="0"/>
-                <a:ea typeface="Be Vietnam Pro" pitchFamily="34" charset="-122"/>
-                <a:cs typeface="Be Vietnam Pro" pitchFamily="34" charset="-120"/>
-              </a:rPr>
-              <a:t> tiết</a:t>
-            </a:r>
-            <a:r>
-              <a:rPr lang="en-US" sz="2250" dirty="0" spc="-13" kern="0">
-                <a:solidFill>
-                  <a:srgbClr val="C4C8D6"/>
-                </a:solidFill>
-                <a:latin typeface="Be Vietnam Pro" pitchFamily="34" charset="0"/>
-                <a:ea typeface="Be Vietnam Pro" pitchFamily="34" charset="-122"/>
-                <a:cs typeface="Be Vietnam Pro" pitchFamily="34" charset="-120"/>
-              </a:rPr>
-              <a:t> tài</a:t>
-            </a:r>
-            <a:r>
-              <a:rPr lang="en-US" sz="2250" dirty="0" spc="-11" kern="0">
-                <a:solidFill>
-                  <a:srgbClr val="C4C8D6"/>
-                </a:solidFill>
-                <a:latin typeface="Be Vietnam Pro" pitchFamily="34" charset="0"/>
-                <a:ea typeface="Be Vietnam Pro" pitchFamily="34" charset="-122"/>
-                <a:cs typeface="Be Vietnam Pro" pitchFamily="34" charset="-120"/>
-              </a:rPr>
-              <a:t> nguyên</a:t>
-            </a:r>
-            <a:r>
-              <a:rPr lang="en-US" sz="2250" dirty="0" spc="0" kern="0">
-                <a:solidFill>
-                  <a:srgbClr val="C4C8D6"/>
-                </a:solidFill>
-                <a:latin typeface="Be Vietnam Pro" pitchFamily="34" charset="0"/>
-                <a:ea typeface="Be Vietnam Pro" pitchFamily="34" charset="-122"/>
-                <a:cs typeface="Be Vietnam Pro" pitchFamily="34" charset="-120"/>
-              </a:rPr>
-              <a:t> phần</a:t>
-            </a:r>
-            <a:r>
-              <a:rPr lang="en-US" sz="2250" dirty="0" spc="18" kern="0">
-                <a:solidFill>
-                  <a:srgbClr val="C4C8D6"/>
-                </a:solidFill>
-                <a:latin typeface="Be Vietnam Pro" pitchFamily="34" charset="0"/>
-                <a:ea typeface="Be Vietnam Pro" pitchFamily="34" charset="-122"/>
-                <a:cs typeface="Be Vietnam Pro" pitchFamily="34" charset="-120"/>
-              </a:rPr>
-              <a:t> cứng.</a:t>
+              <a:t> động.</a:t>
             </a:r>
             <a:endParaRPr lang="en-US" sz="2250" dirty="0"/>
           </a:p>
@@ -6754,7 +6637,7 @@
               <a:buNone/>
             </a:pPr>
             <a:r>
-              <a:rPr lang="en-US" sz="2250" dirty="0" spc="5" kern="0">
+              <a:rPr lang="en-US" sz="2250" dirty="0" spc="-34" kern="0">
                 <a:solidFill>
                   <a:srgbClr val="C4C8D6"/>
                 </a:solidFill>
@@ -6762,10 +6645,10 @@
                 <a:ea typeface="Be Vietnam Pro" pitchFamily="34" charset="-122"/>
                 <a:cs typeface="Be Vietnam Pro" pitchFamily="34" charset="-120"/>
               </a:rPr>
-              <a:t>Thường</a:t>
-            </a:r>
-            <a:r>
-              <a:rPr lang="en-US" sz="2250" dirty="0" spc="3" kern="0">
+              <a:t>Xử</a:t>
+            </a:r>
+            <a:r>
+              <a:rPr lang="en-US" sz="2250" dirty="0" spc="1" kern="0">
                 <a:solidFill>
                   <a:srgbClr val="C4C8D6"/>
                 </a:solidFill>
@@ -6773,10 +6656,10 @@
                 <a:ea typeface="Be Vietnam Pro" pitchFamily="34" charset="-122"/>
                 <a:cs typeface="Be Vietnam Pro" pitchFamily="34" charset="-120"/>
               </a:rPr>
-              <a:t> dùng</a:t>
-            </a:r>
-            <a:r>
-              <a:rPr lang="en-US" sz="2250" dirty="0" spc="1" kern="0">
+              <a:t> lý</a:t>
+            </a:r>
+            <a:r>
+              <a:rPr lang="en-US" sz="2250" dirty="0" spc="-11" kern="0">
                 <a:solidFill>
                   <a:srgbClr val="C4C8D6"/>
                 </a:solidFill>
@@ -6784,10 +6667,10 @@
                 <a:ea typeface="Be Vietnam Pro" pitchFamily="34" charset="-122"/>
                 <a:cs typeface="Be Vietnam Pro" pitchFamily="34" charset="-120"/>
               </a:rPr>
-              <a:t> cho</a:t>
-            </a:r>
-            <a:r>
-              <a:rPr lang="en-US" sz="2250" dirty="0" spc="-5" kern="0">
+              <a:t> gói</a:t>
+            </a:r>
+            <a:r>
+              <a:rPr lang="en-US" sz="2250" dirty="0" spc="0" kern="0">
                 <a:solidFill>
                   <a:srgbClr val="C4C8D6"/>
                 </a:solidFill>
@@ -6795,7 +6678,18 @@
                 <a:ea typeface="Be Vietnam Pro" pitchFamily="34" charset="-122"/>
                 <a:cs typeface="Be Vietnam Pro" pitchFamily="34" charset="-120"/>
               </a:rPr>
-              <a:t> thiết</a:t>
+              <a:t> tin</a:t>
+            </a:r>
+            <a:r>
+              <a:rPr lang="en-US" sz="2250" dirty="0" spc="-1" kern="0">
+                <a:solidFill>
+                  <a:srgbClr val="C4C8D6"/>
+                </a:solidFill>
+                <a:latin typeface="Be Vietnam Pro" pitchFamily="34" charset="0"/>
+                <a:ea typeface="Be Vietnam Pro" pitchFamily="34" charset="-122"/>
+                <a:cs typeface="Be Vietnam Pro" pitchFamily="34" charset="-120"/>
+              </a:rPr>
+              <a:t> liên</a:t>
             </a:r>
             <a:r>
               <a:rPr lang="en-US" sz="2250" dirty="0" spc="2" kern="0">
@@ -6806,10 +6700,10 @@
                 <a:ea typeface="Be Vietnam Pro" pitchFamily="34" charset="-122"/>
                 <a:cs typeface="Be Vietnam Pro" pitchFamily="34" charset="-120"/>
               </a:rPr>
-              <a:t> bị</a:t>
-            </a:r>
-            <a:r>
-              <a:rPr lang="en-US" sz="2250" dirty="0" spc="-1" kern="0">
+              <a:t> tục,</a:t>
+            </a:r>
+            <a:r>
+              <a:rPr lang="en-US" sz="2250" dirty="0" spc="19" kern="0">
                 <a:solidFill>
                   <a:srgbClr val="C4C8D6"/>
                 </a:solidFill>
@@ -6817,10 +6711,10 @@
                 <a:ea typeface="Be Vietnam Pro" pitchFamily="34" charset="-122"/>
                 <a:cs typeface="Be Vietnam Pro" pitchFamily="34" charset="-120"/>
               </a:rPr>
-              <a:t> mạng</a:t>
-            </a:r>
-            <a:r>
-              <a:rPr lang="en-US" sz="2250" dirty="0" spc="-17" kern="0">
+              <a:t> độ</a:t>
+            </a:r>
+            <a:r>
+              <a:rPr lang="en-US" sz="2250" dirty="0" spc="-24" kern="0">
                 <a:solidFill>
                   <a:srgbClr val="C4C8D6"/>
                 </a:solidFill>
@@ -6828,10 +6722,10 @@
                 <a:ea typeface="Be Vietnam Pro" pitchFamily="34" charset="-122"/>
                 <a:cs typeface="Be Vietnam Pro" pitchFamily="34" charset="-120"/>
               </a:rPr>
-              <a:t> và</a:t>
-            </a:r>
-            <a:r>
-              <a:rPr lang="en-US" sz="2250" dirty="0" spc="3" kern="0">
+              <a:t> trễ</a:t>
+            </a:r>
+            <a:r>
+              <a:rPr lang="en-US" sz="2250" dirty="0" spc="2" kern="0">
                 <a:solidFill>
                   <a:srgbClr val="C4C8D6"/>
                 </a:solidFill>
@@ -6839,40 +6733,7 @@
                 <a:ea typeface="Be Vietnam Pro" pitchFamily="34" charset="-122"/>
                 <a:cs typeface="Be Vietnam Pro" pitchFamily="34" charset="-120"/>
               </a:rPr>
-              <a:t> công</a:t>
-            </a:r>
-            <a:r>
-              <a:rPr lang="en-US" sz="2250" dirty="0" spc="4" kern="0">
-                <a:solidFill>
-                  <a:srgbClr val="C4C8D6"/>
-                </a:solidFill>
-                <a:latin typeface="Be Vietnam Pro" pitchFamily="34" charset="0"/>
-                <a:ea typeface="Be Vietnam Pro" pitchFamily="34" charset="-122"/>
-                <a:cs typeface="Be Vietnam Pro" pitchFamily="34" charset="-120"/>
-              </a:rPr>
-              <a:t> cụ</a:t>
-            </a:r>
-            <a:r>
-              <a:rPr lang="en-US" sz="2250" dirty="0" spc="2" kern="0">
-                <a:solidFill>
-                  <a:srgbClr val="C4C8D6"/>
-                </a:solidFill>
-                <a:latin typeface="Be Vietnam Pro" pitchFamily="34" charset="0"/>
-                <a:ea typeface="Be Vietnam Pro" pitchFamily="34" charset="-122"/>
-                <a:cs typeface="Be Vietnam Pro" pitchFamily="34" charset="-120"/>
-              </a:rPr>
-              <a:t> mô</a:t>
-            </a:r>
-            <a:r>
-              <a:rPr lang="en-US" sz="2250" dirty="0" spc="3" kern="0">
-                <a:solidFill>
-                  <a:srgbClr val="C4C8D6"/>
-                </a:solidFill>
-                <a:latin typeface="Be Vietnam Pro" pitchFamily="34" charset="0"/>
-                <a:ea typeface="Be Vietnam Pro" pitchFamily="34" charset="-122"/>
-                <a:cs typeface="Be Vietnam Pro" pitchFamily="34" charset="-120"/>
-              </a:rPr>
-              <a:t> phỏng.</a:t>
+              <a:t> thấp.</a:t>
             </a:r>
             <a:endParaRPr lang="en-US" sz="2250" dirty="0"/>
           </a:p>
@@ -7247,7 +7108,7 @@
               <a:buNone/>
             </a:pPr>
             <a:r>
-              <a:rPr lang="en-US" sz="2250" dirty="0" spc="-3" kern="0">
+              <a:rPr lang="en-US" sz="2250" dirty="0" spc="-2" kern="0">
                 <a:solidFill>
                   <a:srgbClr val="C4C8D6"/>
                 </a:solidFill>
@@ -7255,7 +7116,73 @@
                 <a:ea typeface="Be Vietnam Pro" pitchFamily="34" charset="-122"/>
                 <a:cs typeface="Be Vietnam Pro" pitchFamily="34" charset="-120"/>
               </a:rPr>
-              <a:t>Kiểm</a:t>
+              <a:t>Nói</a:t>
+            </a:r>
+            <a:r>
+              <a:rPr lang="en-US" sz="2250" dirty="0" spc="-11" kern="0">
+                <a:solidFill>
+                  <a:srgbClr val="C4C8D6"/>
+                </a:solidFill>
+                <a:latin typeface="Be Vietnam Pro" pitchFamily="34" charset="0"/>
+                <a:ea typeface="Be Vietnam Pro" pitchFamily="34" charset="-122"/>
+                <a:cs typeface="Be Vietnam Pro" pitchFamily="34" charset="-120"/>
+              </a:rPr>
+              <a:t> chuyện</a:t>
+            </a:r>
+            <a:r>
+              <a:rPr lang="en-US" sz="2250" dirty="0" spc="9" kern="0">
+                <a:solidFill>
+                  <a:srgbClr val="C4C8D6"/>
+                </a:solidFill>
+                <a:latin typeface="Be Vietnam Pro" pitchFamily="34" charset="0"/>
+                <a:ea typeface="Be Vietnam Pro" pitchFamily="34" charset="-122"/>
+                <a:cs typeface="Be Vietnam Pro" pitchFamily="34" charset="-120"/>
+              </a:rPr>
+              <a:t> trực</a:t>
+            </a:r>
+            <a:r>
+              <a:rPr lang="en-US" sz="2250" dirty="0" spc="0" kern="0">
+                <a:solidFill>
+                  <a:srgbClr val="C4C8D6"/>
+                </a:solidFill>
+                <a:latin typeface="Be Vietnam Pro" pitchFamily="34" charset="0"/>
+                <a:ea typeface="Be Vietnam Pro" pitchFamily="34" charset="-122"/>
+                <a:cs typeface="Be Vietnam Pro" pitchFamily="34" charset="-120"/>
+              </a:rPr>
+              <a:t> tiếp</a:t>
+            </a:r>
+            <a:r>
+              <a:rPr lang="en-US" sz="2250" dirty="0" spc="-11" kern="0">
+                <a:solidFill>
+                  <a:srgbClr val="C4C8D6"/>
+                </a:solidFill>
+                <a:latin typeface="Be Vietnam Pro" pitchFamily="34" charset="0"/>
+                <a:ea typeface="Be Vietnam Pro" pitchFamily="34" charset="-122"/>
+                <a:cs typeface="Be Vietnam Pro" pitchFamily="34" charset="-120"/>
+              </a:rPr>
+              <a:t> với</a:t>
+            </a:r>
+            <a:r>
+              <a:rPr lang="en-US" sz="2250" dirty="0" spc="1" kern="0">
+                <a:solidFill>
+                  <a:srgbClr val="C4C8D6"/>
+                </a:solidFill>
+                <a:latin typeface="Be Vietnam Pro" pitchFamily="34" charset="0"/>
+                <a:ea typeface="Be Vietnam Pro" pitchFamily="34" charset="-122"/>
+                <a:cs typeface="Be Vietnam Pro" pitchFamily="34" charset="-120"/>
+              </a:rPr>
+              <a:t> phần</a:t>
+            </a:r>
+            <a:r>
+              <a:rPr lang="en-US" sz="2250" dirty="0" spc="20" kern="0">
+                <a:solidFill>
+                  <a:srgbClr val="C4C8D6"/>
+                </a:solidFill>
+                <a:latin typeface="Be Vietnam Pro" pitchFamily="34" charset="0"/>
+                <a:ea typeface="Be Vietnam Pro" pitchFamily="34" charset="-122"/>
+                <a:cs typeface="Be Vietnam Pro" pitchFamily="34" charset="-120"/>
+              </a:rPr>
+              <a:t> cứng</a:t>
             </a:r>
             <a:r>
               <a:rPr lang="en-US" sz="2250" dirty="0" spc="-16" kern="0">
@@ -7266,10 +7193,10 @@
                 <a:ea typeface="Be Vietnam Pro" pitchFamily="34" charset="-122"/>
                 <a:cs typeface="Be Vietnam Pro" pitchFamily="34" charset="-120"/>
               </a:rPr>
-              <a:t> soát</a:t>
-            </a:r>
-            <a:r>
-              <a:rPr lang="en-US" sz="2250" dirty="0" spc="-17" kern="0">
+              <a:t> và</a:t>
+            </a:r>
+            <a:r>
+              <a:rPr lang="en-US" sz="2250" dirty="0" spc="1" kern="0">
                 <a:solidFill>
                   <a:srgbClr val="C4C8D6"/>
                 </a:solidFill>
@@ -7277,10 +7204,10 @@
                 <a:ea typeface="Be Vietnam Pro" pitchFamily="34" charset="-122"/>
                 <a:cs typeface="Be Vietnam Pro" pitchFamily="34" charset="-120"/>
               </a:rPr>
-              <a:t> rộng</a:t>
-            </a:r>
-            <a:r>
-              <a:rPr lang="en-US" sz="2250" dirty="0" spc="-13" kern="0">
+              <a:t> quản</a:t>
+            </a:r>
+            <a:r>
+              <a:rPr lang="en-US" sz="2250" dirty="0" spc="0" kern="0">
                 <a:solidFill>
                   <a:srgbClr val="C4C8D6"/>
                 </a:solidFill>
@@ -7288,10 +7215,10 @@
                 <a:ea typeface="Be Vietnam Pro" pitchFamily="34" charset="-122"/>
                 <a:cs typeface="Be Vietnam Pro" pitchFamily="34" charset="-120"/>
               </a:rPr>
-              <a:t> tài</a:t>
-            </a:r>
-            <a:r>
-              <a:rPr lang="en-US" sz="2250" dirty="0" spc="-12" kern="0">
+              <a:t> lý</a:t>
+            </a:r>
+            <a:r>
+              <a:rPr lang="en-US" sz="2250" dirty="0" spc="1" kern="0">
                 <a:solidFill>
                   <a:srgbClr val="C4C8D6"/>
                 </a:solidFill>
@@ -7299,10 +7226,10 @@
                 <a:ea typeface="Be Vietnam Pro" pitchFamily="34" charset="-122"/>
                 <a:cs typeface="Be Vietnam Pro" pitchFamily="34" charset="-120"/>
               </a:rPr>
-              <a:t> nguyên</a:t>
-            </a:r>
-            <a:r>
-              <a:rPr lang="en-US" sz="2250" dirty="0" spc="1" kern="0">
+              <a:t> bộ</a:t>
+            </a:r>
+            <a:r>
+              <a:rPr lang="en-US" sz="2250" dirty="0" spc="3" kern="0">
                 <a:solidFill>
                   <a:srgbClr val="C4C8D6"/>
                 </a:solidFill>
@@ -7310,84 +7237,7 @@
                 <a:ea typeface="Be Vietnam Pro" pitchFamily="34" charset="-122"/>
                 <a:cs typeface="Be Vietnam Pro" pitchFamily="34" charset="-120"/>
               </a:rPr>
-              <a:t> hệ thống</a:t>
-            </a:r>
-            <a:r>
-              <a:rPr lang="en-US" sz="2250" dirty="0" spc="-16" kern="0">
-                <a:solidFill>
-                  <a:srgbClr val="C4C8D6"/>
-                </a:solidFill>
-                <a:latin typeface="Be Vietnam Pro" pitchFamily="34" charset="0"/>
-                <a:ea typeface="Be Vietnam Pro" pitchFamily="34" charset="-122"/>
-                <a:cs typeface="Be Vietnam Pro" pitchFamily="34" charset="-120"/>
-              </a:rPr>
-              <a:t> và</a:t>
-            </a:r>
-            <a:r>
-              <a:rPr lang="en-US" sz="2250" dirty="0" spc="1" kern="0">
-                <a:solidFill>
-                  <a:srgbClr val="C4C8D6"/>
-                </a:solidFill>
-                <a:latin typeface="Be Vietnam Pro" pitchFamily="34" charset="0"/>
-                <a:ea typeface="Be Vietnam Pro" pitchFamily="34" charset="-122"/>
-                <a:cs typeface="Be Vietnam Pro" pitchFamily="34" charset="-120"/>
-              </a:rPr>
-              <a:t> bộ nhớ, nên</a:t>
-            </a:r>
-            <a:r>
-              <a:rPr lang="en-US" sz="2250" dirty="0" spc="3" kern="0">
-                <a:solidFill>
-                  <a:srgbClr val="C4C8D6"/>
-                </a:solidFill>
-                <a:latin typeface="Be Vietnam Pro" pitchFamily="34" charset="0"/>
-                <a:ea typeface="Be Vietnam Pro" pitchFamily="34" charset="-122"/>
-                <a:cs typeface="Be Vietnam Pro" pitchFamily="34" charset="-120"/>
-              </a:rPr>
-              <a:t> hợp</a:t>
-            </a:r>
-            <a:r>
-              <a:rPr lang="en-US" sz="2250" dirty="0" spc="-6" kern="0">
-                <a:solidFill>
-                  <a:srgbClr val="C4C8D6"/>
-                </a:solidFill>
-                <a:latin typeface="Be Vietnam Pro" pitchFamily="34" charset="0"/>
-                <a:ea typeface="Be Vietnam Pro" pitchFamily="34" charset="-122"/>
-                <a:cs typeface="Be Vietnam Pro" pitchFamily="34" charset="-120"/>
-              </a:rPr>
-              <a:t> viết</a:t>
-            </a:r>
-            <a:r>
-              <a:rPr lang="en-US" sz="2250" dirty="0" spc="0" kern="0">
-                <a:solidFill>
-                  <a:srgbClr val="C4C8D6"/>
-                </a:solidFill>
-                <a:latin typeface="Be Vietnam Pro" pitchFamily="34" charset="0"/>
-                <a:ea typeface="Be Vietnam Pro" pitchFamily="34" charset="-122"/>
-                <a:cs typeface="Be Vietnam Pro" pitchFamily="34" charset="-120"/>
-              </a:rPr>
-              <a:t> tiện ích</a:t>
-            </a:r>
-            <a:r>
-              <a:rPr lang="en-US" sz="2250" dirty="0" spc="1" kern="0">
-                <a:solidFill>
-                  <a:srgbClr val="C4C8D6"/>
-                </a:solidFill>
-                <a:latin typeface="Be Vietnam Pro" pitchFamily="34" charset="0"/>
-                <a:ea typeface="Be Vietnam Pro" pitchFamily="34" charset="-122"/>
-                <a:cs typeface="Be Vietnam Pro" pitchFamily="34" charset="-120"/>
-              </a:rPr>
-              <a:t> hệ thống</a:t>
-            </a:r>
-            <a:r>
-              <a:rPr lang="en-US" sz="2250" dirty="0" spc="5" kern="0">
-                <a:solidFill>
-                  <a:srgbClr val="C4C8D6"/>
-                </a:solidFill>
-                <a:latin typeface="Be Vietnam Pro" pitchFamily="34" charset="0"/>
-                <a:ea typeface="Be Vietnam Pro" pitchFamily="34" charset="-122"/>
-                <a:cs typeface="Be Vietnam Pro" pitchFamily="34" charset="-120"/>
-              </a:rPr>
-              <a:t> mức thấp.</a:t>
+              <a:t> nhớ.</a:t>
             </a:r>
             <a:endParaRPr lang="en-US" sz="2250" dirty="0"/>
           </a:p>
@@ -7530,7 +7380,7 @@
               <a:t> CẦN</a:t>
             </a:r>
             <a:r>
-              <a:rPr lang="en-US" sz="1950" b="1" spc="226" kern="0" dirty="0">
+              <a:rPr lang="en-US" sz="1950" b="1" spc="186" kern="0" dirty="0">
                 <a:solidFill>
                   <a:srgbClr val="0F766E"/>
                 </a:solidFill>
@@ -7538,10 +7388,10 @@
                 <a:ea typeface="Be Vietnam Pro" pitchFamily="34" charset="-122"/>
                 <a:cs typeface="Be Vietnam Pro" pitchFamily="34" charset="-120"/>
               </a:rPr>
-              <a:t> HIỆU</a:t>
-            </a:r>
-            <a:r>
-              <a:rPr lang="en-US" sz="1950" b="1" spc="224" kern="0" dirty="0">
+              <a:t> CHẠY</a:t>
+            </a:r>
+            <a:r>
+              <a:rPr lang="en-US" sz="1950" b="1" spc="225" kern="0" dirty="0">
                 <a:solidFill>
                   <a:srgbClr val="0F766E"/>
                 </a:solidFill>
@@ -7549,18 +7399,7 @@
                 <a:ea typeface="Be Vietnam Pro" pitchFamily="34" charset="-122"/>
                 <a:cs typeface="Be Vietnam Pro" pitchFamily="34" charset="-120"/>
               </a:rPr>
-              <a:t> NĂNG</a:t>
-            </a:r>
-            <a:r>
-              <a:rPr lang="en-US" sz="1950" b="1" spc="188" kern="0" dirty="0">
-                <a:solidFill>
-                  <a:srgbClr val="0F766E"/>
-                </a:solidFill>
-                <a:latin typeface="Be Vietnam Pro" pitchFamily="34" charset="0"/>
-                <a:ea typeface="Be Vietnam Pro" pitchFamily="34" charset="-122"/>
-                <a:cs typeface="Be Vietnam Pro" pitchFamily="34" charset="-120"/>
-              </a:rPr>
-              <a:t> CAO</a:t>
+              <a:t> NHANH</a:t>
             </a:r>
             <a:endParaRPr lang="en-US" sz="1950" dirty="0"/>
           </a:p>
@@ -7615,17 +7454,8 @@
               </a:rPr>
               <a:t> cần</a:t>
             </a:r>
-            <a:endParaRPr lang="en-US" sz="7500" dirty="0"/>
-          </a:p>
-          <a:p>
-            <a:pPr algn="l" indent="0" marL="0">
-              <a:lnSpc>
-                <a:spcPts val="7875"/>
-              </a:lnSpc>
-              <a:buNone/>
-            </a:pPr>
-            <a:r>
-              <a:rPr lang="en-US" sz="7500" dirty="0" spc="9" kern="0">
+            <a:r>
+              <a:rPr lang="en-US" sz="7500" dirty="0" spc="3" kern="0">
                 <a:solidFill>
                   <a:srgbClr val="14161C"/>
                 </a:solidFill>
@@ -7633,7 +7463,7 @@
                 <a:ea typeface="Bricolage Grotesque ExtraBold" pitchFamily="34" charset="-122"/>
                 <a:cs typeface="Bricolage Grotesque ExtraBold" pitchFamily="34" charset="-120"/>
               </a:rPr>
-              <a:t>hiệu</a:t>
+              <a:t> chạy</a:t>
             </a:r>
             <a:r>
               <a:rPr lang="en-US" sz="7500" dirty="0" spc="2" kern="0">
@@ -7644,18 +7474,7 @@
                 <a:ea typeface="Bricolage Grotesque ExtraBold" pitchFamily="34" charset="-122"/>
                 <a:cs typeface="Bricolage Grotesque ExtraBold" pitchFamily="34" charset="-120"/>
               </a:rPr>
-              <a:t> năng</a:t>
-            </a:r>
-            <a:r>
-              <a:rPr lang="en-US" sz="7500" dirty="0" spc="3" kern="0">
-                <a:solidFill>
-                  <a:srgbClr val="14161C"/>
-                </a:solidFill>
-                <a:latin typeface="Bricolage Grotesque ExtraBold" pitchFamily="34" charset="0"/>
-                <a:ea typeface="Bricolage Grotesque ExtraBold" pitchFamily="34" charset="-122"/>
-                <a:cs typeface="Bricolage Grotesque ExtraBold" pitchFamily="34" charset="-120"/>
-              </a:rPr>
-              <a:t> cao</a:t>
+              <a:t> nhanh</a:t>
             </a:r>
             <a:endParaRPr lang="en-US" sz="7500" dirty="0"/>
           </a:p>
@@ -7783,6 +7602,138 @@
               <a:buNone/>
             </a:pPr>
             <a:r>
+              <a:rPr lang="en-US" sz="2700" dirty="0" spc="3" kern="0">
+                <a:solidFill>
+                  <a:srgbClr val="14161C"/>
+                </a:solidFill>
+                <a:latin typeface="Be Vietnam Pro" pitchFamily="34" charset="0"/>
+                <a:ea typeface="Be Vietnam Pro" pitchFamily="34" charset="-122"/>
+                <a:cs typeface="Be Vietnam Pro" pitchFamily="34" charset="-120"/>
+              </a:rPr>
+              <a:t>Cả</a:t>
+            </a:r>
+            <a:r>
+              <a:rPr lang="en-US" sz="2700" dirty="0" spc="-8" kern="0">
+                <a:solidFill>
+                  <a:srgbClr val="14161C"/>
+                </a:solidFill>
+                <a:latin typeface="Be Vietnam Pro" pitchFamily="34" charset="0"/>
+                <a:ea typeface="Be Vietnam Pro" pitchFamily="34" charset="-122"/>
+                <a:cs typeface="Be Vietnam Pro" pitchFamily="34" charset="-120"/>
+              </a:rPr>
+              <a:t> ba</a:t>
+            </a:r>
+            <a:r>
+              <a:rPr lang="en-US" sz="2700" dirty="0" spc="12" kern="0">
+                <a:solidFill>
+                  <a:srgbClr val="14161C"/>
+                </a:solidFill>
+                <a:latin typeface="Be Vietnam Pro" pitchFamily="34" charset="0"/>
+                <a:ea typeface="Be Vietnam Pro" pitchFamily="34" charset="-122"/>
+                <a:cs typeface="Be Vietnam Pro" pitchFamily="34" charset="-120"/>
+              </a:rPr>
+              <a:t> đều</a:t>
+            </a:r>
+            <a:r>
+              <a:rPr lang="en-US" sz="2700" dirty="0" spc="-30" kern="0">
+                <a:solidFill>
+                  <a:srgbClr val="14161C"/>
+                </a:solidFill>
+                <a:latin typeface="Be Vietnam Pro" pitchFamily="34" charset="0"/>
+                <a:ea typeface="Be Vietnam Pro" pitchFamily="34" charset="-122"/>
+                <a:cs typeface="Be Vietnam Pro" pitchFamily="34" charset="-120"/>
+              </a:rPr>
+              <a:t> xoay</a:t>
+            </a:r>
+            <a:r>
+              <a:rPr lang="en-US" sz="2700" dirty="0" spc="-2" kern="0">
+                <a:solidFill>
+                  <a:srgbClr val="14161C"/>
+                </a:solidFill>
+                <a:latin typeface="Be Vietnam Pro" pitchFamily="34" charset="0"/>
+                <a:ea typeface="Be Vietnam Pro" pitchFamily="34" charset="-122"/>
+                <a:cs typeface="Be Vietnam Pro" pitchFamily="34" charset="-120"/>
+              </a:rPr>
+              <a:t> quanh</a:t>
+            </a:r>
+            <a:r>
+              <a:rPr lang="en-US" sz="2700" dirty="0" spc="-16" kern="0">
+                <a:solidFill>
+                  <a:srgbClr val="14161C"/>
+                </a:solidFill>
+                <a:latin typeface="Be Vietnam Pro" pitchFamily="34" charset="0"/>
+                <a:ea typeface="Be Vietnam Pro" pitchFamily="34" charset="-122"/>
+                <a:cs typeface="Be Vietnam Pro" pitchFamily="34" charset="-120"/>
+              </a:rPr>
+              <a:t> tốc</a:t>
+            </a:r>
+            <a:r>
+              <a:rPr lang="en-US" sz="2700" dirty="0" spc="16" kern="0">
+                <a:solidFill>
+                  <a:srgbClr val="14161C"/>
+                </a:solidFill>
+                <a:latin typeface="Be Vietnam Pro" pitchFamily="34" charset="0"/>
+                <a:ea typeface="Be Vietnam Pro" pitchFamily="34" charset="-122"/>
+                <a:cs typeface="Be Vietnam Pro" pitchFamily="34" charset="-120"/>
+              </a:rPr>
+              <a:t> độ</a:t>
+            </a:r>
+            <a:r>
+              <a:rPr lang="en-US" sz="2700" dirty="0" spc="-17" kern="0">
+                <a:solidFill>
+                  <a:srgbClr val="14161C"/>
+                </a:solidFill>
+                <a:latin typeface="Be Vietnam Pro" pitchFamily="34" charset="0"/>
+                <a:ea typeface="Be Vietnam Pro" pitchFamily="34" charset="-122"/>
+                <a:cs typeface="Be Vietnam Pro" pitchFamily="34" charset="-120"/>
+              </a:rPr>
+              <a:t> và</a:t>
+            </a:r>
+            <a:r>
+              <a:rPr lang="en-US" sz="2700" dirty="0" spc="-3" kern="0">
+                <a:solidFill>
+                  <a:srgbClr val="14161C"/>
+                </a:solidFill>
+                <a:latin typeface="Be Vietnam Pro" pitchFamily="34" charset="0"/>
+                <a:ea typeface="Be Vietnam Pro" pitchFamily="34" charset="-122"/>
+                <a:cs typeface="Be Vietnam Pro" pitchFamily="34" charset="-120"/>
+              </a:rPr>
+              <a:t> việc dùng</a:t>
+            </a:r>
+            <a:r>
+              <a:rPr lang="en-US" sz="2700" dirty="0" spc="-12" kern="0">
+                <a:solidFill>
+                  <a:srgbClr val="14161C"/>
+                </a:solidFill>
+                <a:latin typeface="Be Vietnam Pro" pitchFamily="34" charset="0"/>
+                <a:ea typeface="Be Vietnam Pro" pitchFamily="34" charset="-122"/>
+                <a:cs typeface="Be Vietnam Pro" pitchFamily="34" charset="-120"/>
+              </a:rPr>
+              <a:t> tài</a:t>
+            </a:r>
+            <a:r>
+              <a:rPr lang="en-US" sz="2700" dirty="0" spc="-14" kern="0">
+                <a:solidFill>
+                  <a:srgbClr val="14161C"/>
+                </a:solidFill>
+                <a:latin typeface="Be Vietnam Pro" pitchFamily="34" charset="0"/>
+                <a:ea typeface="Be Vietnam Pro" pitchFamily="34" charset="-122"/>
+                <a:cs typeface="Be Vietnam Pro" pitchFamily="34" charset="-120"/>
+              </a:rPr>
+              <a:t> nguyên.</a:t>
+            </a:r>
+            <a:r>
+              <a:rPr lang="en-US" sz="2700" dirty="0" spc="-30" kern="0">
+                <a:solidFill>
+                  <a:srgbClr val="14161C"/>
+                </a:solidFill>
+                <a:latin typeface="Be Vietnam Pro" pitchFamily="34" charset="0"/>
+                <a:ea typeface="Be Vietnam Pro" pitchFamily="34" charset="-122"/>
+                <a:cs typeface="Be Vietnam Pro" pitchFamily="34" charset="-120"/>
+              </a:rPr>
+              <a:t> Lời</a:t>
+            </a:r>
+            <a:r>
               <a:rPr lang="en-US" sz="2700" dirty="0" spc="0" kern="0">
                 <a:solidFill>
                   <a:srgbClr val="14161C"/>
@@ -7791,40 +7742,7 @@
                 <a:ea typeface="Be Vietnam Pro" pitchFamily="34" charset="-122"/>
                 <a:cs typeface="Be Vietnam Pro" pitchFamily="34" charset="-120"/>
               </a:rPr>
-              <a:t>Nguồn</a:t>
-            </a:r>
-            <a:r>
-              <a:rPr lang="en-US" sz="2700" dirty="0" spc="-16" kern="0">
-                <a:solidFill>
-                  <a:srgbClr val="14161C"/>
-                </a:solidFill>
-                <a:latin typeface="Be Vietnam Pro" pitchFamily="34" charset="0"/>
-                <a:ea typeface="Be Vietnam Pro" pitchFamily="34" charset="-122"/>
-                <a:cs typeface="Be Vietnam Pro" pitchFamily="34" charset="-120"/>
-              </a:rPr>
-              <a:t> gắn</a:t>
-            </a:r>
-            <a:r>
-              <a:rPr lang="en-US" sz="2700" dirty="0" spc="1" kern="0">
-                <a:solidFill>
-                  <a:srgbClr val="14161C"/>
-                </a:solidFill>
-                <a:latin typeface="Be Vietnam Pro" pitchFamily="34" charset="0"/>
-                <a:ea typeface="Be Vietnam Pro" pitchFamily="34" charset="-122"/>
-                <a:cs typeface="Be Vietnam Pro" pitchFamily="34" charset="-120"/>
-              </a:rPr>
-              <a:t> cả</a:t>
-            </a:r>
-            <a:r>
-              <a:rPr lang="en-US" sz="2700" dirty="0" spc="-8" kern="0">
-                <a:solidFill>
-                  <a:srgbClr val="14161C"/>
-                </a:solidFill>
-                <a:latin typeface="Be Vietnam Pro" pitchFamily="34" charset="0"/>
-                <a:ea typeface="Be Vietnam Pro" pitchFamily="34" charset="-122"/>
-                <a:cs typeface="Be Vietnam Pro" pitchFamily="34" charset="-120"/>
-              </a:rPr>
-              <a:t> ba</a:t>
+              <a:t> giải thích</a:t>
             </a:r>
             <a:r>
               <a:rPr lang="en-US" sz="2700" dirty="0" spc="-2" kern="0">
@@ -7835,73 +7753,18 @@
                 <a:ea typeface="Be Vietnam Pro" pitchFamily="34" charset="-122"/>
                 <a:cs typeface="Be Vietnam Pro" pitchFamily="34" charset="-120"/>
               </a:rPr>
-              <a:t> lĩnh</a:t>
-            </a:r>
-            <a:r>
-              <a:rPr lang="en-US" sz="2700" dirty="0" spc="10" kern="0">
-                <a:solidFill>
-                  <a:srgbClr val="14161C"/>
-                </a:solidFill>
-                <a:latin typeface="Be Vietnam Pro" pitchFamily="34" charset="0"/>
-                <a:ea typeface="Be Vietnam Pro" pitchFamily="34" charset="-122"/>
-                <a:cs typeface="Be Vietnam Pro" pitchFamily="34" charset="-120"/>
-              </a:rPr>
-              <a:t> vực</a:t>
-            </a:r>
-            <a:r>
-              <a:rPr lang="en-US" sz="2700" dirty="0" spc="-14" kern="0">
-                <a:solidFill>
-                  <a:srgbClr val="14161C"/>
-                </a:solidFill>
-                <a:latin typeface="Be Vietnam Pro" pitchFamily="34" charset="0"/>
-                <a:ea typeface="Be Vietnam Pro" pitchFamily="34" charset="-122"/>
-                <a:cs typeface="Be Vietnam Pro" pitchFamily="34" charset="-120"/>
-              </a:rPr>
-              <a:t> với</a:t>
-            </a:r>
-            <a:r>
-              <a:rPr lang="en-US" sz="2700" dirty="0" spc="-1" kern="0">
-                <a:solidFill>
-                  <a:srgbClr val="14161C"/>
-                </a:solidFill>
-                <a:latin typeface="Be Vietnam Pro" pitchFamily="34" charset="0"/>
-                <a:ea typeface="Be Vietnam Pro" pitchFamily="34" charset="-122"/>
-                <a:cs typeface="Be Vietnam Pro" pitchFamily="34" charset="-120"/>
-              </a:rPr>
-              <a:t> hiệu</a:t>
-            </a:r>
-            <a:r>
-              <a:rPr lang="en-US" sz="2700" dirty="0" spc="-2" kern="0">
-                <a:solidFill>
-                  <a:srgbClr val="14161C"/>
-                </a:solidFill>
-                <a:latin typeface="Be Vietnam Pro" pitchFamily="34" charset="0"/>
-                <a:ea typeface="Be Vietnam Pro" pitchFamily="34" charset="-122"/>
-                <a:cs typeface="Be Vietnam Pro" pitchFamily="34" charset="-120"/>
-              </a:rPr>
-              <a:t> năng</a:t>
-            </a:r>
-            <a:r>
-              <a:rPr lang="en-US" sz="2700" dirty="0" spc="-18" kern="0">
-                <a:solidFill>
-                  <a:srgbClr val="14161C"/>
-                </a:solidFill>
-                <a:latin typeface="Be Vietnam Pro" pitchFamily="34" charset="0"/>
-                <a:ea typeface="Be Vietnam Pro" pitchFamily="34" charset="-122"/>
-                <a:cs typeface="Be Vietnam Pro" pitchFamily="34" charset="-120"/>
-              </a:rPr>
-              <a:t> và</a:t>
-            </a:r>
-            <a:r>
-              <a:rPr lang="en-US" sz="2700" dirty="0" spc="-2" kern="0">
-                <a:solidFill>
-                  <a:srgbClr val="14161C"/>
-                </a:solidFill>
-                <a:latin typeface="Be Vietnam Pro" pitchFamily="34" charset="0"/>
-                <a:ea typeface="Be Vietnam Pro" pitchFamily="34" charset="-122"/>
-                <a:cs typeface="Be Vietnam Pro" pitchFamily="34" charset="-120"/>
-              </a:rPr>
-              <a:t> việc</a:t>
+              <a:t> là của</a:t>
+            </a:r>
+            <a:r>
+              <a:rPr lang="en-US" sz="2700" dirty="0" spc="6" kern="0">
+                <a:solidFill>
+                  <a:srgbClr val="14161C"/>
+                </a:solidFill>
+                <a:latin typeface="Be Vietnam Pro" pitchFamily="34" charset="0"/>
+                <a:ea typeface="Be Vietnam Pro" pitchFamily="34" charset="-122"/>
+                <a:cs typeface="Be Vietnam Pro" pitchFamily="34" charset="-120"/>
+              </a:rPr>
+              <a:t> người</a:t>
             </a:r>
             <a:r>
               <a:rPr lang="en-US" sz="2700" dirty="0" spc="-3" kern="0">
@@ -7912,40 +7775,18 @@
                 <a:ea typeface="Be Vietnam Pro" pitchFamily="34" charset="-122"/>
                 <a:cs typeface="Be Vietnam Pro" pitchFamily="34" charset="-120"/>
               </a:rPr>
-              <a:t> dùng</a:t>
-            </a:r>
-            <a:r>
-              <a:rPr lang="en-US" sz="2700" dirty="0" spc="-13" kern="0">
-                <a:solidFill>
-                  <a:srgbClr val="14161C"/>
-                </a:solidFill>
-                <a:latin typeface="Be Vietnam Pro" pitchFamily="34" charset="0"/>
-                <a:ea typeface="Be Vietnam Pro" pitchFamily="34" charset="-122"/>
-                <a:cs typeface="Be Vietnam Pro" pitchFamily="34" charset="-120"/>
-              </a:rPr>
-              <a:t> tài</a:t>
-            </a:r>
-            <a:r>
-              <a:rPr lang="en-US" sz="2700" dirty="0" spc="-16" kern="0">
-                <a:solidFill>
-                  <a:srgbClr val="14161C"/>
-                </a:solidFill>
-                <a:latin typeface="Be Vietnam Pro" pitchFamily="34" charset="0"/>
-                <a:ea typeface="Be Vietnam Pro" pitchFamily="34" charset="-122"/>
-                <a:cs typeface="Be Vietnam Pro" pitchFamily="34" charset="-120"/>
-              </a:rPr>
-              <a:t> nguyên</a:t>
-            </a:r>
-            <a:r>
-              <a:rPr lang="en-US" sz="2700" dirty="0" spc="-1" kern="0">
-                <a:solidFill>
-                  <a:srgbClr val="14161C"/>
-                </a:solidFill>
-                <a:latin typeface="Be Vietnam Pro" pitchFamily="34" charset="0"/>
-                <a:ea typeface="Be Vietnam Pro" pitchFamily="34" charset="-122"/>
-                <a:cs typeface="Be Vietnam Pro" pitchFamily="34" charset="-120"/>
-              </a:rPr>
-              <a:t> hiệu quả.</a:t>
+              <a:t> biên</a:t>
+            </a:r>
+            <a:r>
+              <a:rPr lang="en-US" sz="2700" dirty="0" spc="-9" kern="0">
+                <a:solidFill>
+                  <a:srgbClr val="14161C"/>
+                </a:solidFill>
+                <a:latin typeface="Be Vietnam Pro" pitchFamily="34" charset="0"/>
+                <a:ea typeface="Be Vietnam Pro" pitchFamily="34" charset="-122"/>
+                <a:cs typeface="Be Vietnam Pro" pitchFamily="34" charset="-120"/>
+              </a:rPr>
+              <a:t> soạn.</a:t>
             </a:r>
             <a:endParaRPr lang="en-US" sz="2700" dirty="0"/>
           </a:p>
@@ -8051,6 +7892,50 @@
               <a:buNone/>
             </a:pPr>
             <a:r>
+              <a:rPr lang="en-US" sz="2550" dirty="0" spc="-13" kern="0">
+                <a:solidFill>
+                  <a:srgbClr val="14161C"/>
+                </a:solidFill>
+                <a:latin typeface="Be Vietnam Pro" pitchFamily="34" charset="0"/>
+                <a:ea typeface="Be Vietnam Pro" pitchFamily="34" charset="-122"/>
+                <a:cs typeface="Be Vietnam Pro" pitchFamily="34" charset="-120"/>
+              </a:rPr>
+              <a:t>Nguyên</a:t>
+            </a:r>
+            <a:r>
+              <a:rPr lang="en-US" sz="2550" dirty="0" spc="-11" kern="0">
+                <a:solidFill>
+                  <a:srgbClr val="14161C"/>
+                </a:solidFill>
+                <a:latin typeface="Be Vietnam Pro" pitchFamily="34" charset="0"/>
+                <a:ea typeface="Be Vietnam Pro" pitchFamily="34" charset="-122"/>
+                <a:cs typeface="Be Vietnam Pro" pitchFamily="34" charset="-120"/>
+              </a:rPr>
+              <a:t> tắc</a:t>
+            </a:r>
+            <a:r>
+              <a:rPr lang="en-US" sz="2550" dirty="0" spc="0" kern="0">
+                <a:solidFill>
+                  <a:srgbClr val="14161C"/>
+                </a:solidFill>
+                <a:latin typeface="Be Vietnam Pro" pitchFamily="34" charset="0"/>
+                <a:ea typeface="Be Vietnam Pro" pitchFamily="34" charset="-122"/>
+                <a:cs typeface="Be Vietnam Pro" pitchFamily="34" charset="-120"/>
+              </a:rPr>
+              <a:t> không</a:t>
+            </a:r>
+            <a:r>
+              <a:rPr lang="en-US" sz="2550" dirty="0" spc="-24" kern="0">
+                <a:solidFill>
+                  <a:srgbClr val="14161C"/>
+                </a:solidFill>
+                <a:latin typeface="Be Vietnam Pro" pitchFamily="34" charset="0"/>
+                <a:ea typeface="Be Vietnam Pro" pitchFamily="34" charset="-122"/>
+                <a:cs typeface="Be Vietnam Pro" pitchFamily="34" charset="-120"/>
+              </a:rPr>
+              <a:t> trả</a:t>
+            </a:r>
+            <a:r>
               <a:rPr lang="en-US" sz="2550" dirty="0" spc="1" kern="0">
                 <a:solidFill>
                   <a:srgbClr val="14161C"/>
@@ -8059,7 +7944,7 @@
                 <a:ea typeface="Be Vietnam Pro" pitchFamily="34" charset="-122"/>
                 <a:cs typeface="Be Vietnam Pro" pitchFamily="34" charset="-120"/>
               </a:rPr>
-              <a:t>Hiệu</a:t>
+              <a:t> giá</a:t>
             </a:r>
             <a:r>
               <a:rPr lang="en-US" sz="2550" dirty="0" spc="0" kern="0">
@@ -8070,7 +7955,7 @@
                 <a:ea typeface="Be Vietnam Pro" pitchFamily="34" charset="-122"/>
                 <a:cs typeface="Be Vietnam Pro" pitchFamily="34" charset="-120"/>
               </a:rPr>
-              <a:t> năng là lý</a:t>
+              <a:t> cho</a:t>
             </a:r>
             <a:r>
               <a:rPr lang="en-US" sz="2550" dirty="0" spc="-1" kern="0">
@@ -8081,18 +7966,7 @@
                 <a:ea typeface="Be Vietnam Pro" pitchFamily="34" charset="-122"/>
                 <a:cs typeface="Be Vietnam Pro" pitchFamily="34" charset="-120"/>
               </a:rPr>
-              <a:t> do</a:t>
-            </a:r>
-            <a:r>
-              <a:rPr lang="en-US" sz="2550" dirty="0" spc="1" kern="0">
-                <a:solidFill>
-                  <a:srgbClr val="14161C"/>
-                </a:solidFill>
-                <a:latin typeface="Be Vietnam Pro" pitchFamily="34" charset="0"/>
-                <a:ea typeface="Be Vietnam Pro" pitchFamily="34" charset="-122"/>
-                <a:cs typeface="Be Vietnam Pro" pitchFamily="34" charset="-120"/>
-              </a:rPr>
-              <a:t> nguồn nêu,</a:t>
+              <a:t> thứ</a:t>
             </a:r>
             <a:r>
               <a:rPr lang="en-US" sz="2550" dirty="0" spc="0" kern="0">
@@ -8103,73 +7977,7 @@
                 <a:ea typeface="Be Vietnam Pro" pitchFamily="34" charset="-122"/>
                 <a:cs typeface="Be Vietnam Pro" pitchFamily="34" charset="-120"/>
               </a:rPr>
-              <a:t> không phải phép</a:t>
-            </a:r>
-            <a:r>
-              <a:rPr lang="en-US" sz="2550" dirty="0" spc="-10" kern="0">
-                <a:solidFill>
-                  <a:srgbClr val="14161C"/>
-                </a:solidFill>
-                <a:latin typeface="Be Vietnam Pro" pitchFamily="34" charset="0"/>
-                <a:ea typeface="Be Vietnam Pro" pitchFamily="34" charset="-122"/>
-                <a:cs typeface="Be Vietnam Pro" pitchFamily="34" charset="-120"/>
-              </a:rPr>
-              <a:t> so</a:t>
-            </a:r>
-            <a:r>
-              <a:rPr lang="en-US" sz="2550" dirty="0" spc="-6" kern="0">
-                <a:solidFill>
-                  <a:srgbClr val="14161C"/>
-                </a:solidFill>
-                <a:latin typeface="Be Vietnam Pro" pitchFamily="34" charset="0"/>
-                <a:ea typeface="Be Vietnam Pro" pitchFamily="34" charset="-122"/>
-                <a:cs typeface="Be Vietnam Pro" pitchFamily="34" charset="-120"/>
-              </a:rPr>
-              <a:t> sánh</a:t>
-            </a:r>
-            <a:r>
-              <a:rPr lang="en-US" sz="2550" dirty="0" spc="-15" kern="0">
-                <a:solidFill>
-                  <a:srgbClr val="14161C"/>
-                </a:solidFill>
-                <a:latin typeface="Be Vietnam Pro" pitchFamily="34" charset="0"/>
-                <a:ea typeface="Be Vietnam Pro" pitchFamily="34" charset="-122"/>
-                <a:cs typeface="Be Vietnam Pro" pitchFamily="34" charset="-120"/>
-              </a:rPr>
-              <a:t> với</a:t>
-            </a:r>
-            <a:r>
-              <a:rPr lang="en-US" sz="2550" dirty="0" spc="-11" kern="0">
-                <a:solidFill>
-                  <a:srgbClr val="14161C"/>
-                </a:solidFill>
-                <a:latin typeface="Be Vietnam Pro" pitchFamily="34" charset="0"/>
-                <a:ea typeface="Be Vietnam Pro" pitchFamily="34" charset="-122"/>
-                <a:cs typeface="Be Vietnam Pro" pitchFamily="34" charset="-120"/>
-              </a:rPr>
-              <a:t> ngôn</a:t>
-            </a:r>
-            <a:r>
-              <a:rPr lang="en-US" sz="2550" dirty="0" spc="-1" kern="0">
-                <a:solidFill>
-                  <a:srgbClr val="14161C"/>
-                </a:solidFill>
-                <a:latin typeface="Be Vietnam Pro" pitchFamily="34" charset="0"/>
-                <a:ea typeface="Be Vietnam Pro" pitchFamily="34" charset="-122"/>
-                <a:cs typeface="Be Vietnam Pro" pitchFamily="34" charset="-120"/>
-              </a:rPr>
-              <a:t> ngữ</a:t>
-            </a:r>
-            <a:r>
-              <a:rPr lang="en-US" sz="2550" dirty="0" spc="1" kern="0">
-                <a:solidFill>
-                  <a:srgbClr val="14161C"/>
-                </a:solidFill>
-                <a:latin typeface="Be Vietnam Pro" pitchFamily="34" charset="0"/>
-                <a:ea typeface="Be Vietnam Pro" pitchFamily="34" charset="-122"/>
-                <a:cs typeface="Be Vietnam Pro" pitchFamily="34" charset="-120"/>
-              </a:rPr>
-              <a:t> khác.</a:t>
+              <a:t> không dùng.</a:t>
             </a:r>
             <a:endParaRPr lang="en-US" sz="2550" dirty="0"/>
           </a:p>
@@ -8339,7 +8147,29 @@
                 <a:ea typeface="Be Vietnam Pro" pitchFamily="34" charset="-122"/>
                 <a:cs typeface="Be Vietnam Pro" pitchFamily="34" charset="-120"/>
               </a:rPr>
-              <a:t>Nền</a:t>
+              <a:t>Mỗi</a:t>
+            </a:r>
+            <a:r>
+              <a:rPr lang="en-US" sz="2250" dirty="0" spc="0" kern="0">
+                <a:solidFill>
+                  <a:srgbClr val="14161C"/>
+                </a:solidFill>
+                <a:latin typeface="Be Vietnam Pro" pitchFamily="34" charset="0"/>
+                <a:ea typeface="Be Vietnam Pro" pitchFamily="34" charset="-122"/>
+                <a:cs typeface="Be Vietnam Pro" pitchFamily="34" charset="-120"/>
+              </a:rPr>
+              <a:t> khung hình</a:t>
+            </a:r>
+            <a:r>
+              <a:rPr lang="en-US" sz="2250" dirty="0" spc="5" kern="0">
+                <a:solidFill>
+                  <a:srgbClr val="14161C"/>
+                </a:solidFill>
+                <a:latin typeface="Be Vietnam Pro" pitchFamily="34" charset="0"/>
+                <a:ea typeface="Be Vietnam Pro" pitchFamily="34" charset="-122"/>
+                <a:cs typeface="Be Vietnam Pro" pitchFamily="34" charset="-120"/>
+              </a:rPr>
+              <a:t> có</a:t>
             </a:r>
             <a:r>
               <a:rPr lang="en-US" sz="2250" dirty="0" spc="-9" kern="0">
@@ -8350,18 +8180,18 @@
                 <a:ea typeface="Be Vietnam Pro" pitchFamily="34" charset="-122"/>
                 <a:cs typeface="Be Vietnam Pro" pitchFamily="34" charset="-120"/>
               </a:rPr>
-              <a:t> tảng</a:t>
-            </a:r>
-            <a:r>
-              <a:rPr lang="en-US" sz="2250" dirty="0" spc="1" kern="0">
-                <a:solidFill>
-                  <a:srgbClr val="14161C"/>
-                </a:solidFill>
-                <a:latin typeface="Be Vietnam Pro" pitchFamily="34" charset="0"/>
-                <a:ea typeface="Be Vietnam Pro" pitchFamily="34" charset="-122"/>
-                <a:cs typeface="Be Vietnam Pro" pitchFamily="34" charset="-120"/>
-              </a:rPr>
-              <a:t> quen</a:t>
+              <a:t> ngân</a:t>
+            </a:r>
+            <a:r>
+              <a:rPr lang="en-US" sz="2250" dirty="0" spc="-3" kern="0">
+                <a:solidFill>
+                  <a:srgbClr val="14161C"/>
+                </a:solidFill>
+                <a:latin typeface="Be Vietnam Pro" pitchFamily="34" charset="0"/>
+                <a:ea typeface="Be Vietnam Pro" pitchFamily="34" charset="-122"/>
+                <a:cs typeface="Be Vietnam Pro" pitchFamily="34" charset="-120"/>
+              </a:rPr>
+              <a:t> sách</a:t>
             </a:r>
             <a:r>
               <a:rPr lang="en-US" sz="2250" dirty="0" spc="0" kern="0">
@@ -8372,40 +8202,40 @@
                 <a:ea typeface="Be Vietnam Pro" pitchFamily="34" charset="-122"/>
                 <a:cs typeface="Be Vietnam Pro" pitchFamily="34" charset="-120"/>
               </a:rPr>
-              <a:t> thuộc</a:t>
-            </a:r>
-            <a:r>
-              <a:rPr lang="en-US" sz="2250" dirty="0" spc="2" kern="0">
-                <a:solidFill>
-                  <a:srgbClr val="14161C"/>
-                </a:solidFill>
-                <a:latin typeface="Be Vietnam Pro" pitchFamily="34" charset="0"/>
-                <a:ea typeface="Be Vietnam Pro" pitchFamily="34" charset="-122"/>
-                <a:cs typeface="Be Vietnam Pro" pitchFamily="34" charset="-120"/>
-              </a:rPr>
-              <a:t> của</a:t>
-            </a:r>
-            <a:r>
-              <a:rPr lang="en-US" sz="2250" dirty="0" spc="-7" kern="0">
-                <a:solidFill>
-                  <a:srgbClr val="14161C"/>
-                </a:solidFill>
-                <a:latin typeface="Be Vietnam Pro" pitchFamily="34" charset="0"/>
-                <a:ea typeface="Be Vietnam Pro" pitchFamily="34" charset="-122"/>
-                <a:cs typeface="Be Vietnam Pro" pitchFamily="34" charset="-120"/>
-              </a:rPr>
-              <a:t> ngành</a:t>
-            </a:r>
-            <a:r>
-              <a:rPr lang="en-US" sz="2250" dirty="0" spc="-8" kern="0">
-                <a:solidFill>
-                  <a:srgbClr val="14161C"/>
-                </a:solidFill>
-                <a:latin typeface="Be Vietnam Pro" pitchFamily="34" charset="0"/>
-                <a:ea typeface="Be Vietnam Pro" pitchFamily="34" charset="-122"/>
-                <a:cs typeface="Be Vietnam Pro" pitchFamily="34" charset="-120"/>
-              </a:rPr>
-              <a:t> game.</a:t>
+              <a:t> thời</a:t>
+            </a:r>
+            <a:r>
+              <a:rPr lang="en-US" sz="2250" dirty="0" spc="-1" kern="0">
+                <a:solidFill>
+                  <a:srgbClr val="14161C"/>
+                </a:solidFill>
+                <a:latin typeface="Be Vietnam Pro" pitchFamily="34" charset="0"/>
+                <a:ea typeface="Be Vietnam Pro" pitchFamily="34" charset="-122"/>
+                <a:cs typeface="Be Vietnam Pro" pitchFamily="34" charset="-120"/>
+              </a:rPr>
+              <a:t> gian</a:t>
+            </a:r>
+            <a:r>
+              <a:rPr lang="en-US" sz="2250" dirty="0" spc="4" kern="0">
+                <a:solidFill>
+                  <a:srgbClr val="14161C"/>
+                </a:solidFill>
+                <a:latin typeface="Be Vietnam Pro" pitchFamily="34" charset="0"/>
+                <a:ea typeface="Be Vietnam Pro" pitchFamily="34" charset="-122"/>
+                <a:cs typeface="Be Vietnam Pro" pitchFamily="34" charset="-120"/>
+              </a:rPr>
+              <a:t> cố</a:t>
+            </a:r>
+            <a:r>
+              <a:rPr lang="en-US" sz="2250" dirty="0" spc="17" kern="0">
+                <a:solidFill>
+                  <a:srgbClr val="14161C"/>
+                </a:solidFill>
+                <a:latin typeface="Be Vietnam Pro" pitchFamily="34" charset="0"/>
+                <a:ea typeface="Be Vietnam Pro" pitchFamily="34" charset="-122"/>
+                <a:cs typeface="Be Vietnam Pro" pitchFamily="34" charset="-120"/>
+              </a:rPr>
+              <a:t> định.</a:t>
             </a:r>
             <a:endParaRPr lang="en-US" sz="2250" dirty="0"/>
           </a:p>
@@ -8440,6 +8270,17 @@
               <a:buNone/>
             </a:pPr>
             <a:r>
+              <a:rPr lang="en-US" sz="1950" b="1" dirty="0" spc="-1" kern="0">
+                <a:solidFill>
+                  <a:srgbClr val="F3EEE3"/>
+                </a:solidFill>
+                <a:latin typeface="Be Vietnam Pro" pitchFamily="34" charset="0"/>
+                <a:ea typeface="Be Vietnam Pro" pitchFamily="34" charset="-122"/>
+                <a:cs typeface="Be Vietnam Pro" pitchFamily="34" charset="-120"/>
+              </a:rPr>
+              <a:t>Dự</a:t>
+            </a:r>
+            <a:r>
               <a:rPr lang="en-US" sz="1950" b="1" dirty="0" spc="2" kern="0">
                 <a:solidFill>
                   <a:srgbClr val="F3EEE3"/>
@@ -8448,10 +8289,10 @@
                 <a:ea typeface="Be Vietnam Pro" pitchFamily="34" charset="-122"/>
                 <a:cs typeface="Be Vietnam Pro" pitchFamily="34" charset="-120"/>
               </a:rPr>
-              <a:t>Hiệu</a:t>
-            </a:r>
-            <a:r>
-              <a:rPr lang="en-US" sz="1950" b="1" dirty="0" spc="-2" kern="0">
+              <a:t> đoán</a:t>
+            </a:r>
+            <a:r>
+              <a:rPr lang="en-US" sz="1950" b="1" dirty="0" spc="8" kern="0">
                 <a:solidFill>
                   <a:srgbClr val="F3EEE3"/>
                 </a:solidFill>
@@ -8459,7 +8300,7 @@
                 <a:ea typeface="Be Vietnam Pro" pitchFamily="34" charset="-122"/>
                 <a:cs typeface="Be Vietnam Pro" pitchFamily="34" charset="-120"/>
               </a:rPr>
-              <a:t> năng</a:t>
+              <a:t> được</a:t>
             </a:r>
             <a:endParaRPr lang="en-US" sz="1950" dirty="0"/>
           </a:p>
@@ -8494,7 +8335,7 @@
               <a:buNone/>
             </a:pPr>
             <a:r>
-              <a:rPr lang="en-US" sz="1950" b="1" dirty="0" spc="2" kern="0">
+              <a:rPr lang="en-US" sz="1950" b="1" dirty="0" spc="-4" kern="0">
                 <a:solidFill>
                   <a:srgbClr val="F3EEE3"/>
                 </a:solidFill>
@@ -8502,7 +8343,7 @@
                 <a:ea typeface="Be Vietnam Pro" pitchFamily="34" charset="-122"/>
                 <a:cs typeface="Be Vietnam Pro" pitchFamily="34" charset="-120"/>
               </a:rPr>
-              <a:t>Hiệu</a:t>
+              <a:t>Khung</a:t>
             </a:r>
             <a:r>
               <a:rPr lang="en-US" sz="1950" b="1" dirty="0" spc="0" kern="0">
@@ -8513,7 +8354,7 @@
                 <a:ea typeface="Be Vietnam Pro" pitchFamily="34" charset="-122"/>
                 <a:cs typeface="Be Vietnam Pro" pitchFamily="34" charset="-120"/>
               </a:rPr>
-              <a:t> quả</a:t>
+              <a:t> hình</a:t>
             </a:r>
             <a:endParaRPr lang="en-US" sz="1950" dirty="0"/>
           </a:p>
@@ -8681,26 +8522,37 @@
               <a:buNone/>
             </a:pPr>
             <a:r>
-              <a:rPr lang="en-US" sz="2250" dirty="0" spc="-3" kern="0">
-                <a:solidFill>
-                  <a:srgbClr val="14161C"/>
-                </a:solidFill>
-                <a:latin typeface="Be Vietnam Pro" pitchFamily="34" charset="0"/>
-                <a:ea typeface="Be Vietnam Pro" pitchFamily="34" charset="-122"/>
-                <a:cs typeface="Be Vietnam Pro" pitchFamily="34" charset="-120"/>
-              </a:rPr>
-              <a:t>Nhiều</a:t>
-            </a:r>
-            <a:r>
-              <a:rPr lang="en-US" sz="2250" dirty="0" spc="-1" kern="0">
-                <a:solidFill>
-                  <a:srgbClr val="14161C"/>
-                </a:solidFill>
-                <a:latin typeface="Be Vietnam Pro" pitchFamily="34" charset="0"/>
-                <a:ea typeface="Be Vietnam Pro" pitchFamily="34" charset="-122"/>
-                <a:cs typeface="Be Vietnam Pro" pitchFamily="34" charset="-120"/>
-              </a:rPr>
-              <a:t> hệ hiệu</a:t>
+              <a:rPr lang="en-US" sz="2250" dirty="0" spc="4" kern="0">
+                <a:solidFill>
+                  <a:srgbClr val="14161C"/>
+                </a:solidFill>
+                <a:latin typeface="Be Vietnam Pro" pitchFamily="34" charset="0"/>
+                <a:ea typeface="Be Vietnam Pro" pitchFamily="34" charset="-122"/>
+                <a:cs typeface="Be Vietnam Pro" pitchFamily="34" charset="-120"/>
+              </a:rPr>
+              <a:t>Bộ</a:t>
+            </a:r>
+            <a:r>
+              <a:rPr lang="en-US" sz="2250" dirty="0" spc="3" kern="0">
+                <a:solidFill>
+                  <a:srgbClr val="14161C"/>
+                </a:solidFill>
+                <a:latin typeface="Be Vietnam Pro" pitchFamily="34" charset="0"/>
+                <a:ea typeface="Be Vietnam Pro" pitchFamily="34" charset="-122"/>
+                <a:cs typeface="Be Vietnam Pro" pitchFamily="34" charset="-120"/>
+              </a:rPr>
+              <a:t> nhớ</a:t>
+            </a:r>
+            <a:r>
+              <a:rPr lang="en-US" sz="2250" dirty="0" spc="-17" kern="0">
+                <a:solidFill>
+                  <a:srgbClr val="14161C"/>
+                </a:solidFill>
+                <a:latin typeface="Be Vietnam Pro" pitchFamily="34" charset="0"/>
+                <a:ea typeface="Be Vietnam Pro" pitchFamily="34" charset="-122"/>
+                <a:cs typeface="Be Vietnam Pro" pitchFamily="34" charset="-120"/>
+              </a:rPr>
+              <a:t> và</a:t>
             </a:r>
             <a:r>
               <a:rPr lang="en-US" sz="2250" dirty="0" spc="0" kern="0">
@@ -8711,18 +8563,62 @@
                 <a:ea typeface="Be Vietnam Pro" pitchFamily="34" charset="-122"/>
                 <a:cs typeface="Be Vietnam Pro" pitchFamily="34" charset="-120"/>
               </a:rPr>
-              <a:t> năng</a:t>
-            </a:r>
-            <a:r>
-              <a:rPr lang="en-US" sz="2250" dirty="0" spc="-1" kern="0">
-                <a:solidFill>
-                  <a:srgbClr val="14161C"/>
-                </a:solidFill>
-                <a:latin typeface="Be Vietnam Pro" pitchFamily="34" charset="0"/>
-                <a:ea typeface="Be Vietnam Pro" pitchFamily="34" charset="-122"/>
-                <a:cs typeface="Be Vietnam Pro" pitchFamily="34" charset="-120"/>
-              </a:rPr>
-              <a:t> cao cài bằng</a:t>
+              <a:t> truy</a:t>
+            </a:r>
+            <a:r>
+              <a:rPr lang="en-US" sz="2250" dirty="0" spc="-13" kern="0">
+                <a:solidFill>
+                  <a:srgbClr val="14161C"/>
+                </a:solidFill>
+                <a:latin typeface="Be Vietnam Pro" pitchFamily="34" charset="0"/>
+                <a:ea typeface="Be Vietnam Pro" pitchFamily="34" charset="-122"/>
+                <a:cs typeface="Be Vietnam Pro" pitchFamily="34" charset="-120"/>
+              </a:rPr>
+              <a:t> vấn</a:t>
+            </a:r>
+            <a:r>
+              <a:rPr lang="en-US" sz="2250" dirty="0" spc="-18" kern="0">
+                <a:solidFill>
+                  <a:srgbClr val="14161C"/>
+                </a:solidFill>
+                <a:latin typeface="Be Vietnam Pro" pitchFamily="34" charset="0"/>
+                <a:ea typeface="Be Vietnam Pro" pitchFamily="34" charset="-122"/>
+                <a:cs typeface="Be Vietnam Pro" pitchFamily="34" charset="-120"/>
+              </a:rPr>
+              <a:t> trên</a:t>
+            </a:r>
+            <a:r>
+              <a:rPr lang="en-US" sz="2250" dirty="0" spc="0" kern="0">
+                <a:solidFill>
+                  <a:srgbClr val="14161C"/>
+                </a:solidFill>
+                <a:latin typeface="Be Vietnam Pro" pitchFamily="34" charset="0"/>
+                <a:ea typeface="Be Vietnam Pro" pitchFamily="34" charset="-122"/>
+                <a:cs typeface="Be Vietnam Pro" pitchFamily="34" charset="-120"/>
+              </a:rPr>
+              <a:t> khối</a:t>
+            </a:r>
+            <a:r>
+              <a:rPr lang="en-US" sz="2250" dirty="0" spc="5" kern="0">
+                <a:solidFill>
+                  <a:srgbClr val="14161C"/>
+                </a:solidFill>
+                <a:latin typeface="Be Vietnam Pro" pitchFamily="34" charset="0"/>
+                <a:ea typeface="Be Vietnam Pro" pitchFamily="34" charset="-122"/>
+                <a:cs typeface="Be Vietnam Pro" pitchFamily="34" charset="-120"/>
+              </a:rPr>
+              <a:t> dữ</a:t>
+            </a:r>
+            <a:r>
+              <a:rPr lang="en-US" sz="2250" dirty="0" spc="-2" kern="0">
+                <a:solidFill>
+                  <a:srgbClr val="14161C"/>
+                </a:solidFill>
+                <a:latin typeface="Be Vietnam Pro" pitchFamily="34" charset="0"/>
+                <a:ea typeface="Be Vietnam Pro" pitchFamily="34" charset="-122"/>
+                <a:cs typeface="Be Vietnam Pro" pitchFamily="34" charset="-120"/>
+              </a:rPr>
+              <a:t> liệu</a:t>
             </a:r>
             <a:r>
               <a:rPr lang="en-US" sz="2250" dirty="0" spc="3" kern="0">
@@ -8733,7 +8629,7 @@
                 <a:ea typeface="Be Vietnam Pro" pitchFamily="34" charset="-122"/>
                 <a:cs typeface="Be Vietnam Pro" pitchFamily="34" charset="-120"/>
               </a:rPr>
-              <a:t> C++.</a:t>
+              <a:t> lớn.</a:t>
             </a:r>
             <a:endParaRPr lang="en-US" sz="2250" dirty="0"/>
           </a:p>
@@ -8776,7 +8672,29 @@
                 <a:ea typeface="Be Vietnam Pro" pitchFamily="34" charset="-122"/>
                 <a:cs typeface="Be Vietnam Pro" pitchFamily="34" charset="-120"/>
               </a:rPr>
-              <a:t>Bộ</a:t>
+              <a:t>Bố</a:t>
+            </a:r>
+            <a:r>
+              <a:rPr lang="en-US" sz="1950" b="1" dirty="0" spc="8" kern="0">
+                <a:solidFill>
+                  <a:srgbClr val="F3EEE3"/>
+                </a:solidFill>
+                <a:latin typeface="Be Vietnam Pro" pitchFamily="34" charset="0"/>
+                <a:ea typeface="Be Vietnam Pro" pitchFamily="34" charset="-122"/>
+                <a:cs typeface="Be Vietnam Pro" pitchFamily="34" charset="-120"/>
+              </a:rPr>
+              <a:t> trí</a:t>
+            </a:r>
+            <a:r>
+              <a:rPr lang="en-US" sz="1950" b="1" dirty="0" spc="-5" kern="0">
+                <a:solidFill>
+                  <a:srgbClr val="F3EEE3"/>
+                </a:solidFill>
+                <a:latin typeface="Be Vietnam Pro" pitchFamily="34" charset="0"/>
+                <a:ea typeface="Be Vietnam Pro" pitchFamily="34" charset="-122"/>
+                <a:cs typeface="Be Vietnam Pro" pitchFamily="34" charset="-120"/>
+              </a:rPr>
+              <a:t> bộ</a:t>
             </a:r>
             <a:r>
               <a:rPr lang="en-US" sz="1950" b="1" dirty="0" spc="-4" kern="0">
@@ -8788,28 +8706,6 @@
                 <a:cs typeface="Be Vietnam Pro" pitchFamily="34" charset="-120"/>
               </a:rPr>
               <a:t> nhớ</a:t>
-            </a:r>
-            <a:r>
-              <a:rPr lang="en-US" sz="1950" b="1" dirty="0" spc="0" kern="0">
-                <a:solidFill>
-                  <a:srgbClr val="F3EEE3"/>
-                </a:solidFill>
-                <a:latin typeface="Be Vietnam Pro" pitchFamily="34" charset="0"/>
-                <a:ea typeface="Be Vietnam Pro" pitchFamily="34" charset="-122"/>
-                <a:cs typeface="Be Vietnam Pro" pitchFamily="34" charset="-120"/>
-              </a:rPr>
-              <a:t> hiệu</a:t>
-            </a:r>
-            <a:r>
-              <a:rPr lang="en-US" sz="1950" b="1" dirty="0" spc="1" kern="0">
-                <a:solidFill>
-                  <a:srgbClr val="F3EEE3"/>
-                </a:solidFill>
-                <a:latin typeface="Be Vietnam Pro" pitchFamily="34" charset="0"/>
-                <a:ea typeface="Be Vietnam Pro" pitchFamily="34" charset="-122"/>
-                <a:cs typeface="Be Vietnam Pro" pitchFamily="34" charset="-120"/>
-              </a:rPr>
-              <a:t> quả</a:t>
             </a:r>
             <a:endParaRPr lang="en-US" sz="1950" dirty="0"/>
           </a:p>
@@ -9042,6 +8938,39 @@
               <a:buNone/>
             </a:pPr>
             <a:r>
+              <a:rPr lang="en-US" sz="2250" dirty="0" spc="-1" kern="0">
+                <a:solidFill>
+                  <a:srgbClr val="14161C"/>
+                </a:solidFill>
+                <a:latin typeface="Be Vietnam Pro" pitchFamily="34" charset="0"/>
+                <a:ea typeface="Be Vietnam Pro" pitchFamily="34" charset="-122"/>
+                <a:cs typeface="Be Vietnam Pro" pitchFamily="34" charset="-120"/>
+              </a:rPr>
+              <a:t>Cùng</a:t>
+            </a:r>
+            <a:r>
+              <a:rPr lang="en-US" sz="2250" dirty="0" spc="2" kern="0">
+                <a:solidFill>
+                  <a:srgbClr val="14161C"/>
+                </a:solidFill>
+                <a:latin typeface="Be Vietnam Pro" pitchFamily="34" charset="0"/>
+                <a:ea typeface="Be Vietnam Pro" pitchFamily="34" charset="-122"/>
+                <a:cs typeface="Be Vietnam Pro" pitchFamily="34" charset="-120"/>
+              </a:rPr>
+              <a:t> phép</a:t>
+            </a:r>
+            <a:r>
+              <a:rPr lang="en-US" sz="2250" dirty="0" spc="0" kern="0">
+                <a:solidFill>
+                  <a:srgbClr val="14161C"/>
+                </a:solidFill>
+                <a:latin typeface="Be Vietnam Pro" pitchFamily="34" charset="0"/>
+                <a:ea typeface="Be Vietnam Pro" pitchFamily="34" charset="-122"/>
+                <a:cs typeface="Be Vietnam Pro" pitchFamily="34" charset="-120"/>
+              </a:rPr>
+              <a:t> tính</a:t>
+            </a:r>
+            <a:r>
               <a:rPr lang="en-US" sz="2250" dirty="0" spc="1" kern="0">
                 <a:solidFill>
                   <a:srgbClr val="14161C"/>
@@ -9050,7 +8979,18 @@
                 <a:ea typeface="Be Vietnam Pro" pitchFamily="34" charset="-122"/>
                 <a:cs typeface="Be Vietnam Pro" pitchFamily="34" charset="-120"/>
               </a:rPr>
-              <a:t>Dùng</a:t>
+              <a:t> lặp</a:t>
+            </a:r>
+            <a:r>
+              <a:rPr lang="en-US" sz="2250" dirty="0" spc="-35" kern="0">
+                <a:solidFill>
+                  <a:srgbClr val="14161C"/>
+                </a:solidFill>
+                <a:latin typeface="Be Vietnam Pro" pitchFamily="34" charset="0"/>
+                <a:ea typeface="Be Vietnam Pro" pitchFamily="34" charset="-122"/>
+                <a:cs typeface="Be Vietnam Pro" pitchFamily="34" charset="-120"/>
+              </a:rPr>
+              <a:t> rất</a:t>
             </a:r>
             <a:r>
               <a:rPr lang="en-US" sz="2250" dirty="0" spc="-1" kern="0">
@@ -9064,28 +9004,6 @@
               <a:t> nhiều</a:t>
             </a:r>
             <a:r>
-              <a:rPr lang="en-US" sz="2250" dirty="0" spc="4" kern="0">
-                <a:solidFill>
-                  <a:srgbClr val="14161C"/>
-                </a:solidFill>
-                <a:latin typeface="Be Vietnam Pro" pitchFamily="34" charset="0"/>
-                <a:ea typeface="Be Vietnam Pro" pitchFamily="34" charset="-122"/>
-                <a:cs typeface="Be Vietnam Pro" pitchFamily="34" charset="-120"/>
-              </a:rPr>
-              <a:t> ở</a:t>
-            </a:r>
-            <a:r>
-              <a:rPr lang="en-US" sz="2250" dirty="0" spc="-1" kern="0">
-                <a:solidFill>
-                  <a:srgbClr val="14161C"/>
-                </a:solidFill>
-                <a:latin typeface="Be Vietnam Pro" pitchFamily="34" charset="0"/>
-                <a:ea typeface="Be Vietnam Pro" pitchFamily="34" charset="-122"/>
-                <a:cs typeface="Be Vietnam Pro" pitchFamily="34" charset="-120"/>
-              </a:rPr>
-              <a:t> nơi</a:t>
-            </a:r>
-            <a:r>
               <a:rPr lang="en-US" sz="2250" dirty="0" spc="1" kern="0">
                 <a:solidFill>
                   <a:srgbClr val="14161C"/>
@@ -9094,29 +9012,7 @@
                 <a:ea typeface="Be Vietnam Pro" pitchFamily="34" charset="-122"/>
                 <a:cs typeface="Be Vietnam Pro" pitchFamily="34" charset="-120"/>
               </a:rPr>
-              <a:t> cần</a:t>
-            </a:r>
-            <a:r>
-              <a:rPr lang="en-US" sz="2250" dirty="0" spc="-1" kern="0">
-                <a:solidFill>
-                  <a:srgbClr val="14161C"/>
-                </a:solidFill>
-                <a:latin typeface="Be Vietnam Pro" pitchFamily="34" charset="0"/>
-                <a:ea typeface="Be Vietnam Pro" pitchFamily="34" charset="-122"/>
-                <a:cs typeface="Be Vietnam Pro" pitchFamily="34" charset="-120"/>
-              </a:rPr>
-              <a:t> hiệu</a:t>
-            </a:r>
-            <a:r>
-              <a:rPr lang="en-US" sz="2250" dirty="0" spc="0" kern="0">
-                <a:solidFill>
-                  <a:srgbClr val="14161C"/>
-                </a:solidFill>
-                <a:latin typeface="Be Vietnam Pro" pitchFamily="34" charset="0"/>
-                <a:ea typeface="Be Vietnam Pro" pitchFamily="34" charset="-122"/>
-                <a:cs typeface="Be Vietnam Pro" pitchFamily="34" charset="-120"/>
-              </a:rPr>
-              <a:t> năng cao.</a:t>
+              <a:t> lần.</a:t>
             </a:r>
             <a:endParaRPr lang="en-US" sz="2250" dirty="0"/>
           </a:p>
@@ -9151,7 +9047,7 @@
               <a:buNone/>
             </a:pPr>
             <a:r>
-              <a:rPr lang="en-US" sz="1950" b="1" dirty="0" spc="2" kern="0">
+              <a:rPr lang="en-US" sz="1950" b="1" dirty="0" spc="13" kern="0">
                 <a:solidFill>
                   <a:srgbClr val="F3EEE3"/>
                 </a:solidFill>
@@ -9159,10 +9055,10 @@
                 <a:ea typeface="Be Vietnam Pro" pitchFamily="34" charset="-122"/>
                 <a:cs typeface="Be Vietnam Pro" pitchFamily="34" charset="-120"/>
               </a:rPr>
-              <a:t>Điều</a:t>
-            </a:r>
-            <a:r>
-              <a:rPr lang="en-US" sz="1950" b="1" dirty="0" spc="0" kern="0">
+              <a:t>Sức</a:t>
+            </a:r>
+            <a:r>
+              <a:rPr lang="en-US" sz="1950" b="1" dirty="0" spc="1" kern="0">
                 <a:solidFill>
                   <a:srgbClr val="F3EEE3"/>
                 </a:solidFill>
@@ -9170,18 +9066,7 @@
                 <a:ea typeface="Be Vietnam Pro" pitchFamily="34" charset="-122"/>
                 <a:cs typeface="Be Vietnam Pro" pitchFamily="34" charset="-120"/>
               </a:rPr>
-              <a:t> khiển chính</a:t>
-            </a:r>
-            <a:r>
-              <a:rPr lang="en-US" sz="1950" b="1" dirty="0" spc="-13" kern="0">
-                <a:solidFill>
-                  <a:srgbClr val="F3EEE3"/>
-                </a:solidFill>
-                <a:latin typeface="Be Vietnam Pro" pitchFamily="34" charset="0"/>
-                <a:ea typeface="Be Vietnam Pro" pitchFamily="34" charset="-122"/>
-                <a:cs typeface="Be Vietnam Pro" pitchFamily="34" charset="-120"/>
-              </a:rPr>
-              <a:t> xác</a:t>
+              <a:t> tính</a:t>
             </a:r>
             <a:endParaRPr lang="en-US" sz="1950" dirty="0"/>
           </a:p>
@@ -9216,7 +9101,7 @@
               <a:buNone/>
             </a:pPr>
             <a:r>
-              <a:rPr lang="en-US" sz="1950" b="1" dirty="0" spc="-62" kern="0">
+              <a:rPr lang="en-US" sz="1950" b="1" dirty="0" spc="-3" kern="0">
                 <a:solidFill>
                   <a:srgbClr val="F3EEE3"/>
                 </a:solidFill>
@@ -9224,10 +9109,10 @@
                 <a:ea typeface="Be Vietnam Pro" pitchFamily="34" charset="-122"/>
                 <a:cs typeface="Be Vietnam Pro" pitchFamily="34" charset="-120"/>
               </a:rPr>
-              <a:t>Tài</a:t>
-            </a:r>
-            <a:r>
-              <a:rPr lang="en-US" sz="1950" b="1" dirty="0" spc="-11" kern="0">
+              <a:t>Số</a:t>
+            </a:r>
+            <a:r>
+              <a:rPr lang="en-US" sz="1950" b="1" dirty="0" spc="0" kern="0">
                 <a:solidFill>
                   <a:srgbClr val="F3EEE3"/>
                 </a:solidFill>
@@ -9235,10 +9120,10 @@
                 <a:ea typeface="Be Vietnam Pro" pitchFamily="34" charset="-122"/>
                 <a:cs typeface="Be Vietnam Pro" pitchFamily="34" charset="-120"/>
               </a:rPr>
-              <a:t> nguyên</a:t>
-            </a:r>
-            <a:r>
-              <a:rPr lang="en-US" sz="1950" b="1" dirty="0" spc="1" kern="0">
+              <a:t> liệu</a:t>
+            </a:r>
+            <a:r>
+              <a:rPr lang="en-US" sz="1950" b="1" dirty="0" spc="-3" kern="0">
                 <a:solidFill>
                   <a:srgbClr val="F3EEE3"/>
                 </a:solidFill>
@@ -9246,18 +9131,7 @@
                 <a:ea typeface="Be Vietnam Pro" pitchFamily="34" charset="-122"/>
                 <a:cs typeface="Be Vietnam Pro" pitchFamily="34" charset="-120"/>
               </a:rPr>
-              <a:t> tính</a:t>
-            </a:r>
-            <a:r>
-              <a:rPr lang="en-US" sz="1950" b="1" dirty="0" spc="-3" kern="0">
-                <a:solidFill>
-                  <a:srgbClr val="F3EEE3"/>
-                </a:solidFill>
-                <a:latin typeface="Be Vietnam Pro" pitchFamily="34" charset="0"/>
-                <a:ea typeface="Be Vietnam Pro" pitchFamily="34" charset="-122"/>
-                <a:cs typeface="Be Vietnam Pro" pitchFamily="34" charset="-120"/>
-              </a:rPr>
-              <a:t> toán</a:t>
+              <a:t> lớn</a:t>
             </a:r>
             <a:endParaRPr lang="en-US" sz="1950" dirty="0"/>
           </a:p>
@@ -9752,7 +9626,7 @@
               <a:t> HAI</a:t>
             </a:r>
             <a:r>
-              <a:rPr lang="en-US" sz="1950" b="1" spc="223" kern="0" dirty="0">
+              <a:rPr lang="en-US" sz="1950" b="1" spc="227" kern="0" dirty="0">
                 <a:solidFill>
                   <a:srgbClr val="FFB454"/>
                 </a:solidFill>
@@ -9760,7 +9634,18 @@
                 <a:ea typeface="Be Vietnam Pro" pitchFamily="34" charset="-122"/>
                 <a:cs typeface="Be Vietnam Pro" pitchFamily="34" charset="-120"/>
               </a:rPr>
-              <a:t> MỤC</a:t>
+              <a:t> LĨNH</a:t>
+            </a:r>
+            <a:r>
+              <a:rPr lang="en-US" sz="1950" b="1" spc="225" kern="0" dirty="0">
+                <a:solidFill>
+                  <a:srgbClr val="FFB454"/>
+                </a:solidFill>
+                <a:latin typeface="Be Vietnam Pro" pitchFamily="34" charset="0"/>
+                <a:ea typeface="Be Vietnam Pro" pitchFamily="34" charset="-122"/>
+                <a:cs typeface="Be Vietnam Pro" pitchFamily="34" charset="-120"/>
+              </a:rPr>
+              <a:t> VỰC</a:t>
             </a:r>
             <a:r>
               <a:rPr lang="en-US" sz="1950" b="1" spc="224" kern="0" dirty="0">
@@ -9816,7 +9701,7 @@
               <a:buNone/>
             </a:pPr>
             <a:r>
-              <a:rPr lang="en-US" sz="7500" dirty="0" spc="-14" kern="0">
+              <a:rPr lang="en-US" sz="7500" dirty="0" spc="2" kern="0">
                 <a:solidFill>
                   <a:srgbClr val="F3EEE3"/>
                 </a:solidFill>
@@ -9824,10 +9709,10 @@
                 <a:ea typeface="Bricolage Grotesque ExtraBold" pitchFamily="34" charset="-122"/>
                 <a:cs typeface="Bricolage Grotesque ExtraBold" pitchFamily="34" charset="-120"/>
               </a:rPr>
-              <a:t>Một</a:t>
-            </a:r>
-            <a:r>
-              <a:rPr lang="en-US" sz="7500" dirty="0" spc="1" kern="0">
+              <a:t>Hai</a:t>
+            </a:r>
+            <a:r>
+              <a:rPr lang="en-US" sz="7500" dirty="0" spc="28" kern="0">
                 <a:solidFill>
                   <a:srgbClr val="F3EEE3"/>
                 </a:solidFill>
@@ -9835,19 +9720,10 @@
                 <a:ea typeface="Bricolage Grotesque ExtraBold" pitchFamily="34" charset="-122"/>
                 <a:cs typeface="Bricolage Grotesque ExtraBold" pitchFamily="34" charset="-120"/>
               </a:rPr>
-              <a:t> mục</a:t>
-            </a:r>
-            <a:endParaRPr lang="en-US" sz="7500" dirty="0"/>
-          </a:p>
-          <a:p>
-            <a:pPr algn="l" indent="0" marL="0">
-              <a:lnSpc>
-                <a:spcPts val="7875"/>
-              </a:lnSpc>
-              <a:buNone/>
-            </a:pPr>
-            <a:r>
-              <a:rPr lang="en-US" sz="7500" dirty="0" spc="30" kern="0">
+              <a:t> lĩnh</a:t>
+            </a:r>
+            <a:r>
+              <a:rPr lang="en-US" sz="7500" dirty="0" spc="-75" kern="0">
                 <a:solidFill>
                   <a:srgbClr val="F3EEE3"/>
                 </a:solidFill>
@@ -9855,10 +9731,10 @@
                 <a:ea typeface="Bricolage Grotesque ExtraBold" pitchFamily="34" charset="-122"/>
                 <a:cs typeface="Bricolage Grotesque ExtraBold" pitchFamily="34" charset="-120"/>
               </a:rPr>
-              <a:t>để</a:t>
-            </a:r>
-            <a:r>
-              <a:rPr lang="en-US" sz="7500" dirty="0" spc="-14" kern="0">
+              <a:t> vực</a:t>
+            </a:r>
+            <a:r>
+              <a:rPr lang="en-US" sz="7500" dirty="0" spc="2" kern="0">
                 <a:solidFill>
                   <a:srgbClr val="F3EEE3"/>
                 </a:solidFill>
@@ -9866,7 +9742,18 @@
                 <a:ea typeface="Bricolage Grotesque ExtraBold" pitchFamily="34" charset="-122"/>
                 <a:cs typeface="Bricolage Grotesque ExtraBold" pitchFamily="34" charset="-120"/>
               </a:rPr>
-              <a:t> trống</a:t>
+              <a:t> còn</a:t>
+            </a:r>
+            <a:r>
+              <a:rPr lang="en-US" sz="7500" dirty="0" spc="1" kern="0">
+                <a:solidFill>
+                  <a:srgbClr val="F3EEE3"/>
+                </a:solidFill>
+                <a:latin typeface="Bricolage Grotesque ExtraBold" pitchFamily="34" charset="0"/>
+                <a:ea typeface="Bricolage Grotesque ExtraBold" pitchFamily="34" charset="-122"/>
+                <a:cs typeface="Bricolage Grotesque ExtraBold" pitchFamily="34" charset="-120"/>
+              </a:rPr>
+              <a:t> lại</a:t>
             </a:r>
             <a:endParaRPr lang="en-US" sz="7500" dirty="0"/>
           </a:p>
@@ -9994,7 +9881,7 @@
               <a:buNone/>
             </a:pPr>
             <a:r>
-              <a:rPr lang="en-US" sz="2700" dirty="0" spc="1" kern="0">
+              <a:rPr lang="en-US" sz="2700" dirty="0" spc="-29" kern="0">
                 <a:solidFill>
                   <a:srgbClr val="C4C8D6"/>
                 </a:solidFill>
@@ -10002,10 +9889,10 @@
                 <a:ea typeface="Be Vietnam Pro" pitchFamily="34" charset="-122"/>
                 <a:cs typeface="Be Vietnam Pro" pitchFamily="34" charset="-120"/>
               </a:rPr>
-              <a:t>Mục</a:t>
-            </a:r>
-            <a:r>
-              <a:rPr lang="en-US" sz="2700" dirty="0" spc="14" kern="0">
+              <a:t>Trình</a:t>
+            </a:r>
+            <a:r>
+              <a:rPr lang="en-US" sz="2700" dirty="0" spc="-21" kern="0">
                 <a:solidFill>
                   <a:srgbClr val="C4C8D6"/>
                 </a:solidFill>
@@ -10013,7 +9900,117 @@
                 <a:ea typeface="Be Vietnam Pro" pitchFamily="34" charset="-122"/>
                 <a:cs typeface="Be Vietnam Pro" pitchFamily="34" charset="-120"/>
               </a:rPr>
-              <a:t> đầu</a:t>
+              <a:t> duyệt</a:t>
+            </a:r>
+            <a:r>
+              <a:rPr lang="en-US" sz="2700" dirty="0" spc="-8" kern="0">
+                <a:solidFill>
+                  <a:srgbClr val="C4C8D6"/>
+                </a:solidFill>
+                <a:latin typeface="Be Vietnam Pro" pitchFamily="34" charset="0"/>
+                <a:ea typeface="Be Vietnam Pro" pitchFamily="34" charset="-122"/>
+                <a:cs typeface="Be Vietnam Pro" pitchFamily="34" charset="-120"/>
+              </a:rPr>
+              <a:t> chạy</a:t>
+            </a:r>
+            <a:r>
+              <a:rPr lang="en-US" sz="2700" dirty="0" spc="-23" kern="0">
+                <a:solidFill>
+                  <a:srgbClr val="C4C8D6"/>
+                </a:solidFill>
+                <a:latin typeface="Be Vietnam Pro" pitchFamily="34" charset="0"/>
+                <a:ea typeface="Be Vietnam Pro" pitchFamily="34" charset="-122"/>
+                <a:cs typeface="Be Vietnam Pro" pitchFamily="34" charset="-120"/>
+              </a:rPr>
+              <a:t> trên</a:t>
+            </a:r>
+            <a:r>
+              <a:rPr lang="en-US" sz="2700" dirty="0" spc="-12" kern="0">
+                <a:solidFill>
+                  <a:srgbClr val="C4C8D6"/>
+                </a:solidFill>
+                <a:latin typeface="Be Vietnam Pro" pitchFamily="34" charset="0"/>
+                <a:ea typeface="Be Vietnam Pro" pitchFamily="34" charset="-122"/>
+                <a:cs typeface="Be Vietnam Pro" pitchFamily="34" charset="-120"/>
+              </a:rPr>
+              <a:t> máy</a:t>
+            </a:r>
+            <a:r>
+              <a:rPr lang="en-US" sz="2700" dirty="0" spc="6" kern="0">
+                <a:solidFill>
+                  <a:srgbClr val="C4C8D6"/>
+                </a:solidFill>
+                <a:latin typeface="Be Vietnam Pro" pitchFamily="34" charset="0"/>
+                <a:ea typeface="Be Vietnam Pro" pitchFamily="34" charset="-122"/>
+                <a:cs typeface="Be Vietnam Pro" pitchFamily="34" charset="-120"/>
+              </a:rPr>
+              <a:t> người</a:t>
+            </a:r>
+            <a:r>
+              <a:rPr lang="en-US" sz="2700" dirty="0" spc="-3" kern="0">
+                <a:solidFill>
+                  <a:srgbClr val="C4C8D6"/>
+                </a:solidFill>
+                <a:latin typeface="Be Vietnam Pro" pitchFamily="34" charset="0"/>
+                <a:ea typeface="Be Vietnam Pro" pitchFamily="34" charset="-122"/>
+                <a:cs typeface="Be Vietnam Pro" pitchFamily="34" charset="-120"/>
+              </a:rPr>
+              <a:t> dùng.</a:t>
+            </a:r>
+            <a:r>
+              <a:rPr lang="en-US" sz="2700" dirty="0" spc="-60" kern="0">
+                <a:solidFill>
+                  <a:srgbClr val="C4C8D6"/>
+                </a:solidFill>
+                <a:latin typeface="Be Vietnam Pro" pitchFamily="34" charset="0"/>
+                <a:ea typeface="Be Vietnam Pro" pitchFamily="34" charset="-122"/>
+                <a:cs typeface="Be Vietnam Pro" pitchFamily="34" charset="-120"/>
+              </a:rPr>
+              <a:t> Tài</a:t>
+            </a:r>
+            <a:r>
+              <a:rPr lang="en-US" sz="2700" dirty="0" spc="-2" kern="0">
+                <a:solidFill>
+                  <a:srgbClr val="C4C8D6"/>
+                </a:solidFill>
+                <a:latin typeface="Be Vietnam Pro" pitchFamily="34" charset="0"/>
+                <a:ea typeface="Be Vietnam Pro" pitchFamily="34" charset="-122"/>
+                <a:cs typeface="Be Vietnam Pro" pitchFamily="34" charset="-120"/>
+              </a:rPr>
+              <a:t> chính</a:t>
+            </a:r>
+            <a:r>
+              <a:rPr lang="en-US" sz="2700" dirty="0" spc="-15" kern="0">
+                <a:solidFill>
+                  <a:srgbClr val="C4C8D6"/>
+                </a:solidFill>
+                <a:latin typeface="Be Vietnam Pro" pitchFamily="34" charset="0"/>
+                <a:ea typeface="Be Vietnam Pro" pitchFamily="34" charset="-122"/>
+                <a:cs typeface="Be Vietnam Pro" pitchFamily="34" charset="-120"/>
+              </a:rPr>
+              <a:t> gồm</a:t>
+            </a:r>
+            <a:r>
+              <a:rPr lang="en-US" sz="2700" dirty="0" spc="-2" kern="0">
+                <a:solidFill>
+                  <a:srgbClr val="C4C8D6"/>
+                </a:solidFill>
+                <a:latin typeface="Be Vietnam Pro" pitchFamily="34" charset="0"/>
+                <a:ea typeface="Be Vietnam Pro" pitchFamily="34" charset="-122"/>
+                <a:cs typeface="Be Vietnam Pro" pitchFamily="34" charset="-120"/>
+              </a:rPr>
+              <a:t> nhiều</a:t>
+            </a:r>
+            <a:r>
+              <a:rPr lang="en-US" sz="2700" dirty="0" spc="-4" kern="0">
+                <a:solidFill>
+                  <a:srgbClr val="C4C8D6"/>
+                </a:solidFill>
+                <a:latin typeface="Be Vietnam Pro" pitchFamily="34" charset="0"/>
+                <a:ea typeface="Be Vietnam Pro" pitchFamily="34" charset="-122"/>
+                <a:cs typeface="Be Vietnam Pro" pitchFamily="34" charset="-120"/>
+              </a:rPr>
+              <a:t> loại</a:t>
             </a:r>
             <a:r>
               <a:rPr lang="en-US" sz="2700" dirty="0" spc="-1" kern="0">
@@ -10024,10 +10021,10 @@
                 <a:ea typeface="Be Vietnam Pro" pitchFamily="34" charset="-122"/>
                 <a:cs typeface="Be Vietnam Pro" pitchFamily="34" charset="-120"/>
               </a:rPr>
-              <a:t> có</a:t>
-            </a:r>
-            <a:r>
-              <a:rPr lang="en-US" sz="2700" dirty="0" spc="-7" kern="0">
+              <a:t> phần</a:t>
+            </a:r>
+            <a:r>
+              <a:rPr lang="en-US" sz="2700" dirty="0" spc="-4" kern="0">
                 <a:solidFill>
                   <a:srgbClr val="C4C8D6"/>
                 </a:solidFill>
@@ -10035,150 +10032,7 @@
                 <a:ea typeface="Be Vietnam Pro" pitchFamily="34" charset="-122"/>
                 <a:cs typeface="Be Vietnam Pro" pitchFamily="34" charset="-120"/>
               </a:rPr>
-              <a:t> một</a:t>
-            </a:r>
-            <a:r>
-              <a:rPr lang="en-US" sz="2700" dirty="0" spc="1" kern="0">
-                <a:solidFill>
-                  <a:srgbClr val="C4C8D6"/>
-                </a:solidFill>
-                <a:latin typeface="Be Vietnam Pro" pitchFamily="34" charset="0"/>
-                <a:ea typeface="Be Vietnam Pro" pitchFamily="34" charset="-122"/>
-                <a:cs typeface="Be Vietnam Pro" pitchFamily="34" charset="-120"/>
-              </a:rPr>
-              <a:t> câu</a:t>
-            </a:r>
-            <a:r>
-              <a:rPr lang="en-US" sz="2700" dirty="0" spc="-2" kern="0">
-                <a:solidFill>
-                  <a:srgbClr val="C4C8D6"/>
-                </a:solidFill>
-                <a:latin typeface="Be Vietnam Pro" pitchFamily="34" charset="0"/>
-                <a:ea typeface="Be Vietnam Pro" pitchFamily="34" charset="-122"/>
-                <a:cs typeface="Be Vietnam Pro" pitchFamily="34" charset="-120"/>
-              </a:rPr>
-              <a:t> mô</a:t>
-            </a:r>
-            <a:r>
-              <a:rPr lang="en-US" sz="2700" dirty="0" spc="-14" kern="0">
-                <a:solidFill>
-                  <a:srgbClr val="C4C8D6"/>
-                </a:solidFill>
-                <a:latin typeface="Be Vietnam Pro" pitchFamily="34" charset="0"/>
-                <a:ea typeface="Be Vietnam Pro" pitchFamily="34" charset="-122"/>
-                <a:cs typeface="Be Vietnam Pro" pitchFamily="34" charset="-120"/>
-              </a:rPr>
-              <a:t> tả.</a:t>
-            </a:r>
-            <a:r>
-              <a:rPr lang="en-US" sz="2700" dirty="0" spc="0" kern="0">
-                <a:solidFill>
-                  <a:srgbClr val="C4C8D6"/>
-                </a:solidFill>
-                <a:latin typeface="Be Vietnam Pro" pitchFamily="34" charset="0"/>
-                <a:ea typeface="Be Vietnam Pro" pitchFamily="34" charset="-122"/>
-                <a:cs typeface="Be Vietnam Pro" pitchFamily="34" charset="-120"/>
-              </a:rPr>
-              <a:t> Mục</a:t>
-            </a:r>
-            <a:r>
-              <a:rPr lang="en-US" sz="2700" dirty="0" spc="-9" kern="0">
-                <a:solidFill>
-                  <a:srgbClr val="C4C8D6"/>
-                </a:solidFill>
-                <a:latin typeface="Be Vietnam Pro" pitchFamily="34" charset="0"/>
-                <a:ea typeface="Be Vietnam Pro" pitchFamily="34" charset="-122"/>
-                <a:cs typeface="Be Vietnam Pro" pitchFamily="34" charset="-120"/>
-              </a:rPr>
-              <a:t> sau</a:t>
-            </a:r>
-            <a:r>
-              <a:rPr lang="en-US" sz="2700" dirty="0" spc="-1" kern="0">
-                <a:solidFill>
-                  <a:srgbClr val="C4C8D6"/>
-                </a:solidFill>
-                <a:latin typeface="Be Vietnam Pro" pitchFamily="34" charset="0"/>
-                <a:ea typeface="Be Vietnam Pro" pitchFamily="34" charset="-122"/>
-                <a:cs typeface="Be Vietnam Pro" pitchFamily="34" charset="-120"/>
-              </a:rPr>
-              <a:t> chỉ</a:t>
-            </a:r>
-            <a:r>
-              <a:rPr lang="en-US" sz="2700" dirty="0" spc="0" kern="0">
-                <a:solidFill>
-                  <a:srgbClr val="C4C8D6"/>
-                </a:solidFill>
-                <a:latin typeface="Be Vietnam Pro" pitchFamily="34" charset="0"/>
-                <a:ea typeface="Be Vietnam Pro" pitchFamily="34" charset="-122"/>
-                <a:cs typeface="Be Vietnam Pro" pitchFamily="34" charset="-120"/>
-              </a:rPr>
-              <a:t> có tiêu</a:t>
-            </a:r>
-            <a:r>
-              <a:rPr lang="en-US" sz="2700" dirty="0" spc="12" kern="0">
-                <a:solidFill>
-                  <a:srgbClr val="C4C8D6"/>
-                </a:solidFill>
-                <a:latin typeface="Be Vietnam Pro" pitchFamily="34" charset="0"/>
-                <a:ea typeface="Be Vietnam Pro" pitchFamily="34" charset="-122"/>
-                <a:cs typeface="Be Vietnam Pro" pitchFamily="34" charset="-120"/>
-              </a:rPr>
-              <a:t> đề,</a:t>
-            </a:r>
-            <a:r>
-              <a:rPr lang="en-US" sz="2700" dirty="0" spc="-2" kern="0">
-                <a:solidFill>
-                  <a:srgbClr val="C4C8D6"/>
-                </a:solidFill>
-                <a:latin typeface="Be Vietnam Pro" pitchFamily="34" charset="0"/>
-                <a:ea typeface="Be Vietnam Pro" pitchFamily="34" charset="-122"/>
-                <a:cs typeface="Be Vietnam Pro" pitchFamily="34" charset="-120"/>
-              </a:rPr>
-              <a:t> nguồn không</a:t>
-            </a:r>
-            <a:r>
-              <a:rPr lang="en-US" sz="2700" dirty="0" spc="-5" kern="0">
-                <a:solidFill>
-                  <a:srgbClr val="C4C8D6"/>
-                </a:solidFill>
-                <a:latin typeface="Be Vietnam Pro" pitchFamily="34" charset="0"/>
-                <a:ea typeface="Be Vietnam Pro" pitchFamily="34" charset="-122"/>
-                <a:cs typeface="Be Vietnam Pro" pitchFamily="34" charset="-120"/>
-              </a:rPr>
-              <a:t> viết</a:t>
-            </a:r>
-            <a:r>
-              <a:rPr lang="en-US" sz="2700" dirty="0" spc="-3" kern="0">
-                <a:solidFill>
-                  <a:srgbClr val="C4C8D6"/>
-                </a:solidFill>
-                <a:latin typeface="Be Vietnam Pro" pitchFamily="34" charset="0"/>
-                <a:ea typeface="Be Vietnam Pro" pitchFamily="34" charset="-122"/>
-                <a:cs typeface="Be Vietnam Pro" pitchFamily="34" charset="-120"/>
-              </a:rPr>
-              <a:t> gì</a:t>
-            </a:r>
-            <a:r>
-              <a:rPr lang="en-US" sz="2700" dirty="0" spc="-7" kern="0">
-                <a:solidFill>
-                  <a:srgbClr val="C4C8D6"/>
-                </a:solidFill>
-                <a:latin typeface="Be Vietnam Pro" pitchFamily="34" charset="0"/>
-                <a:ea typeface="Be Vietnam Pro" pitchFamily="34" charset="-122"/>
-                <a:cs typeface="Be Vietnam Pro" pitchFamily="34" charset="-120"/>
-              </a:rPr>
-              <a:t> bên</a:t>
-            </a:r>
-            <a:r>
-              <a:rPr lang="en-US" sz="2700" dirty="0" spc="6" kern="0">
-                <a:solidFill>
-                  <a:srgbClr val="C4C8D6"/>
-                </a:solidFill>
-                <a:latin typeface="Be Vietnam Pro" pitchFamily="34" charset="0"/>
-                <a:ea typeface="Be Vietnam Pro" pitchFamily="34" charset="-122"/>
-                <a:cs typeface="Be Vietnam Pro" pitchFamily="34" charset="-120"/>
-              </a:rPr>
-              <a:t> dưới.</a:t>
+              <a:t> mềm.</a:t>
             </a:r>
             <a:endParaRPr lang="en-US" sz="2700" dirty="0"/>
           </a:p>
@@ -10432,6 +10286,61 @@
               <a:buNone/>
             </a:pPr>
             <a:r>
+              <a:rPr lang="en-US" sz="2250" dirty="0" spc="-12" kern="0">
+                <a:solidFill>
+                  <a:srgbClr val="C4C8D6"/>
+                </a:solidFill>
+                <a:latin typeface="Be Vietnam Pro" pitchFamily="34" charset="0"/>
+                <a:ea typeface="Be Vietnam Pro" pitchFamily="34" charset="-122"/>
+                <a:cs typeface="Be Vietnam Pro" pitchFamily="34" charset="-120"/>
+              </a:rPr>
+              <a:t>Chạy</a:t>
+            </a:r>
+            <a:r>
+              <a:rPr lang="en-US" sz="2250" dirty="0" spc="-18" kern="0">
+                <a:solidFill>
+                  <a:srgbClr val="C4C8D6"/>
+                </a:solidFill>
+                <a:latin typeface="Be Vietnam Pro" pitchFamily="34" charset="0"/>
+                <a:ea typeface="Be Vietnam Pro" pitchFamily="34" charset="-122"/>
+                <a:cs typeface="Be Vietnam Pro" pitchFamily="34" charset="-120"/>
+              </a:rPr>
+              <a:t> trên</a:t>
+            </a:r>
+            <a:r>
+              <a:rPr lang="en-US" sz="2250" dirty="0" spc="-10" kern="0">
+                <a:solidFill>
+                  <a:srgbClr val="C4C8D6"/>
+                </a:solidFill>
+                <a:latin typeface="Be Vietnam Pro" pitchFamily="34" charset="0"/>
+                <a:ea typeface="Be Vietnam Pro" pitchFamily="34" charset="-122"/>
+                <a:cs typeface="Be Vietnam Pro" pitchFamily="34" charset="-120"/>
+              </a:rPr>
+              <a:t> máy</a:t>
+            </a:r>
+            <a:r>
+              <a:rPr lang="en-US" sz="2250" dirty="0" spc="5" kern="0">
+                <a:solidFill>
+                  <a:srgbClr val="C4C8D6"/>
+                </a:solidFill>
+                <a:latin typeface="Be Vietnam Pro" pitchFamily="34" charset="0"/>
+                <a:ea typeface="Be Vietnam Pro" pitchFamily="34" charset="-122"/>
+                <a:cs typeface="Be Vietnam Pro" pitchFamily="34" charset="-120"/>
+              </a:rPr>
+              <a:t> người</a:t>
+            </a:r>
+            <a:r>
+              <a:rPr lang="en-US" sz="2250" dirty="0" spc="3" kern="0">
+                <a:solidFill>
+                  <a:srgbClr val="C4C8D6"/>
+                </a:solidFill>
+                <a:latin typeface="Be Vietnam Pro" pitchFamily="34" charset="0"/>
+                <a:ea typeface="Be Vietnam Pro" pitchFamily="34" charset="-122"/>
+                <a:cs typeface="Be Vietnam Pro" pitchFamily="34" charset="-120"/>
+              </a:rPr>
+              <a:t> dùng:</a:t>
+            </a:r>
+            <a:r>
               <a:rPr lang="en-US" sz="2250" dirty="0" spc="1" kern="0">
                 <a:solidFill>
                   <a:srgbClr val="C4C8D6"/>
@@ -10440,10 +10349,10 @@
                 <a:ea typeface="Be Vietnam Pro" pitchFamily="34" charset="-122"/>
                 <a:cs typeface="Be Vietnam Pro" pitchFamily="34" charset="-120"/>
               </a:rPr>
-              <a:t>Dùng</a:t>
-            </a:r>
-            <a:r>
-              <a:rPr lang="en-US" sz="2250" dirty="0" spc="16" kern="0">
+              <a:t> nhanh</a:t>
+            </a:r>
+            <a:r>
+              <a:rPr lang="en-US" sz="2250" dirty="0" spc="-2" kern="0">
                 <a:solidFill>
                   <a:srgbClr val="C4C8D6"/>
                 </a:solidFill>
@@ -10451,7 +10360,7 @@
                 <a:ea typeface="Be Vietnam Pro" pitchFamily="34" charset="-122"/>
                 <a:cs typeface="Be Vietnam Pro" pitchFamily="34" charset="-120"/>
               </a:rPr>
-              <a:t> để</a:t>
+              <a:t> mà</a:t>
             </a:r>
             <a:r>
               <a:rPr lang="en-US" sz="2250" dirty="0" spc="-9" kern="0">
@@ -10462,10 +10371,10 @@
                 <a:ea typeface="Be Vietnam Pro" pitchFamily="34" charset="-122"/>
                 <a:cs typeface="Be Vietnam Pro" pitchFamily="34" charset="-120"/>
               </a:rPr>
-              <a:t> phát</a:t>
-            </a:r>
-            <a:r>
-              <a:rPr lang="en-US" sz="2250" dirty="0" spc="6" kern="0">
+              <a:t> gọn</a:t>
+            </a:r>
+            <a:r>
+              <a:rPr lang="en-US" sz="2250" dirty="0" spc="0" kern="0">
                 <a:solidFill>
                   <a:srgbClr val="C4C8D6"/>
                 </a:solidFill>
@@ -10473,10 +10382,10 @@
                 <a:ea typeface="Be Vietnam Pro" pitchFamily="34" charset="-122"/>
                 <a:cs typeface="Be Vietnam Pro" pitchFamily="34" charset="-120"/>
               </a:rPr>
-              <a:t> triển</a:t>
-            </a:r>
-            <a:r>
-              <a:rPr lang="en-US" sz="2250" dirty="0" spc="7" kern="0">
+              <a:t> bộ</a:t>
+            </a:r>
+            <a:r>
+              <a:rPr lang="en-US" sz="2250" dirty="0" spc="3" kern="0">
                 <a:solidFill>
                   <a:srgbClr val="C4C8D6"/>
                 </a:solidFill>
@@ -10484,84 +10393,7 @@
                 <a:ea typeface="Be Vietnam Pro" pitchFamily="34" charset="-122"/>
                 <a:cs typeface="Be Vietnam Pro" pitchFamily="34" charset="-120"/>
               </a:rPr>
-              <a:t> trình</a:t>
-            </a:r>
-            <a:r>
-              <a:rPr lang="en-US" sz="2250" dirty="0" spc="-16" kern="0">
-                <a:solidFill>
-                  <a:srgbClr val="C4C8D6"/>
-                </a:solidFill>
-                <a:latin typeface="Be Vietnam Pro" pitchFamily="34" charset="0"/>
-                <a:ea typeface="Be Vietnam Pro" pitchFamily="34" charset="-122"/>
-                <a:cs typeface="Be Vietnam Pro" pitchFamily="34" charset="-120"/>
-              </a:rPr>
-              <a:t> duyệt</a:t>
-            </a:r>
-            <a:r>
-              <a:rPr lang="en-US" sz="2250" dirty="0" spc="-17" kern="0">
-                <a:solidFill>
-                  <a:srgbClr val="C4C8D6"/>
-                </a:solidFill>
-                <a:latin typeface="Be Vietnam Pro" pitchFamily="34" charset="0"/>
-                <a:ea typeface="Be Vietnam Pro" pitchFamily="34" charset="-122"/>
-                <a:cs typeface="Be Vietnam Pro" pitchFamily="34" charset="-120"/>
-              </a:rPr>
-              <a:t> và</a:t>
-            </a:r>
-            <a:r>
-              <a:rPr lang="en-US" sz="2250" dirty="0" spc="2" kern="0">
-                <a:solidFill>
-                  <a:srgbClr val="C4C8D6"/>
-                </a:solidFill>
-                <a:latin typeface="Be Vietnam Pro" pitchFamily="34" charset="0"/>
-                <a:ea typeface="Be Vietnam Pro" pitchFamily="34" charset="-122"/>
-                <a:cs typeface="Be Vietnam Pro" pitchFamily="34" charset="-120"/>
-              </a:rPr>
-              <a:t> các</a:t>
-            </a:r>
-            <a:r>
-              <a:rPr lang="en-US" sz="2250" dirty="0" spc="0" kern="0">
-                <a:solidFill>
-                  <a:srgbClr val="C4C8D6"/>
-                </a:solidFill>
-                <a:latin typeface="Be Vietnam Pro" pitchFamily="34" charset="0"/>
-                <a:ea typeface="Be Vietnam Pro" pitchFamily="34" charset="-122"/>
-                <a:cs typeface="Be Vietnam Pro" pitchFamily="34" charset="-120"/>
-              </a:rPr>
-              <a:t> thành</a:t>
-            </a:r>
-            <a:r>
-              <a:rPr lang="en-US" sz="2250" dirty="0" spc="1" kern="0">
-                <a:solidFill>
-                  <a:srgbClr val="C4C8D6"/>
-                </a:solidFill>
-                <a:latin typeface="Be Vietnam Pro" pitchFamily="34" charset="0"/>
-                <a:ea typeface="Be Vietnam Pro" pitchFamily="34" charset="-122"/>
-                <a:cs typeface="Be Vietnam Pro" pitchFamily="34" charset="-120"/>
-              </a:rPr>
-              <a:t> phần</a:t>
-            </a:r>
-            <a:r>
-              <a:rPr lang="en-US" sz="2250" dirty="0" spc="2" kern="0">
-                <a:solidFill>
-                  <a:srgbClr val="C4C8D6"/>
-                </a:solidFill>
-                <a:latin typeface="Be Vietnam Pro" pitchFamily="34" charset="0"/>
-                <a:ea typeface="Be Vietnam Pro" pitchFamily="34" charset="-122"/>
-                <a:cs typeface="Be Vietnam Pro" pitchFamily="34" charset="-120"/>
-              </a:rPr>
-              <a:t> của</a:t>
-            </a:r>
-            <a:r>
-              <a:rPr lang="en-US" sz="2250" dirty="0" spc="5" kern="0">
-                <a:solidFill>
-                  <a:srgbClr val="C4C8D6"/>
-                </a:solidFill>
-                <a:latin typeface="Be Vietnam Pro" pitchFamily="34" charset="0"/>
-                <a:ea typeface="Be Vietnam Pro" pitchFamily="34" charset="-122"/>
-                <a:cs typeface="Be Vietnam Pro" pitchFamily="34" charset="-120"/>
-              </a:rPr>
-              <a:t> nó.</a:t>
+              <a:t> nhớ.</a:t>
             </a:r>
             <a:endParaRPr lang="en-US" sz="2250" dirty="0"/>
           </a:p>
@@ -10600,10 +10432,10 @@
                 <a:ea typeface="Be Vietnam Pro" pitchFamily="34" charset="-122"/>
                 <a:cs typeface="Be Vietnam Pro" pitchFamily="34" charset="-120"/>
               </a:rPr>
-              <a:t>THÀNH PHẦN NGUỒN</a:t>
-            </a:r>
-            <a:r>
-              <a:rPr lang="en-US" sz="1800" b="1" spc="226" kern="0" dirty="0">
+              <a:t>ĐIỀU</a:t>
+            </a:r>
+            <a:r>
+              <a:rPr lang="en-US" sz="1800" b="1" spc="224" kern="0" dirty="0">
                 <a:solidFill>
                   <a:srgbClr val="9AA0B5"/>
                 </a:solidFill>
@@ -10611,7 +10443,29 @@
                 <a:ea typeface="Be Vietnam Pro" pitchFamily="34" charset="-122"/>
                 <a:cs typeface="Be Vietnam Pro" pitchFamily="34" charset="-120"/>
               </a:rPr>
-              <a:t> NÊU</a:t>
+              <a:t> TRÌNH</a:t>
+            </a:r>
+            <a:r>
+              <a:rPr lang="en-US" sz="1800" b="1" spc="230" kern="0" dirty="0">
+                <a:solidFill>
+                  <a:srgbClr val="9AA0B5"/>
+                </a:solidFill>
+                <a:latin typeface="Be Vietnam Pro" pitchFamily="34" charset="0"/>
+                <a:ea typeface="Be Vietnam Pro" pitchFamily="34" charset="-122"/>
+                <a:cs typeface="Be Vietnam Pro" pitchFamily="34" charset="-120"/>
+              </a:rPr>
+              <a:t> DUYỆT</a:t>
+            </a:r>
+            <a:r>
+              <a:rPr lang="en-US" sz="1800" b="1" spc="225" kern="0" dirty="0">
+                <a:solidFill>
+                  <a:srgbClr val="9AA0B5"/>
+                </a:solidFill>
+                <a:latin typeface="Be Vietnam Pro" pitchFamily="34" charset="0"/>
+                <a:ea typeface="Be Vietnam Pro" pitchFamily="34" charset="-122"/>
+                <a:cs typeface="Be Vietnam Pro" pitchFamily="34" charset="-120"/>
+              </a:rPr>
+              <a:t> ĐÒI</a:t>
             </a:r>
             <a:endParaRPr lang="en-US" sz="1800" dirty="0"/>
           </a:p>
@@ -10646,48 +10500,48 @@
               <a:buNone/>
             </a:pPr>
             <a:r>
-              <a:rPr lang="en-US" sz="2100" b="1" dirty="0" spc="-2" kern="0">
-                <a:solidFill>
-                  <a:srgbClr val="14161C"/>
-                </a:solidFill>
-                <a:latin typeface="Be Vietnam Pro" pitchFamily="34" charset="0"/>
-                <a:ea typeface="Be Vietnam Pro" pitchFamily="34" charset="-122"/>
-                <a:cs typeface="Be Vietnam Pro" pitchFamily="34" charset="-120"/>
-              </a:rPr>
-              <a:t>Bộ</a:t>
-            </a:r>
-            <a:r>
-              <a:rPr lang="en-US" sz="2100" b="1" dirty="0" spc="-10" kern="0">
-                <a:solidFill>
-                  <a:srgbClr val="14161C"/>
-                </a:solidFill>
-                <a:latin typeface="Be Vietnam Pro" pitchFamily="34" charset="0"/>
-                <a:ea typeface="Be Vietnam Pro" pitchFamily="34" charset="-122"/>
-                <a:cs typeface="Be Vietnam Pro" pitchFamily="34" charset="-120"/>
-              </a:rPr>
-              <a:t> máy</a:t>
-            </a:r>
-            <a:r>
-              <a:rPr lang="en-US" sz="2100" b="1" dirty="0" spc="19" kern="0">
-                <a:solidFill>
-                  <a:srgbClr val="14161C"/>
-                </a:solidFill>
-                <a:latin typeface="Be Vietnam Pro" pitchFamily="34" charset="0"/>
-                <a:ea typeface="Be Vietnam Pro" pitchFamily="34" charset="-122"/>
-                <a:cs typeface="Be Vietnam Pro" pitchFamily="34" charset="-120"/>
-              </a:rPr>
-              <a:t> dựng</a:t>
-            </a:r>
-            <a:r>
-              <a:rPr lang="en-US" sz="2100" b="1" dirty="0" spc="-11" kern="0">
-                <a:solidFill>
-                  <a:srgbClr val="14161C"/>
-                </a:solidFill>
-                <a:latin typeface="Be Vietnam Pro" pitchFamily="34" charset="0"/>
-                <a:ea typeface="Be Vietnam Pro" pitchFamily="34" charset="-122"/>
-                <a:cs typeface="Be Vietnam Pro" pitchFamily="34" charset="-120"/>
-              </a:rPr>
-              <a:t> trang</a:t>
+              <a:rPr lang="en-US" sz="2100" b="1" dirty="0" spc="-1" kern="0">
+                <a:solidFill>
+                  <a:srgbClr val="14161C"/>
+                </a:solidFill>
+                <a:latin typeface="Be Vietnam Pro" pitchFamily="34" charset="0"/>
+                <a:ea typeface="Be Vietnam Pro" pitchFamily="34" charset="-122"/>
+                <a:cs typeface="Be Vietnam Pro" pitchFamily="34" charset="-120"/>
+              </a:rPr>
+              <a:t>Nhanh,</a:t>
+            </a:r>
+            <a:r>
+              <a:rPr lang="en-US" sz="2100" b="1" dirty="0" spc="-9" kern="0">
+                <a:solidFill>
+                  <a:srgbClr val="14161C"/>
+                </a:solidFill>
+                <a:latin typeface="Be Vietnam Pro" pitchFamily="34" charset="0"/>
+                <a:ea typeface="Be Vietnam Pro" pitchFamily="34" charset="-122"/>
+                <a:cs typeface="Be Vietnam Pro" pitchFamily="34" charset="-120"/>
+              </a:rPr>
+              <a:t> gọn</a:t>
+            </a:r>
+            <a:r>
+              <a:rPr lang="en-US" sz="2100" b="1" dirty="0" spc="-5" kern="0">
+                <a:solidFill>
+                  <a:srgbClr val="14161C"/>
+                </a:solidFill>
+                <a:latin typeface="Be Vietnam Pro" pitchFamily="34" charset="0"/>
+                <a:ea typeface="Be Vietnam Pro" pitchFamily="34" charset="-122"/>
+                <a:cs typeface="Be Vietnam Pro" pitchFamily="34" charset="-120"/>
+              </a:rPr>
+              <a:t> bộ</a:t>
+            </a:r>
+            <a:r>
+              <a:rPr lang="en-US" sz="2100" b="1" dirty="0" spc="-4" kern="0">
+                <a:solidFill>
+                  <a:srgbClr val="14161C"/>
+                </a:solidFill>
+                <a:latin typeface="Be Vietnam Pro" pitchFamily="34" charset="0"/>
+                <a:ea typeface="Be Vietnam Pro" pitchFamily="34" charset="-122"/>
+                <a:cs typeface="Be Vietnam Pro" pitchFamily="34" charset="-120"/>
+              </a:rPr>
+              <a:t> nhớ</a:t>
             </a:r>
             <a:endParaRPr lang="en-US" sz="2100" dirty="0"/>
           </a:p>
@@ -10860,6 +10714,28 @@
               <a:buNone/>
             </a:pPr>
             <a:r>
+              <a:rPr lang="en-US" sz="1800" b="1" spc="218" kern="0" dirty="0">
+                <a:solidFill>
+                  <a:srgbClr val="FF6A4D"/>
+                </a:solidFill>
+                <a:latin typeface="Be Vietnam Pro" pitchFamily="34" charset="0"/>
+                <a:ea typeface="Be Vietnam Pro" pitchFamily="34" charset="-122"/>
+                <a:cs typeface="Be Vietnam Pro" pitchFamily="34" charset="-120"/>
+              </a:rPr>
+              <a:t>BÀI</a:t>
+            </a:r>
+            <a:r>
+              <a:rPr lang="en-US" sz="1800" b="1" spc="226" kern="0" dirty="0">
+                <a:solidFill>
+                  <a:srgbClr val="FF6A4D"/>
+                </a:solidFill>
+                <a:latin typeface="Be Vietnam Pro" pitchFamily="34" charset="0"/>
+                <a:ea typeface="Be Vietnam Pro" pitchFamily="34" charset="-122"/>
+                <a:cs typeface="Be Vietnam Pro" pitchFamily="34" charset="-120"/>
+              </a:rPr>
+              <a:t> KHÔNG</a:t>
+            </a:r>
+            <a:r>
               <a:rPr lang="en-US" sz="1800" b="1" spc="225" kern="0" dirty="0">
                 <a:solidFill>
                   <a:srgbClr val="FF6A4D"/>
@@ -10868,18 +10744,7 @@
                 <a:ea typeface="Be Vietnam Pro" pitchFamily="34" charset="-122"/>
                 <a:cs typeface="Be Vietnam Pro" pitchFamily="34" charset="-120"/>
               </a:rPr>
-              <a:t>NGUỒN ĐỂ</a:t>
-            </a:r>
-            <a:r>
-              <a:rPr lang="en-US" sz="1800" b="1" spc="214" kern="0" dirty="0">
-                <a:solidFill>
-                  <a:srgbClr val="FF6A4D"/>
-                </a:solidFill>
-                <a:latin typeface="Be Vietnam Pro" pitchFamily="34" charset="0"/>
-                <a:ea typeface="Be Vietnam Pro" pitchFamily="34" charset="-122"/>
-                <a:cs typeface="Be Vietnam Pro" pitchFamily="34" charset="-120"/>
-              </a:rPr>
-              <a:t> TRỐNG</a:t>
+              <a:t> NÓI THÊM</a:t>
             </a:r>
             <a:endParaRPr lang="en-US" sz="1800" dirty="0"/>
           </a:p>
@@ -11254,7 +11119,7 @@
               <a:buNone/>
             </a:pPr>
             <a:r>
-              <a:rPr lang="en-US" sz="2550" dirty="0" spc="-2" kern="0">
+              <a:rPr lang="en-US" sz="2550" dirty="0" spc="2" kern="0">
                 <a:solidFill>
                   <a:srgbClr val="F3EEE3"/>
                 </a:solidFill>
@@ -11262,7 +11127,18 @@
                 <a:ea typeface="Be Vietnam Pro" pitchFamily="34" charset="-122"/>
                 <a:cs typeface="Be Vietnam Pro" pitchFamily="34" charset="-120"/>
               </a:rPr>
-              <a:t>Mục</a:t>
+              <a:t>Bài</a:t>
+            </a:r>
+            <a:r>
+              <a:rPr lang="en-US" sz="2550" dirty="0" spc="0" kern="0">
+                <a:solidFill>
+                  <a:srgbClr val="F3EEE3"/>
+                </a:solidFill>
+                <a:latin typeface="Be Vietnam Pro" pitchFamily="34" charset="0"/>
+                <a:ea typeface="Be Vietnam Pro" pitchFamily="34" charset="-122"/>
+                <a:cs typeface="Be Vietnam Pro" pitchFamily="34" charset="-120"/>
+              </a:rPr>
+              <a:t> không nói</a:t>
             </a:r>
             <a:r>
               <a:rPr lang="en-US" sz="2550" dirty="0" spc="1" kern="0">
@@ -11273,10 +11149,10 @@
                 <a:ea typeface="Be Vietnam Pro" pitchFamily="34" charset="-122"/>
                 <a:cs typeface="Be Vietnam Pro" pitchFamily="34" charset="-120"/>
               </a:rPr>
-              <a:t> nguồn</a:t>
-            </a:r>
-            <a:r>
-              <a:rPr lang="en-US" sz="2550" dirty="0" spc="18" kern="0">
+              <a:t> thêm</a:t>
+            </a:r>
+            <a:r>
+              <a:rPr lang="en-US" sz="2550" dirty="0" spc="-18" kern="0">
                 <a:solidFill>
                   <a:srgbClr val="F3EEE3"/>
                 </a:solidFill>
@@ -11284,10 +11160,10 @@
                 <a:ea typeface="Be Vietnam Pro" pitchFamily="34" charset="-122"/>
                 <a:cs typeface="Be Vietnam Pro" pitchFamily="34" charset="-120"/>
               </a:rPr>
-              <a:t> để</a:t>
-            </a:r>
-            <a:r>
-              <a:rPr lang="en-US" sz="2550" dirty="0" spc="-14" kern="0">
+              <a:t> về</a:t>
+            </a:r>
+            <a:r>
+              <a:rPr lang="en-US" sz="2550" dirty="0" spc="24" kern="0">
                 <a:solidFill>
                   <a:srgbClr val="F3EEE3"/>
                 </a:solidFill>
@@ -11295,19 +11171,10 @@
                 <a:ea typeface="Be Vietnam Pro" pitchFamily="34" charset="-122"/>
                 <a:cs typeface="Be Vietnam Pro" pitchFamily="34" charset="-120"/>
               </a:rPr>
-              <a:t> trống:</a:t>
-            </a:r>
-            <a:endParaRPr lang="en-US" sz="2550" dirty="0"/>
-          </a:p>
-          <a:p>
-            <a:pPr algn="l" indent="0" marL="0">
-              <a:lnSpc>
-                <a:spcPts val="3570"/>
-              </a:lnSpc>
-              <a:buNone/>
-            </a:pPr>
-            <a:r>
-              <a:rPr lang="en-US" sz="2550" dirty="0" spc="-4" kern="0">
+              <a:t> ứng</a:t>
+            </a:r>
+            <a:r>
+              <a:rPr lang="en-US" sz="2550" dirty="0" spc="-1" kern="0">
                 <a:solidFill>
                   <a:srgbClr val="F3EEE3"/>
                 </a:solidFill>
@@ -11315,10 +11182,10 @@
                 <a:ea typeface="Be Vietnam Pro" pitchFamily="34" charset="-122"/>
                 <a:cs typeface="Be Vietnam Pro" pitchFamily="34" charset="-120"/>
               </a:rPr>
-              <a:t>bài</a:t>
-            </a:r>
-            <a:r>
-              <a:rPr lang="en-US" sz="2550" dirty="0" spc="-10" kern="0">
+              <a:t> dụng</a:t>
+            </a:r>
+            <a:r>
+              <a:rPr lang="en-US" sz="2550" dirty="0" spc="-12" kern="0">
                 <a:solidFill>
                   <a:srgbClr val="F3EEE3"/>
                 </a:solidFill>
@@ -11326,7 +11193,7 @@
                 <a:ea typeface="Be Vietnam Pro" pitchFamily="34" charset="-122"/>
                 <a:cs typeface="Be Vietnam Pro" pitchFamily="34" charset="-120"/>
               </a:rPr>
-              <a:t> này</a:t>
+              <a:t> tài</a:t>
             </a:r>
             <a:r>
               <a:rPr lang="en-US" sz="2550" dirty="0" spc="1" kern="0">
@@ -11337,29 +11204,7 @@
                 <a:ea typeface="Be Vietnam Pro" pitchFamily="34" charset="-122"/>
                 <a:cs typeface="Be Vietnam Pro" pitchFamily="34" charset="-120"/>
               </a:rPr>
-              <a:t> không</a:t>
-            </a:r>
-            <a:r>
-              <a:rPr lang="en-US" sz="2550" dirty="0" spc="-2" kern="0">
-                <a:solidFill>
-                  <a:srgbClr val="F3EEE3"/>
-                </a:solidFill>
-                <a:latin typeface="Be Vietnam Pro" pitchFamily="34" charset="0"/>
-                <a:ea typeface="Be Vietnam Pro" pitchFamily="34" charset="-122"/>
-                <a:cs typeface="Be Vietnam Pro" pitchFamily="34" charset="-120"/>
-              </a:rPr>
-              <a:t> nói</a:t>
-            </a:r>
-            <a:r>
-              <a:rPr lang="en-US" sz="2550" dirty="0" spc="2" kern="0">
-                <a:solidFill>
-                  <a:srgbClr val="F3EEE3"/>
-                </a:solidFill>
-                <a:latin typeface="Be Vietnam Pro" pitchFamily="34" charset="0"/>
-                <a:ea typeface="Be Vietnam Pro" pitchFamily="34" charset="-122"/>
-                <a:cs typeface="Be Vietnam Pro" pitchFamily="34" charset="-120"/>
-              </a:rPr>
-              <a:t> thêm.</a:t>
+              <a:t> chính.</a:t>
             </a:r>
             <a:endParaRPr lang="en-US" sz="2550" dirty="0"/>
           </a:p>
@@ -11393,6 +11238,72 @@
               <a:buNone/>
             </a:pPr>
             <a:r>
+              <a:rPr lang="en-US" sz="2250" dirty="0" spc="-1" kern="0">
+                <a:solidFill>
+                  <a:srgbClr val="F3EEE3"/>
+                </a:solidFill>
+                <a:latin typeface="Be Vietnam Pro" pitchFamily="34" charset="0"/>
+                <a:ea typeface="Be Vietnam Pro" pitchFamily="34" charset="-122"/>
+                <a:cs typeface="Be Vietnam Pro" pitchFamily="34" charset="-120"/>
+              </a:rPr>
+              <a:t>Có nhiều</a:t>
+            </a:r>
+            <a:r>
+              <a:rPr lang="en-US" sz="2250" dirty="0" spc="-5" kern="0">
+                <a:solidFill>
+                  <a:srgbClr val="F3EEE3"/>
+                </a:solidFill>
+                <a:latin typeface="Be Vietnam Pro" pitchFamily="34" charset="0"/>
+                <a:ea typeface="Be Vietnam Pro" pitchFamily="34" charset="-122"/>
+                <a:cs typeface="Be Vietnam Pro" pitchFamily="34" charset="-120"/>
+              </a:rPr>
+              <a:t> loại</a:t>
+            </a:r>
+            <a:r>
+              <a:rPr lang="en-US" sz="2250" dirty="0" spc="1" kern="0">
+                <a:solidFill>
+                  <a:srgbClr val="F3EEE3"/>
+                </a:solidFill>
+                <a:latin typeface="Be Vietnam Pro" pitchFamily="34" charset="0"/>
+                <a:ea typeface="Be Vietnam Pro" pitchFamily="34" charset="-122"/>
+                <a:cs typeface="Be Vietnam Pro" pitchFamily="34" charset="-120"/>
+              </a:rPr>
+              <a:t> phần</a:t>
+            </a:r>
+            <a:r>
+              <a:rPr lang="en-US" sz="2250" dirty="0" spc="-2" kern="0">
+                <a:solidFill>
+                  <a:srgbClr val="F3EEE3"/>
+                </a:solidFill>
+                <a:latin typeface="Be Vietnam Pro" pitchFamily="34" charset="0"/>
+                <a:ea typeface="Be Vietnam Pro" pitchFamily="34" charset="-122"/>
+                <a:cs typeface="Be Vietnam Pro" pitchFamily="34" charset="-120"/>
+              </a:rPr>
+              <a:t> mềm</a:t>
+            </a:r>
+            <a:r>
+              <a:rPr lang="en-US" sz="2250" dirty="0" spc="1" kern="0">
+                <a:solidFill>
+                  <a:srgbClr val="F3EEE3"/>
+                </a:solidFill>
+                <a:latin typeface="Be Vietnam Pro" pitchFamily="34" charset="0"/>
+                <a:ea typeface="Be Vietnam Pro" pitchFamily="34" charset="-122"/>
+                <a:cs typeface="Be Vietnam Pro" pitchFamily="34" charset="-120"/>
+              </a:rPr>
+              <a:t> khác</a:t>
+            </a:r>
+            <a:r>
+              <a:rPr lang="en-US" sz="2250" dirty="0" spc="-1" kern="0">
+                <a:solidFill>
+                  <a:srgbClr val="F3EEE3"/>
+                </a:solidFill>
+                <a:latin typeface="Be Vietnam Pro" pitchFamily="34" charset="0"/>
+                <a:ea typeface="Be Vietnam Pro" pitchFamily="34" charset="-122"/>
+                <a:cs typeface="Be Vietnam Pro" pitchFamily="34" charset="-120"/>
+              </a:rPr>
+              <a:t> nhau,</a:t>
+            </a:r>
+            <a:r>
               <a:rPr lang="en-US" sz="2250" dirty="0" spc="0" kern="0">
                 <a:solidFill>
                   <a:srgbClr val="F3EEE3"/>
@@ -11401,10 +11312,10 @@
                 <a:ea typeface="Be Vietnam Pro" pitchFamily="34" charset="-122"/>
                 <a:cs typeface="Be Vietnam Pro" pitchFamily="34" charset="-120"/>
               </a:rPr>
-              <a:t>Nguồn nêu</a:t>
-            </a:r>
-            <a:r>
-              <a:rPr lang="en-US" sz="2250" dirty="0" spc="-11" kern="0">
+              <a:t> nên</a:t>
+            </a:r>
+            <a:r>
+              <a:rPr lang="en-US" sz="2250" dirty="0" spc="-3" kern="0">
                 <a:solidFill>
                   <a:srgbClr val="F3EEE3"/>
                 </a:solidFill>
@@ -11412,10 +11323,10 @@
                 <a:ea typeface="Be Vietnam Pro" pitchFamily="34" charset="-122"/>
                 <a:cs typeface="Be Vietnam Pro" pitchFamily="34" charset="-120"/>
               </a:rPr>
-              <a:t> tên</a:t>
-            </a:r>
-            <a:r>
-              <a:rPr lang="en-US" sz="2250" dirty="0" spc="3" kern="0">
+              <a:t> bài</a:t>
+            </a:r>
+            <a:r>
+              <a:rPr lang="en-US" sz="2250" dirty="0" spc="1" kern="0">
                 <a:solidFill>
                   <a:srgbClr val="F3EEE3"/>
                 </a:solidFill>
@@ -11423,10 +11334,10 @@
                 <a:ea typeface="Be Vietnam Pro" pitchFamily="34" charset="-122"/>
                 <a:cs typeface="Be Vietnam Pro" pitchFamily="34" charset="-120"/>
               </a:rPr>
-              <a:t> mục</a:t>
-            </a:r>
-            <a:r>
-              <a:rPr lang="en-US" sz="2250" dirty="0" spc="-8" kern="0">
+              <a:t> không</a:t>
+            </a:r>
+            <a:r>
+              <a:rPr lang="en-US" sz="2250" dirty="0" spc="2" kern="0">
                 <a:solidFill>
                   <a:srgbClr val="F3EEE3"/>
                 </a:solidFill>
@@ -11434,10 +11345,10 @@
                 <a:ea typeface="Be Vietnam Pro" pitchFamily="34" charset="-122"/>
                 <a:cs typeface="Be Vietnam Pro" pitchFamily="34" charset="-120"/>
               </a:rPr>
-              <a:t> này,</a:t>
-            </a:r>
-            <a:r>
-              <a:rPr lang="en-US" sz="2250" dirty="0" spc="1" kern="0">
+              <a:t> mô</a:t>
+            </a:r>
+            <a:r>
+              <a:rPr lang="en-US" sz="2250" dirty="0" spc="-10" kern="0">
                 <a:solidFill>
                   <a:srgbClr val="F3EEE3"/>
                 </a:solidFill>
@@ -11445,40 +11356,7 @@
                 <a:ea typeface="Be Vietnam Pro" pitchFamily="34" charset="-122"/>
                 <a:cs typeface="Be Vietnam Pro" pitchFamily="34" charset="-120"/>
               </a:rPr>
-              <a:t> không</a:t>
-            </a:r>
-            <a:r>
-              <a:rPr lang="en-US" sz="2250" dirty="0" spc="2" kern="0">
-                <a:solidFill>
-                  <a:srgbClr val="F3EEE3"/>
-                </a:solidFill>
-                <a:latin typeface="Be Vietnam Pro" pitchFamily="34" charset="0"/>
-                <a:ea typeface="Be Vietnam Pro" pitchFamily="34" charset="-122"/>
-                <a:cs typeface="Be Vietnam Pro" pitchFamily="34" charset="-120"/>
-              </a:rPr>
-              <a:t> mô</a:t>
-            </a:r>
-            <a:r>
-              <a:rPr lang="en-US" sz="2250" dirty="0" spc="-15" kern="0">
-                <a:solidFill>
-                  <a:srgbClr val="F3EEE3"/>
-                </a:solidFill>
-                <a:latin typeface="Be Vietnam Pro" pitchFamily="34" charset="0"/>
-                <a:ea typeface="Be Vietnam Pro" pitchFamily="34" charset="-122"/>
-                <a:cs typeface="Be Vietnam Pro" pitchFamily="34" charset="-120"/>
-              </a:rPr>
-              <a:t> tả</a:t>
-            </a:r>
-            <a:r>
-              <a:rPr lang="en-US" sz="2250" dirty="0" spc="1" kern="0">
-                <a:solidFill>
-                  <a:srgbClr val="F3EEE3"/>
-                </a:solidFill>
-                <a:latin typeface="Be Vietnam Pro" pitchFamily="34" charset="0"/>
-                <a:ea typeface="Be Vietnam Pro" pitchFamily="34" charset="-122"/>
-                <a:cs typeface="Be Vietnam Pro" pitchFamily="34" charset="-120"/>
-              </a:rPr>
-              <a:t> gì.</a:t>
+              <a:t> tả.</a:t>
             </a:r>
             <a:endParaRPr lang="en-US" sz="2250" dirty="0"/>
           </a:p>
@@ -11733,7 +11611,7 @@
               <a:buNone/>
             </a:pPr>
             <a:r>
-              <a:rPr lang="en-US" sz="2850" b="1" dirty="0" spc="-6" kern="0">
+              <a:rPr lang="en-US" sz="2850" b="1" dirty="0" spc="4" kern="0">
                 <a:solidFill>
                   <a:srgbClr val="E8472B"/>
                 </a:solidFill>
@@ -11741,10 +11619,10 @@
                 <a:ea typeface="Be Vietnam Pro" pitchFamily="34" charset="-122"/>
                 <a:cs typeface="Be Vietnam Pro" pitchFamily="34" charset="-120"/>
               </a:rPr>
-              <a:t>Nguồn</a:t>
-            </a:r>
-            <a:r>
-              <a:rPr lang="en-US" sz="2850" b="1" dirty="0" spc="1" kern="0">
+              <a:t>Bài</a:t>
+            </a:r>
+            <a:r>
+              <a:rPr lang="en-US" sz="2850" b="1" dirty="0" spc="-3" kern="0">
                 <a:solidFill>
                   <a:srgbClr val="E8472B"/>
                 </a:solidFill>
@@ -11752,9 +11630,53 @@
                 <a:ea typeface="Be Vietnam Pro" pitchFamily="34" charset="-122"/>
                 <a:cs typeface="Be Vietnam Pro" pitchFamily="34" charset="-120"/>
               </a:rPr>
+              <a:t> nguồn</a:t>
+            </a:r>
+            <a:r>
+              <a:rPr lang="en-US" sz="2850" b="1" dirty="0" spc="2" kern="0">
+                <a:solidFill>
+                  <a:srgbClr val="E8472B"/>
+                </a:solidFill>
+                <a:latin typeface="Be Vietnam Pro" pitchFamily="34" charset="0"/>
+                <a:ea typeface="Be Vietnam Pro" pitchFamily="34" charset="-122"/>
+                <a:cs typeface="Be Vietnam Pro" pitchFamily="34" charset="-120"/>
+              </a:rPr>
               <a:t> chỉ</a:t>
             </a:r>
             <a:r>
+              <a:rPr lang="en-US" sz="2850" b="1" dirty="0" spc="-2" kern="0">
+                <a:solidFill>
+                  <a:srgbClr val="E8472B"/>
+                </a:solidFill>
+                <a:latin typeface="Be Vietnam Pro" pitchFamily="34" charset="0"/>
+                <a:ea typeface="Be Vietnam Pro" pitchFamily="34" charset="-122"/>
+                <a:cs typeface="Be Vietnam Pro" pitchFamily="34" charset="-120"/>
+              </a:rPr>
+              <a:t> nêu</a:t>
+            </a:r>
+            <a:r>
+              <a:rPr lang="en-US" sz="2850" b="1" dirty="0" spc="-9" kern="0">
+                <a:solidFill>
+                  <a:srgbClr val="E8472B"/>
+                </a:solidFill>
+                <a:latin typeface="Be Vietnam Pro" pitchFamily="34" charset="0"/>
+                <a:ea typeface="Be Vietnam Pro" pitchFamily="34" charset="-122"/>
+                <a:cs typeface="Be Vietnam Pro" pitchFamily="34" charset="-120"/>
+              </a:rPr>
+              <a:t> tên</a:t>
+            </a:r>
+            <a:r>
+              <a:rPr lang="en-US" sz="2850" b="1" dirty="0" spc="-1" kern="0">
+                <a:solidFill>
+                  <a:srgbClr val="E8472B"/>
+                </a:solidFill>
+                <a:latin typeface="Be Vietnam Pro" pitchFamily="34" charset="0"/>
+                <a:ea typeface="Be Vietnam Pro" pitchFamily="34" charset="-122"/>
+                <a:cs typeface="Be Vietnam Pro" pitchFamily="34" charset="-120"/>
+              </a:rPr>
+              <a:t> tám</a:t>
+            </a:r>
+            <a:r>
               <a:rPr lang="en-US" sz="2850" b="1" dirty="0" spc="0" kern="0">
                 <a:solidFill>
                   <a:srgbClr val="E8472B"/>
@@ -11763,10 +11685,10 @@
                 <a:ea typeface="Be Vietnam Pro" pitchFamily="34" charset="-122"/>
                 <a:cs typeface="Be Vietnam Pro" pitchFamily="34" charset="-120"/>
               </a:rPr>
-              <a:t> nói</a:t>
-            </a:r>
-            <a:r>
-              <a:rPr lang="en-US" sz="2850" b="1" dirty="0" spc="-1" kern="0">
+              <a:t> lĩnh</a:t>
+            </a:r>
+            <a:r>
+              <a:rPr lang="en-US" sz="2850" b="1" dirty="0" spc="19" kern="0">
                 <a:solidFill>
                   <a:srgbClr val="E8472B"/>
                 </a:solidFill>
@@ -11774,40 +11696,7 @@
                 <a:ea typeface="Be Vietnam Pro" pitchFamily="34" charset="-122"/>
                 <a:cs typeface="Be Vietnam Pro" pitchFamily="34" charset="-120"/>
               </a:rPr>
-              <a:t> C++</a:t>
-            </a:r>
-            <a:r>
-              <a:rPr lang="en-US" sz="2850" b="1" dirty="0" spc="14" kern="0">
-                <a:solidFill>
-                  <a:srgbClr val="E8472B"/>
-                </a:solidFill>
-                <a:latin typeface="Be Vietnam Pro" pitchFamily="34" charset="0"/>
-                <a:ea typeface="Be Vietnam Pro" pitchFamily="34" charset="-122"/>
-                <a:cs typeface="Be Vietnam Pro" pitchFamily="34" charset="-120"/>
-              </a:rPr>
-              <a:t> được</a:t>
-            </a:r>
-            <a:r>
-              <a:rPr lang="en-US" sz="2850" b="1" dirty="0" spc="0" kern="0">
-                <a:solidFill>
-                  <a:srgbClr val="E8472B"/>
-                </a:solidFill>
-                <a:latin typeface="Be Vietnam Pro" pitchFamily="34" charset="0"/>
-                <a:ea typeface="Be Vietnam Pro" pitchFamily="34" charset="-122"/>
-                <a:cs typeface="Be Vietnam Pro" pitchFamily="34" charset="-120"/>
-              </a:rPr>
-              <a:t> dùng,</a:t>
-            </a:r>
-            <a:r>
-              <a:rPr lang="en-US" sz="2850" b="1" dirty="0" spc="-2" kern="0">
-                <a:solidFill>
-                  <a:srgbClr val="E8472B"/>
-                </a:solidFill>
-                <a:latin typeface="Be Vietnam Pro" pitchFamily="34" charset="0"/>
-                <a:ea typeface="Be Vietnam Pro" pitchFamily="34" charset="-122"/>
-                <a:cs typeface="Be Vietnam Pro" pitchFamily="34" charset="-120"/>
-              </a:rPr>
-              <a:t> hoặc hợp</a:t>
+              <a:t> vực</a:t>
             </a:r>
             <a:endParaRPr lang="en-US" sz="2850" dirty="0"/>
           </a:p>
@@ -12161,7 +12050,18 @@
                 <a:ea typeface="Be Vietnam Pro" pitchFamily="34" charset="-122"/>
                 <a:cs typeface="Be Vietnam Pro" pitchFamily="34" charset="-120"/>
               </a:rPr>
-              <a:t>Cách</a:t>
+              <a:t>Phần</a:t>
+            </a:r>
+            <a:r>
+              <a:rPr lang="en-US" sz="2550" dirty="0" spc="0" kern="0">
+                <a:solidFill>
+                  <a:srgbClr val="14161C"/>
+                </a:solidFill>
+                <a:latin typeface="Be Vietnam Pro" pitchFamily="34" charset="0"/>
+                <a:ea typeface="Be Vietnam Pro" pitchFamily="34" charset="-122"/>
+                <a:cs typeface="Be Vietnam Pro" pitchFamily="34" charset="-120"/>
+              </a:rPr>
+              <a:t> lớn</a:t>
             </a:r>
             <a:r>
               <a:rPr lang="en-US" sz="2550" dirty="0" spc="-1" kern="0">
@@ -12172,7 +12072,7 @@
                 <a:ea typeface="Be Vietnam Pro" pitchFamily="34" charset="-122"/>
                 <a:cs typeface="Be Vietnam Pro" pitchFamily="34" charset="-120"/>
               </a:rPr>
-              <a:t> chia</a:t>
+              <a:t> lời</a:t>
             </a:r>
             <a:r>
               <a:rPr lang="en-US" sz="2550" dirty="0" spc="0" kern="0">
@@ -12183,7 +12083,7 @@
                 <a:ea typeface="Be Vietnam Pro" pitchFamily="34" charset="-122"/>
                 <a:cs typeface="Be Vietnam Pro" pitchFamily="34" charset="-120"/>
               </a:rPr>
-              <a:t> nhóm</a:t>
+              <a:t> giải</a:t>
             </a:r>
             <a:r>
               <a:rPr lang="en-US" sz="2550" dirty="0" spc="1" kern="0">
@@ -12194,7 +12094,7 @@
                 <a:ea typeface="Be Vietnam Pro" pitchFamily="34" charset="-122"/>
                 <a:cs typeface="Be Vietnam Pro" pitchFamily="34" charset="-120"/>
               </a:rPr>
-              <a:t> là</a:t>
+              <a:t> thích là</a:t>
             </a:r>
             <a:r>
               <a:rPr lang="en-US" sz="2550" dirty="0" spc="-2" kern="0">
@@ -12207,25 +12107,16 @@
               </a:rPr>
               <a:t> của</a:t>
             </a:r>
-            <a:endParaRPr lang="en-US" sz="2550" dirty="0"/>
-          </a:p>
-          <a:p>
-            <a:pPr algn="l" indent="0" marL="0">
-              <a:lnSpc>
-                <a:spcPts val="3570"/>
-              </a:lnSpc>
-              <a:buNone/>
-            </a:pPr>
-            <a:r>
-              <a:rPr lang="en-US" sz="2550" dirty="0" spc="6" kern="0">
-                <a:solidFill>
-                  <a:srgbClr val="14161C"/>
-                </a:solidFill>
-                <a:latin typeface="Be Vietnam Pro" pitchFamily="34" charset="0"/>
-                <a:ea typeface="Be Vietnam Pro" pitchFamily="34" charset="-122"/>
-                <a:cs typeface="Be Vietnam Pro" pitchFamily="34" charset="-120"/>
-              </a:rPr>
-              <a:t>người</a:t>
+            <a:r>
+              <a:rPr lang="en-US" sz="2550" dirty="0" spc="5" kern="0">
+                <a:solidFill>
+                  <a:srgbClr val="14161C"/>
+                </a:solidFill>
+                <a:latin typeface="Be Vietnam Pro" pitchFamily="34" charset="0"/>
+                <a:ea typeface="Be Vietnam Pro" pitchFamily="34" charset="-122"/>
+                <a:cs typeface="Be Vietnam Pro" pitchFamily="34" charset="-120"/>
+              </a:rPr>
+              <a:t> người</a:t>
             </a:r>
             <a:r>
               <a:rPr lang="en-US" sz="2550" dirty="0" spc="0" kern="0">
@@ -12316,7 +12207,7 @@
               <a:t>BÀI</a:t>
             </a:r>
             <a:r>
-              <a:rPr lang="en-US" sz="1800" b="1" spc="225" kern="0" dirty="0">
+              <a:rPr lang="en-US" sz="1800" b="1" spc="181" kern="0" dirty="0">
                 <a:solidFill>
                   <a:srgbClr val="6B6A66"/>
                 </a:solidFill>
@@ -12324,7 +12215,7 @@
                 <a:ea typeface="Be Vietnam Pro" pitchFamily="34" charset="-122"/>
                 <a:cs typeface="Be Vietnam Pro" pitchFamily="34" charset="-120"/>
               </a:rPr>
-              <a:t> NGUỒN</a:t>
+              <a:t> NÀY</a:t>
             </a:r>
             <a:r>
               <a:rPr lang="en-US" sz="1800" b="1" spc="226" kern="0" dirty="0">
@@ -12835,7 +12726,7 @@
               <a:buNone/>
             </a:pPr>
             <a:r>
-              <a:rPr lang="en-US" sz="1800" b="1" spc="194" kern="0" dirty="0">
+              <a:rPr lang="en-US" sz="1800" b="1" spc="187" kern="0" dirty="0">
                 <a:solidFill>
                   <a:srgbClr val="6B6A66"/>
                 </a:solidFill>
@@ -12843,10 +12734,10 @@
                 <a:ea typeface="Be Vietnam Pro" pitchFamily="34" charset="-122"/>
                 <a:cs typeface="Be Vietnam Pro" pitchFamily="34" charset="-120"/>
               </a:rPr>
-              <a:t>CÁCH</a:t>
-            </a:r>
-            <a:r>
-              <a:rPr lang="en-US" sz="1800" b="1" spc="226" kern="0" dirty="0">
+              <a:t>ĐÃ</a:t>
+            </a:r>
+            <a:r>
+              <a:rPr lang="en-US" sz="1800" b="1" spc="225" kern="0" dirty="0">
                 <a:solidFill>
                   <a:srgbClr val="6B6A66"/>
                 </a:solidFill>
@@ -12854,7 +12745,18 @@
                 <a:ea typeface="Be Vietnam Pro" pitchFamily="34" charset="-122"/>
                 <a:cs typeface="Be Vietnam Pro" pitchFamily="34" charset="-120"/>
               </a:rPr>
-              <a:t> CHIA NHÓM</a:t>
+              <a:t> ĐỐI</a:t>
+            </a:r>
+            <a:r>
+              <a:rPr lang="en-US" sz="1800" b="1" spc="227" kern="0" dirty="0">
+                <a:solidFill>
+                  <a:srgbClr val="6B6A66"/>
+                </a:solidFill>
+                <a:latin typeface="Be Vietnam Pro" pitchFamily="34" charset="0"/>
+                <a:ea typeface="Be Vietnam Pro" pitchFamily="34" charset="-122"/>
+                <a:cs typeface="Be Vietnam Pro" pitchFamily="34" charset="-120"/>
+              </a:rPr>
+              <a:t> CHIẾU</a:t>
             </a:r>
             <a:endParaRPr lang="en-US" sz="1800" dirty="0"/>
           </a:p>
@@ -12899,6 +12801,72 @@
               <a:t>Chỉ</a:t>
             </a:r>
             <a:r>
+              <a:rPr lang="en-US" sz="2400" dirty="0" spc="-2" kern="0">
+                <a:solidFill>
+                  <a:srgbClr val="14161C"/>
+                </a:solidFill>
+                <a:latin typeface="Be Vietnam Pro" pitchFamily="34" charset="0"/>
+                <a:ea typeface="Be Vietnam Pro" pitchFamily="34" charset="-122"/>
+                <a:cs typeface="Be Vietnam Pro" pitchFamily="34" charset="-120"/>
+              </a:rPr>
+              <a:t> ba</a:t>
+            </a:r>
+            <a:r>
+              <a:rPr lang="en-US" sz="2400" dirty="0" spc="18" kern="0">
+                <a:solidFill>
+                  <a:srgbClr val="14161C"/>
+                </a:solidFill>
+                <a:latin typeface="Be Vietnam Pro" pitchFamily="34" charset="0"/>
+                <a:ea typeface="Be Vietnam Pro" pitchFamily="34" charset="-122"/>
+                <a:cs typeface="Be Vietnam Pro" pitchFamily="34" charset="-120"/>
+              </a:rPr>
+              <a:t> điều</a:t>
+            </a:r>
+            <a:r>
+              <a:rPr lang="en-US" sz="2400" dirty="0" spc="-13" kern="0">
+                <a:solidFill>
+                  <a:srgbClr val="14161C"/>
+                </a:solidFill>
+                <a:latin typeface="Be Vietnam Pro" pitchFamily="34" charset="0"/>
+                <a:ea typeface="Be Vietnam Pro" pitchFamily="34" charset="-122"/>
+                <a:cs typeface="Be Vietnam Pro" pitchFamily="34" charset="-120"/>
+              </a:rPr>
+              <a:t> trong</a:t>
+            </a:r>
+            <a:r>
+              <a:rPr lang="en-US" sz="2400" dirty="0" spc="-2" kern="0">
+                <a:solidFill>
+                  <a:srgbClr val="14161C"/>
+                </a:solidFill>
+                <a:latin typeface="Be Vietnam Pro" pitchFamily="34" charset="0"/>
+                <a:ea typeface="Be Vietnam Pro" pitchFamily="34" charset="-122"/>
+                <a:cs typeface="Be Vietnam Pro" pitchFamily="34" charset="-120"/>
+              </a:rPr>
+              <a:t> C++</a:t>
+            </a:r>
+            <a:r>
+              <a:rPr lang="en-US" sz="2400" dirty="0" spc="-18" kern="0">
+                <a:solidFill>
+                  <a:srgbClr val="14161C"/>
+                </a:solidFill>
+                <a:latin typeface="Be Vietnam Pro" pitchFamily="34" charset="0"/>
+                <a:ea typeface="Be Vietnam Pro" pitchFamily="34" charset="-122"/>
+                <a:cs typeface="Be Vietnam Pro" pitchFamily="34" charset="-120"/>
+              </a:rPr>
+              <a:t> Core</a:t>
+            </a:r>
+            <a:r>
+              <a:rPr lang="en-US" sz="2400" dirty="0" spc="-1" kern="0">
+                <a:solidFill>
+                  <a:srgbClr val="14161C"/>
+                </a:solidFill>
+                <a:latin typeface="Be Vietnam Pro" pitchFamily="34" charset="0"/>
+                <a:ea typeface="Be Vietnam Pro" pitchFamily="34" charset="-122"/>
+                <a:cs typeface="Be Vietnam Pro" pitchFamily="34" charset="-120"/>
+              </a:rPr>
+              <a:t> Guidelines:</a:t>
+            </a:r>
+            <a:r>
               <a:rPr lang="en-US" sz="2400" dirty="0" spc="2" kern="0">
                 <a:solidFill>
                   <a:srgbClr val="14161C"/>
@@ -12907,18 +12875,73 @@
                 <a:ea typeface="Be Vietnam Pro" pitchFamily="34" charset="-122"/>
                 <a:cs typeface="Be Vietnam Pro" pitchFamily="34" charset="-120"/>
               </a:rPr>
-              <a:t> là</a:t>
-            </a:r>
-            <a:r>
-              <a:rPr lang="en-US" sz="2400" dirty="0" spc="-3" kern="0">
-                <a:solidFill>
-                  <a:srgbClr val="14161C"/>
-                </a:solidFill>
-                <a:latin typeface="Be Vietnam Pro" pitchFamily="34" charset="0"/>
-                <a:ea typeface="Be Vietnam Pro" pitchFamily="34" charset="-122"/>
-                <a:cs typeface="Be Vietnam Pro" pitchFamily="34" charset="-120"/>
-              </a:rPr>
-              <a:t> một</a:t>
+              <a:t> cấp</a:t>
+            </a:r>
+            <a:r>
+              <a:rPr lang="en-US" sz="2400" dirty="0" spc="-7" kern="0">
+                <a:solidFill>
+                  <a:srgbClr val="14161C"/>
+                </a:solidFill>
+                <a:latin typeface="Be Vietnam Pro" pitchFamily="34" charset="0"/>
+                <a:ea typeface="Be Vietnam Pro" pitchFamily="34" charset="-122"/>
+                <a:cs typeface="Be Vietnam Pro" pitchFamily="34" charset="-120"/>
+              </a:rPr>
+              <a:t> phát</a:t>
+            </a:r>
+            <a:r>
+              <a:rPr lang="en-US" sz="2400" dirty="0" spc="10" kern="0">
+                <a:solidFill>
+                  <a:srgbClr val="14161C"/>
+                </a:solidFill>
+                <a:latin typeface="Be Vietnam Pro" pitchFamily="34" charset="0"/>
+                <a:ea typeface="Be Vietnam Pro" pitchFamily="34" charset="-122"/>
+                <a:cs typeface="Be Vietnam Pro" pitchFamily="34" charset="-120"/>
+              </a:rPr>
+              <a:t> động,</a:t>
+            </a:r>
+            <a:r>
+              <a:rPr lang="en-US" sz="2400" dirty="0" spc="-11" kern="0">
+                <a:solidFill>
+                  <a:srgbClr val="14161C"/>
+                </a:solidFill>
+                <a:latin typeface="Be Vietnam Pro" pitchFamily="34" charset="0"/>
+                <a:ea typeface="Be Vietnam Pro" pitchFamily="34" charset="-122"/>
+                <a:cs typeface="Be Vietnam Pro" pitchFamily="34" charset="-120"/>
+              </a:rPr>
+              <a:t> volatile</a:t>
+            </a:r>
+            <a:r>
+              <a:rPr lang="en-US" sz="2400" dirty="0" spc="-14" kern="0">
+                <a:solidFill>
+                  <a:srgbClr val="14161C"/>
+                </a:solidFill>
+                <a:latin typeface="Be Vietnam Pro" pitchFamily="34" charset="0"/>
+                <a:ea typeface="Be Vietnam Pro" pitchFamily="34" charset="-122"/>
+                <a:cs typeface="Be Vietnam Pro" pitchFamily="34" charset="-120"/>
+              </a:rPr>
+              <a:t> và</a:t>
+            </a:r>
+            <a:r>
+              <a:rPr lang="en-US" sz="2400" dirty="0" spc="-12" kern="0">
+                <a:solidFill>
+                  <a:srgbClr val="14161C"/>
+                </a:solidFill>
+                <a:latin typeface="Be Vietnam Pro" pitchFamily="34" charset="0"/>
+                <a:ea typeface="Be Vietnam Pro" pitchFamily="34" charset="-122"/>
+                <a:cs typeface="Be Vietnam Pro" pitchFamily="34" charset="-120"/>
+              </a:rPr>
+              <a:t> nguyên</a:t>
+            </a:r>
+            <a:r>
+              <a:rPr lang="en-US" sz="2400" dirty="0" spc="-10" kern="0">
+                <a:solidFill>
+                  <a:srgbClr val="14161C"/>
+                </a:solidFill>
+                <a:latin typeface="Be Vietnam Pro" pitchFamily="34" charset="0"/>
+                <a:ea typeface="Be Vietnam Pro" pitchFamily="34" charset="-122"/>
+                <a:cs typeface="Be Vietnam Pro" pitchFamily="34" charset="-120"/>
+              </a:rPr>
+              <a:t> tắc</a:t>
             </a:r>
             <a:r>
               <a:rPr lang="en-US" sz="2400" dirty="0" spc="0" kern="0">
@@ -12929,62 +12952,18 @@
                 <a:ea typeface="Be Vietnam Pro" pitchFamily="34" charset="-122"/>
                 <a:cs typeface="Be Vietnam Pro" pitchFamily="34" charset="-120"/>
               </a:rPr>
-              <a:t> cách</a:t>
-            </a:r>
-            <a:r>
-              <a:rPr lang="en-US" sz="2400" dirty="0" spc="7" kern="0">
-                <a:solidFill>
-                  <a:srgbClr val="14161C"/>
-                </a:solidFill>
-                <a:latin typeface="Be Vietnam Pro" pitchFamily="34" charset="0"/>
-                <a:ea typeface="Be Vietnam Pro" pitchFamily="34" charset="-122"/>
-                <a:cs typeface="Be Vietnam Pro" pitchFamily="34" charset="-120"/>
-              </a:rPr>
-              <a:t> đọc.</a:t>
-            </a:r>
-            <a:r>
-              <a:rPr lang="en-US" sz="2400" dirty="0" spc="-5" kern="0">
-                <a:solidFill>
-                  <a:srgbClr val="14161C"/>
-                </a:solidFill>
-                <a:latin typeface="Be Vietnam Pro" pitchFamily="34" charset="0"/>
-                <a:ea typeface="Be Vietnam Pro" pitchFamily="34" charset="-122"/>
-                <a:cs typeface="Be Vietnam Pro" pitchFamily="34" charset="-120"/>
-              </a:rPr>
-              <a:t> Một</a:t>
-            </a:r>
-            <a:r>
-              <a:rPr lang="en-US" sz="2400" dirty="0" spc="0" kern="0">
-                <a:solidFill>
-                  <a:srgbClr val="14161C"/>
-                </a:solidFill>
-                <a:latin typeface="Be Vietnam Pro" pitchFamily="34" charset="0"/>
-                <a:ea typeface="Be Vietnam Pro" pitchFamily="34" charset="-122"/>
-                <a:cs typeface="Be Vietnam Pro" pitchFamily="34" charset="-120"/>
-              </a:rPr>
-              <a:t> lĩnh</a:t>
-            </a:r>
-            <a:r>
-              <a:rPr lang="en-US" sz="2400" dirty="0" spc="9" kern="0">
-                <a:solidFill>
-                  <a:srgbClr val="14161C"/>
-                </a:solidFill>
-                <a:latin typeface="Be Vietnam Pro" pitchFamily="34" charset="0"/>
-                <a:ea typeface="Be Vietnam Pro" pitchFamily="34" charset="-122"/>
-                <a:cs typeface="Be Vietnam Pro" pitchFamily="34" charset="-120"/>
-              </a:rPr>
-              <a:t> vực</a:t>
-            </a:r>
-            <a:r>
-              <a:rPr lang="en-US" sz="2400" dirty="0" spc="0" kern="0">
-                <a:solidFill>
-                  <a:srgbClr val="14161C"/>
-                </a:solidFill>
-                <a:latin typeface="Be Vietnam Pro" pitchFamily="34" charset="0"/>
-                <a:ea typeface="Be Vietnam Pro" pitchFamily="34" charset="-122"/>
-                <a:cs typeface="Be Vietnam Pro" pitchFamily="34" charset="-120"/>
-              </a:rPr>
-              <a:t> có</a:t>
+              <a:t> không</a:t>
+            </a:r>
+            <a:r>
+              <a:rPr lang="en-US" sz="2400" dirty="0" spc="-20" kern="0">
+                <a:solidFill>
+                  <a:srgbClr val="14161C"/>
+                </a:solidFill>
+                <a:latin typeface="Be Vietnam Pro" pitchFamily="34" charset="0"/>
+                <a:ea typeface="Be Vietnam Pro" pitchFamily="34" charset="-122"/>
+                <a:cs typeface="Be Vietnam Pro" pitchFamily="34" charset="-120"/>
+              </a:rPr>
+              <a:t> trả</a:t>
             </a:r>
             <a:r>
               <a:rPr lang="en-US" sz="2400" dirty="0" spc="1" kern="0">
@@ -12995,51 +12974,7 @@
                 <a:ea typeface="Be Vietnam Pro" pitchFamily="34" charset="-122"/>
                 <a:cs typeface="Be Vietnam Pro" pitchFamily="34" charset="-120"/>
               </a:rPr>
-              <a:t> thể hợp</a:t>
-            </a:r>
-            <a:r>
-              <a:rPr lang="en-US" sz="2400" dirty="0" spc="-13" kern="0">
-                <a:solidFill>
-                  <a:srgbClr val="14161C"/>
-                </a:solidFill>
-                <a:latin typeface="Be Vietnam Pro" pitchFamily="34" charset="0"/>
-                <a:ea typeface="Be Vietnam Pro" pitchFamily="34" charset="-122"/>
-                <a:cs typeface="Be Vietnam Pro" pitchFamily="34" charset="-120"/>
-              </a:rPr>
-              <a:t> với</a:t>
-            </a:r>
-            <a:r>
-              <a:rPr lang="en-US" sz="2400" dirty="0" spc="1" kern="0">
-                <a:solidFill>
-                  <a:srgbClr val="14161C"/>
-                </a:solidFill>
-                <a:latin typeface="Be Vietnam Pro" pitchFamily="34" charset="0"/>
-                <a:ea typeface="Be Vietnam Pro" pitchFamily="34" charset="-122"/>
-                <a:cs typeface="Be Vietnam Pro" pitchFamily="34" charset="-120"/>
-              </a:rPr>
-              <a:t> cả</a:t>
-            </a:r>
-            <a:r>
-              <a:rPr lang="en-US" sz="2400" dirty="0" spc="0" kern="0">
-                <a:solidFill>
-                  <a:srgbClr val="14161C"/>
-                </a:solidFill>
-                <a:latin typeface="Be Vietnam Pro" pitchFamily="34" charset="0"/>
-                <a:ea typeface="Be Vietnam Pro" pitchFamily="34" charset="-122"/>
-                <a:cs typeface="Be Vietnam Pro" pitchFamily="34" charset="-120"/>
-              </a:rPr>
-              <a:t> hai lý</a:t>
-            </a:r>
-            <a:r>
-              <a:rPr lang="en-US" sz="2400" dirty="0" spc="2" kern="0">
-                <a:solidFill>
-                  <a:srgbClr val="14161C"/>
-                </a:solidFill>
-                <a:latin typeface="Be Vietnam Pro" pitchFamily="34" charset="0"/>
-                <a:ea typeface="Be Vietnam Pro" pitchFamily="34" charset="-122"/>
-                <a:cs typeface="Be Vietnam Pro" pitchFamily="34" charset="-120"/>
-              </a:rPr>
-              <a:t> do.</a:t>
+              <a:t> giá.</a:t>
             </a:r>
             <a:endParaRPr lang="en-US" sz="2400" dirty="0"/>
           </a:p>
@@ -13767,10 +13702,10 @@
                 <a:ea typeface="Be Vietnam Pro" pitchFamily="34" charset="-122"/>
                 <a:cs typeface="Be Vietnam Pro" pitchFamily="34" charset="-120"/>
               </a:rPr>
-              <a:t> nhỏ,</a:t>
-            </a:r>
-            <a:r>
-              <a:rPr lang="en-US" sz="2700" dirty="0" spc="0" kern="0">
+              <a:t> nhỏ, ít</a:t>
+            </a:r>
+            <a:r>
+              <a:rPr lang="en-US" sz="2700" dirty="0" spc="-7" kern="0">
                 <a:solidFill>
                   <a:srgbClr val="C4C8D6"/>
                 </a:solidFill>
@@ -13778,10 +13713,10 @@
                 <a:ea typeface="Be Vietnam Pro" pitchFamily="34" charset="-122"/>
                 <a:cs typeface="Be Vietnam Pro" pitchFamily="34" charset="-120"/>
               </a:rPr>
-              <a:t> cần</a:t>
-            </a:r>
-            <a:r>
-              <a:rPr lang="en-US" sz="2700" dirty="0" spc="20" kern="0">
+              <a:t> bộ</a:t>
+            </a:r>
+            <a:r>
+              <a:rPr lang="en-US" sz="2700" dirty="0" spc="-3" kern="0">
                 <a:solidFill>
                   <a:srgbClr val="C4C8D6"/>
                 </a:solidFill>
@@ -13789,106 +13724,7 @@
                 <a:ea typeface="Be Vietnam Pro" pitchFamily="34" charset="-122"/>
                 <a:cs typeface="Be Vietnam Pro" pitchFamily="34" charset="-120"/>
               </a:rPr>
-              <a:t> điều</a:t>
-            </a:r>
-            <a:r>
-              <a:rPr lang="en-US" sz="2700" dirty="0" spc="-2" kern="0">
-                <a:solidFill>
-                  <a:srgbClr val="C4C8D6"/>
-                </a:solidFill>
-                <a:latin typeface="Be Vietnam Pro" pitchFamily="34" charset="0"/>
-                <a:ea typeface="Be Vietnam Pro" pitchFamily="34" charset="-122"/>
-                <a:cs typeface="Be Vietnam Pro" pitchFamily="34" charset="-120"/>
-              </a:rPr>
-              <a:t> khiển phần</a:t>
-            </a:r>
-            <a:r>
-              <a:rPr lang="en-US" sz="2700" dirty="0" spc="20" kern="0">
-                <a:solidFill>
-                  <a:srgbClr val="C4C8D6"/>
-                </a:solidFill>
-                <a:latin typeface="Be Vietnam Pro" pitchFamily="34" charset="0"/>
-                <a:ea typeface="Be Vietnam Pro" pitchFamily="34" charset="-122"/>
-                <a:cs typeface="Be Vietnam Pro" pitchFamily="34" charset="-120"/>
-              </a:rPr>
-              <a:t> cứng</a:t>
-            </a:r>
-            <a:r>
-              <a:rPr lang="en-US" sz="2700" dirty="0" spc="-21" kern="0">
-                <a:solidFill>
-                  <a:srgbClr val="C4C8D6"/>
-                </a:solidFill>
-                <a:latin typeface="Be Vietnam Pro" pitchFamily="34" charset="0"/>
-                <a:ea typeface="Be Vietnam Pro" pitchFamily="34" charset="-122"/>
-                <a:cs typeface="Be Vietnam Pro" pitchFamily="34" charset="-120"/>
-              </a:rPr>
-              <a:t> sát</a:t>
-            </a:r>
-            <a:r>
-              <a:rPr lang="en-US" sz="2700" dirty="0" spc="-17" kern="0">
-                <a:solidFill>
-                  <a:srgbClr val="C4C8D6"/>
-                </a:solidFill>
-                <a:latin typeface="Be Vietnam Pro" pitchFamily="34" charset="0"/>
-                <a:ea typeface="Be Vietnam Pro" pitchFamily="34" charset="-122"/>
-                <a:cs typeface="Be Vietnam Pro" pitchFamily="34" charset="-120"/>
-              </a:rPr>
-              <a:t> và</a:t>
-            </a:r>
-            <a:r>
-              <a:rPr lang="en-US" sz="2700" dirty="0" spc="-3" kern="0">
-                <a:solidFill>
-                  <a:srgbClr val="C4C8D6"/>
-                </a:solidFill>
-                <a:latin typeface="Be Vietnam Pro" pitchFamily="34" charset="0"/>
-                <a:ea typeface="Be Vietnam Pro" pitchFamily="34" charset="-122"/>
-                <a:cs typeface="Be Vietnam Pro" pitchFamily="34" charset="-120"/>
-              </a:rPr>
-              <a:t> dùng</a:t>
-            </a:r>
-            <a:r>
-              <a:rPr lang="en-US" sz="2700" dirty="0" spc="-13" kern="0">
-                <a:solidFill>
-                  <a:srgbClr val="C4C8D6"/>
-                </a:solidFill>
-                <a:latin typeface="Be Vietnam Pro" pitchFamily="34" charset="0"/>
-                <a:ea typeface="Be Vietnam Pro" pitchFamily="34" charset="-122"/>
-                <a:cs typeface="Be Vietnam Pro" pitchFamily="34" charset="-120"/>
-              </a:rPr>
-              <a:t> tài</a:t>
-            </a:r>
-            <a:r>
-              <a:rPr lang="en-US" sz="2700" dirty="0" spc="-15" kern="0">
-                <a:solidFill>
-                  <a:srgbClr val="C4C8D6"/>
-                </a:solidFill>
-                <a:latin typeface="Be Vietnam Pro" pitchFamily="34" charset="0"/>
-                <a:ea typeface="Be Vietnam Pro" pitchFamily="34" charset="-122"/>
-                <a:cs typeface="Be Vietnam Pro" pitchFamily="34" charset="-120"/>
-              </a:rPr>
-              <a:t> nguyên</a:t>
-            </a:r>
-            <a:r>
-              <a:rPr lang="en-US" sz="2700" dirty="0" spc="-2" kern="0">
-                <a:solidFill>
-                  <a:srgbClr val="C4C8D6"/>
-                </a:solidFill>
-                <a:latin typeface="Be Vietnam Pro" pitchFamily="34" charset="0"/>
-                <a:ea typeface="Be Vietnam Pro" pitchFamily="34" charset="-122"/>
-                <a:cs typeface="Be Vietnam Pro" pitchFamily="34" charset="-120"/>
-              </a:rPr>
-              <a:t> hiệu</a:t>
-            </a:r>
-            <a:r>
-              <a:rPr lang="en-US" sz="2700" dirty="0" spc="-1" kern="0">
-                <a:solidFill>
-                  <a:srgbClr val="C4C8D6"/>
-                </a:solidFill>
-                <a:latin typeface="Be Vietnam Pro" pitchFamily="34" charset="0"/>
-                <a:ea typeface="Be Vietnam Pro" pitchFamily="34" charset="-122"/>
-                <a:cs typeface="Be Vietnam Pro" pitchFamily="34" charset="-120"/>
-              </a:rPr>
-              <a:t> quả.</a:t>
+              <a:t> nhớ.</a:t>
             </a:r>
             <a:endParaRPr lang="en-US" sz="2700" dirty="0"/>
           </a:p>
@@ -14005,6 +13841,17 @@
               <a:t>Theo</a:t>
             </a:r>
             <a:r>
+              <a:rPr lang="en-US" sz="2550" dirty="0" spc="-20" kern="0">
+                <a:solidFill>
+                  <a:srgbClr val="F3EEE3"/>
+                </a:solidFill>
+                <a:latin typeface="Be Vietnam Pro" pitchFamily="34" charset="0"/>
+                <a:ea typeface="Be Vietnam Pro" pitchFamily="34" charset="-122"/>
+                <a:cs typeface="Be Vietnam Pro" pitchFamily="34" charset="-120"/>
+              </a:rPr>
+              <a:t> Core</a:t>
+            </a:r>
+            <a:r>
               <a:rPr lang="en-US" sz="2550" dirty="0" spc="0" kern="0">
                 <a:solidFill>
                   <a:srgbClr val="F3EEE3"/>
@@ -14013,10 +13860,10 @@
                 <a:ea typeface="Be Vietnam Pro" pitchFamily="34" charset="-122"/>
                 <a:cs typeface="Be Vietnam Pro" pitchFamily="34" charset="-120"/>
               </a:rPr>
-              <a:t> nguồn, lĩnh</a:t>
-            </a:r>
-            <a:r>
-              <a:rPr lang="en-US" sz="2550" dirty="0" spc="7" kern="0">
+              <a:t> Guidelines,</a:t>
+            </a:r>
+            <a:r>
+              <a:rPr lang="en-US" sz="2550" dirty="0" spc="21" kern="0">
                 <a:solidFill>
                   <a:srgbClr val="F3EEE3"/>
                 </a:solidFill>
@@ -14024,7 +13871,29 @@
                 <a:ea typeface="Be Vietnam Pro" pitchFamily="34" charset="-122"/>
                 <a:cs typeface="Be Vietnam Pro" pitchFamily="34" charset="-120"/>
               </a:rPr>
-              <a:t> vực</a:t>
+              <a:t> điều</a:t>
+            </a:r>
+            <a:r>
+              <a:rPr lang="en-US" sz="2550" dirty="0" spc="1" kern="0">
+                <a:solidFill>
+                  <a:srgbClr val="F3EEE3"/>
+                </a:solidFill>
+                <a:latin typeface="Be Vietnam Pro" pitchFamily="34" charset="0"/>
+                <a:ea typeface="Be Vietnam Pro" pitchFamily="34" charset="-122"/>
+                <a:cs typeface="Be Vietnam Pro" pitchFamily="34" charset="-120"/>
+              </a:rPr>
+              <a:t> gì</a:t>
+            </a:r>
+            <a:r>
+              <a:rPr lang="en-US" sz="2550" dirty="0" spc="-17" kern="0">
+                <a:solidFill>
+                  <a:srgbClr val="F3EEE3"/>
+                </a:solidFill>
+                <a:latin typeface="Be Vietnam Pro" pitchFamily="34" charset="0"/>
+                <a:ea typeface="Be Vietnam Pro" pitchFamily="34" charset="-122"/>
+                <a:cs typeface="Be Vietnam Pro" pitchFamily="34" charset="-120"/>
+              </a:rPr>
+              <a:t> trong</a:t>
             </a:r>
             <a:r>
               <a:rPr lang="en-US" sz="2550" dirty="0" spc="0" kern="0">
@@ -14035,19 +13904,10 @@
                 <a:ea typeface="Be Vietnam Pro" pitchFamily="34" charset="-122"/>
                 <a:cs typeface="Be Vietnam Pro" pitchFamily="34" charset="-120"/>
               </a:rPr>
-              <a:t> nào khớp</a:t>
-            </a:r>
-            <a:endParaRPr lang="en-US" sz="2550" dirty="0"/>
-          </a:p>
-          <a:p>
-            <a:pPr algn="l" indent="0" marL="0">
-              <a:lnSpc>
-                <a:spcPts val="3570"/>
-              </a:lnSpc>
-              <a:buNone/>
-            </a:pPr>
-            <a:r>
-              <a:rPr lang="en-US" sz="2550" dirty="0" spc="-10" kern="0">
+              <a:t> thư</a:t>
+            </a:r>
+            <a:r>
+              <a:rPr lang="en-US" sz="2550" dirty="0" spc="-2" kern="0">
                 <a:solidFill>
                   <a:srgbClr val="F3EEE3"/>
                 </a:solidFill>
@@ -14055,10 +13915,10 @@
                 <a:ea typeface="Be Vietnam Pro" pitchFamily="34" charset="-122"/>
                 <a:cs typeface="Be Vietnam Pro" pitchFamily="34" charset="-120"/>
               </a:rPr>
-              <a:t>nhất,</a:t>
-            </a:r>
-            <a:r>
-              <a:rPr lang="en-US" sz="2550" dirty="0" spc="-18" kern="0">
+              <a:t> viện</a:t>
+            </a:r>
+            <a:r>
+              <a:rPr lang="en-US" sz="2550" dirty="0" spc="1" kern="0">
                 <a:solidFill>
                   <a:srgbClr val="F3EEE3"/>
                 </a:solidFill>
@@ -14066,7 +13926,18 @@
                 <a:ea typeface="Be Vietnam Pro" pitchFamily="34" charset="-122"/>
                 <a:cs typeface="Be Vietnam Pro" pitchFamily="34" charset="-120"/>
               </a:rPr>
-              <a:t> và</a:t>
+              <a:t> chuẩn</a:t>
+            </a:r>
+            <a:r>
+              <a:rPr lang="en-US" sz="2550" dirty="0" spc="0" kern="0">
+                <a:solidFill>
+                  <a:srgbClr val="F3EEE3"/>
+                </a:solidFill>
+                <a:latin typeface="Be Vietnam Pro" pitchFamily="34" charset="0"/>
+                <a:ea typeface="Be Vietnam Pro" pitchFamily="34" charset="-122"/>
+                <a:cs typeface="Be Vietnam Pro" pitchFamily="34" charset="-120"/>
+              </a:rPr>
+              <a:t> phải</a:t>
             </a:r>
             <a:r>
               <a:rPr lang="en-US" sz="2550" dirty="0" spc="1" kern="0">
@@ -14077,7 +13948,7 @@
                 <a:ea typeface="Be Vietnam Pro" pitchFamily="34" charset="-122"/>
                 <a:cs typeface="Be Vietnam Pro" pitchFamily="34" charset="-120"/>
               </a:rPr>
-              <a:t> nguồn nêu</a:t>
+              <a:t> tính</a:t>
             </a:r>
             <a:r>
               <a:rPr lang="en-US" sz="2550" dirty="0" spc="0" kern="0">
@@ -14088,29 +13959,7 @@
                 <a:ea typeface="Be Vietnam Pro" pitchFamily="34" charset="-122"/>
                 <a:cs typeface="Be Vietnam Pro" pitchFamily="34" charset="-120"/>
               </a:rPr>
-              <a:t> lý</a:t>
-            </a:r>
-            <a:r>
-              <a:rPr lang="en-US" sz="2550" dirty="0" spc="-1" kern="0">
-                <a:solidFill>
-                  <a:srgbClr val="F3EEE3"/>
-                </a:solidFill>
-                <a:latin typeface="Be Vietnam Pro" pitchFamily="34" charset="0"/>
-                <a:ea typeface="Be Vietnam Pro" pitchFamily="34" charset="-122"/>
-                <a:cs typeface="Be Vietnam Pro" pitchFamily="34" charset="-120"/>
-              </a:rPr>
-              <a:t> do</a:t>
-            </a:r>
-            <a:r>
-              <a:rPr lang="en-US" sz="2550" dirty="0" spc="1" kern="0">
-                <a:solidFill>
-                  <a:srgbClr val="F3EEE3"/>
-                </a:solidFill>
-                <a:latin typeface="Be Vietnam Pro" pitchFamily="34" charset="0"/>
-                <a:ea typeface="Be Vietnam Pro" pitchFamily="34" charset="-122"/>
-                <a:cs typeface="Be Vietnam Pro" pitchFamily="34" charset="-120"/>
-              </a:rPr>
-              <a:t> gì?</a:t>
+              <a:t> kỹ?</a:t>
             </a:r>
             <a:endParaRPr lang="en-US" sz="2550" dirty="0"/>
           </a:p>
@@ -14182,18 +14031,7 @@
                 <a:ea typeface="Be Vietnam Pro" pitchFamily="34" charset="-122"/>
                 <a:cs typeface="Be Vietnam Pro" pitchFamily="34" charset="-120"/>
               </a:rPr>
-              <a:t> ÁN THEO</a:t>
-            </a:r>
-            <a:r>
-              <a:rPr lang="en-US" sz="1800" b="1" spc="225" kern="0" dirty="0">
-                <a:solidFill>
-                  <a:srgbClr val="FF6A4D"/>
-                </a:solidFill>
-                <a:latin typeface="Be Vietnam Pro" pitchFamily="34" charset="0"/>
-                <a:ea typeface="Be Vietnam Pro" pitchFamily="34" charset="-122"/>
-                <a:cs typeface="Be Vietnam Pro" pitchFamily="34" charset="-120"/>
-              </a:rPr>
-              <a:t> NGUỒN</a:t>
+              <a:t> ÁN</a:t>
             </a:r>
             <a:endParaRPr lang="en-US" sz="1800" dirty="0"/>
           </a:p>
@@ -14468,7 +14306,7 @@
               <a:buNone/>
             </a:pPr>
             <a:r>
-              <a:rPr lang="en-US" sz="1800" b="1" spc="84" kern="0" dirty="0">
+              <a:rPr lang="en-US" sz="1800" b="1" spc="225" kern="0" dirty="0">
                 <a:solidFill>
                   <a:srgbClr val="7C93FF"/>
                 </a:solidFill>
@@ -14476,10 +14314,10 @@
                 <a:ea typeface="Be Vietnam Pro" pitchFamily="34" charset="-122"/>
                 <a:cs typeface="Be Vietnam Pro" pitchFamily="34" charset="-120"/>
               </a:rPr>
-              <a:t>LÝ</a:t>
-            </a:r>
-            <a:r>
-              <a:rPr lang="en-US" sz="1800" b="1" spc="227" kern="0" dirty="0">
+              <a:t>ĐIỀU</a:t>
+            </a:r>
+            <a:r>
+              <a:rPr lang="en-US" sz="1800" b="1" spc="207" kern="0" dirty="0">
                 <a:solidFill>
                   <a:srgbClr val="7C93FF"/>
                 </a:solidFill>
@@ -14487,7 +14325,18 @@
                 <a:ea typeface="Be Vietnam Pro" pitchFamily="34" charset="-122"/>
                 <a:cs typeface="Be Vietnam Pro" pitchFamily="34" charset="-120"/>
               </a:rPr>
-              <a:t> DO</a:t>
+              <a:t> CẦN</a:t>
+            </a:r>
+            <a:r>
+              <a:rPr lang="en-US" sz="1800" b="1" spc="225" kern="0" dirty="0">
+                <a:solidFill>
+                  <a:srgbClr val="7C93FF"/>
+                </a:solidFill>
+                <a:latin typeface="Be Vietnam Pro" pitchFamily="34" charset="0"/>
+                <a:ea typeface="Be Vietnam Pro" pitchFamily="34" charset="-122"/>
+                <a:cs typeface="Be Vietnam Pro" pitchFamily="34" charset="-120"/>
+              </a:rPr>
+              <a:t> TÍNH</a:t>
             </a:r>
             <a:r>
               <a:rPr lang="en-US" sz="1800" b="1" spc="228" kern="0" dirty="0">
@@ -14498,18 +14347,7 @@
                 <a:ea typeface="Be Vietnam Pro" pitchFamily="34" charset="-122"/>
                 <a:cs typeface="Be Vietnam Pro" pitchFamily="34" charset="-120"/>
               </a:rPr>
-              <a:t> THỨ</a:t>
-            </a:r>
-            <a:r>
-              <a:rPr lang="en-US" sz="1800" b="1" spc="188" kern="0" dirty="0">
-                <a:solidFill>
-                  <a:srgbClr val="7C93FF"/>
-                </a:solidFill>
-                <a:latin typeface="Be Vietnam Pro" pitchFamily="34" charset="0"/>
-                <a:ea typeface="Be Vietnam Pro" pitchFamily="34" charset="-122"/>
-                <a:cs typeface="Be Vietnam Pro" pitchFamily="34" charset="-120"/>
-              </a:rPr>
-              <a:t> NHẤT</a:t>
+              <a:t> KỸ</a:t>
             </a:r>
             <a:endParaRPr lang="en-US" sz="1800" dirty="0"/>
           </a:p>
@@ -14543,7 +14381,7 @@
               <a:buNone/>
             </a:pPr>
             <a:r>
-              <a:rPr lang="en-US" sz="3000" b="1" dirty="0" spc="-1" kern="0">
+              <a:rPr lang="en-US" sz="3000" b="1" dirty="0" spc="0" kern="0">
                 <a:solidFill>
                   <a:srgbClr val="F3EEE3"/>
                 </a:solidFill>
@@ -14551,7 +14389,18 @@
                 <a:ea typeface="Be Vietnam Pro" pitchFamily="34" charset="-122"/>
                 <a:cs typeface="Be Vietnam Pro" pitchFamily="34" charset="-120"/>
               </a:rPr>
-              <a:t>Tính</a:t>
+              <a:t>Bộ</a:t>
+            </a:r>
+            <a:r>
+              <a:rPr lang="en-US" sz="3000" b="1" dirty="0" spc="13" kern="0">
+                <a:solidFill>
+                  <a:srgbClr val="F3EEE3"/>
+                </a:solidFill>
+                <a:latin typeface="Be Vietnam Pro" pitchFamily="34" charset="0"/>
+                <a:ea typeface="Be Vietnam Pro" pitchFamily="34" charset="-122"/>
+                <a:cs typeface="Be Vietnam Pro" pitchFamily="34" charset="-120"/>
+              </a:rPr>
+              <a:t> chứa</a:t>
             </a:r>
             <a:r>
               <a:rPr lang="en-US" sz="3000" b="1" dirty="0" spc="1" kern="0">
@@ -14562,10 +14411,10 @@
                 <a:ea typeface="Be Vietnam Pro" pitchFamily="34" charset="-122"/>
                 <a:cs typeface="Be Vietnam Pro" pitchFamily="34" charset="-120"/>
               </a:rPr>
-              <a:t> hiệu</a:t>
-            </a:r>
-            <a:r>
-              <a:rPr lang="en-US" sz="3000" b="1" dirty="0" spc="3" kern="0">
+              <a:t> chuẩn</a:t>
+            </a:r>
+            <a:r>
+              <a:rPr lang="en-US" sz="3000" b="1" dirty="0" spc="0" kern="0">
                 <a:solidFill>
                   <a:srgbClr val="F3EEE3"/>
                 </a:solidFill>
@@ -14573,7 +14422,29 @@
                 <a:ea typeface="Be Vietnam Pro" pitchFamily="34" charset="-122"/>
                 <a:cs typeface="Be Vietnam Pro" pitchFamily="34" charset="-120"/>
               </a:rPr>
-              <a:t> quả</a:t>
+              <a:t> cấp</a:t>
+            </a:r>
+            <a:r>
+              <a:rPr lang="en-US" sz="3000" b="1" dirty="0" spc="-10" kern="0">
+                <a:solidFill>
+                  <a:srgbClr val="F3EEE3"/>
+                </a:solidFill>
+                <a:latin typeface="Be Vietnam Pro" pitchFamily="34" charset="0"/>
+                <a:ea typeface="Be Vietnam Pro" pitchFamily="34" charset="-122"/>
+                <a:cs typeface="Be Vietnam Pro" pitchFamily="34" charset="-120"/>
+              </a:rPr>
+              <a:t> phát</a:t>
+            </a:r>
+            <a:r>
+              <a:rPr lang="en-US" sz="3000" b="1" dirty="0" spc="-3" kern="0">
+                <a:solidFill>
+                  <a:srgbClr val="F3EEE3"/>
+                </a:solidFill>
+                <a:latin typeface="Be Vietnam Pro" pitchFamily="34" charset="0"/>
+                <a:ea typeface="Be Vietnam Pro" pitchFamily="34" charset="-122"/>
+                <a:cs typeface="Be Vietnam Pro" pitchFamily="34" charset="-120"/>
+              </a:rPr>
+              <a:t> động</a:t>
             </a:r>
             <a:endParaRPr lang="en-US" sz="3000" dirty="0"/>
           </a:p>
@@ -14669,7 +14540,7 @@
               <a:buNone/>
             </a:pPr>
             <a:r>
-              <a:rPr lang="en-US" sz="1800" b="1" spc="84" kern="0" dirty="0">
+              <a:rPr lang="en-US" sz="1800" b="1" spc="227" kern="0" dirty="0">
                 <a:solidFill>
                   <a:srgbClr val="7C93FF"/>
                 </a:solidFill>
@@ -14677,10 +14548,10 @@
                 <a:ea typeface="Be Vietnam Pro" pitchFamily="34" charset="-122"/>
                 <a:cs typeface="Be Vietnam Pro" pitchFamily="34" charset="-120"/>
               </a:rPr>
-              <a:t>LÝ</a:t>
-            </a:r>
-            <a:r>
-              <a:rPr lang="en-US" sz="1800" b="1" spc="227" kern="0" dirty="0">
+              <a:t>HƯỚNG</a:t>
+            </a:r>
+            <a:r>
+              <a:rPr lang="en-US" sz="1800" b="1" spc="224" kern="0" dirty="0">
                 <a:solidFill>
                   <a:srgbClr val="7C93FF"/>
                 </a:solidFill>
@@ -14688,10 +14559,10 @@
                 <a:ea typeface="Be Vietnam Pro" pitchFamily="34" charset="-122"/>
                 <a:cs typeface="Be Vietnam Pro" pitchFamily="34" charset="-120"/>
               </a:rPr>
-              <a:t> DO</a:t>
-            </a:r>
-            <a:r>
-              <a:rPr lang="en-US" sz="1800" b="1" spc="228" kern="0" dirty="0">
+              <a:t> GỢI</a:t>
+            </a:r>
+            <a:r>
+              <a:rPr lang="en-US" sz="1800" b="1" spc="229" kern="0" dirty="0">
                 <a:solidFill>
                   <a:srgbClr val="7C93FF"/>
                 </a:solidFill>
@@ -14699,18 +14570,7 @@
                 <a:ea typeface="Be Vietnam Pro" pitchFamily="34" charset="-122"/>
                 <a:cs typeface="Be Vietnam Pro" pitchFamily="34" charset="-120"/>
               </a:rPr>
-              <a:t> THỨ</a:t>
-            </a:r>
-            <a:r>
-              <a:rPr lang="en-US" sz="1800" b="1" spc="225" kern="0" dirty="0">
-                <a:solidFill>
-                  <a:srgbClr val="7C93FF"/>
-                </a:solidFill>
-                <a:latin typeface="Be Vietnam Pro" pitchFamily="34" charset="0"/>
-                <a:ea typeface="Be Vietnam Pro" pitchFamily="34" charset="-122"/>
-                <a:cs typeface="Be Vietnam Pro" pitchFamily="34" charset="-120"/>
-              </a:rPr>
-              <a:t> HAI</a:t>
+              <a:t> Ý</a:t>
             </a:r>
             <a:endParaRPr lang="en-US" sz="1800" dirty="0"/>
           </a:p>
@@ -14744,6 +14604,116 @@
               <a:buNone/>
             </a:pPr>
             <a:r>
+              <a:rPr lang="en-US" sz="2700" b="1" dirty="0" spc="2" kern="0">
+                <a:solidFill>
+                  <a:srgbClr val="F3EEE3"/>
+                </a:solidFill>
+                <a:latin typeface="Be Vietnam Pro" pitchFamily="34" charset="0"/>
+                <a:ea typeface="Be Vietnam Pro" pitchFamily="34" charset="-122"/>
+                <a:cs typeface="Be Vietnam Pro" pitchFamily="34" charset="-120"/>
+              </a:rPr>
+              <a:t>Bộ</a:t>
+            </a:r>
+            <a:r>
+              <a:rPr lang="en-US" sz="2700" b="1" dirty="0" spc="11" kern="0">
+                <a:solidFill>
+                  <a:srgbClr val="F3EEE3"/>
+                </a:solidFill>
+                <a:latin typeface="Be Vietnam Pro" pitchFamily="34" charset="0"/>
+                <a:ea typeface="Be Vietnam Pro" pitchFamily="34" charset="-122"/>
+                <a:cs typeface="Be Vietnam Pro" pitchFamily="34" charset="-120"/>
+              </a:rPr>
+              <a:t> chứa</a:t>
+            </a:r>
+            <a:r>
+              <a:rPr lang="en-US" sz="2700" b="1" dirty="0" spc="1" kern="0">
+                <a:solidFill>
+                  <a:srgbClr val="F3EEE3"/>
+                </a:solidFill>
+                <a:latin typeface="Be Vietnam Pro" pitchFamily="34" charset="0"/>
+                <a:ea typeface="Be Vietnam Pro" pitchFamily="34" charset="-122"/>
+                <a:cs typeface="Be Vietnam Pro" pitchFamily="34" charset="-120"/>
+              </a:rPr>
+              <a:t> kiểu</a:t>
+            </a:r>
+            <a:r>
+              <a:rPr lang="en-US" sz="2700" b="1" dirty="0" spc="-2" kern="0">
+                <a:solidFill>
+                  <a:srgbClr val="F3EEE3"/>
+                </a:solidFill>
+                <a:latin typeface="Be Vietnam Pro" pitchFamily="34" charset="0"/>
+                <a:ea typeface="Be Vietnam Pro" pitchFamily="34" charset="-122"/>
+                <a:cs typeface="Be Vietnam Pro" pitchFamily="34" charset="-120"/>
+              </a:rPr>
+              <a:t> thư</a:t>
+            </a:r>
+            <a:r>
+              <a:rPr lang="en-US" sz="2700" b="1" dirty="0" spc="-1" kern="0">
+                <a:solidFill>
+                  <a:srgbClr val="F3EEE3"/>
+                </a:solidFill>
+                <a:latin typeface="Be Vietnam Pro" pitchFamily="34" charset="0"/>
+                <a:ea typeface="Be Vietnam Pro" pitchFamily="34" charset="-122"/>
+                <a:cs typeface="Be Vietnam Pro" pitchFamily="34" charset="-120"/>
+              </a:rPr>
+              <a:t> viện</a:t>
+            </a:r>
+            <a:r>
+              <a:rPr lang="en-US" sz="2700" b="1" dirty="0" spc="1" kern="0">
+                <a:solidFill>
+                  <a:srgbClr val="F3EEE3"/>
+                </a:solidFill>
+                <a:latin typeface="Be Vietnam Pro" pitchFamily="34" charset="0"/>
+                <a:ea typeface="Be Vietnam Pro" pitchFamily="34" charset="-122"/>
+                <a:cs typeface="Be Vietnam Pro" pitchFamily="34" charset="-120"/>
+              </a:rPr>
+              <a:t> chuẩn</a:t>
+            </a:r>
+            <a:r>
+              <a:rPr lang="en-US" sz="2700" b="1" dirty="0" spc="-16" kern="0">
+                <a:solidFill>
+                  <a:srgbClr val="F3EEE3"/>
+                </a:solidFill>
+                <a:latin typeface="Be Vietnam Pro" pitchFamily="34" charset="0"/>
+                <a:ea typeface="Be Vietnam Pro" pitchFamily="34" charset="-122"/>
+                <a:cs typeface="Be Vietnam Pro" pitchFamily="34" charset="-120"/>
+              </a:rPr>
+              <a:t> trên</a:t>
+            </a:r>
+            <a:r>
+              <a:rPr lang="en-US" sz="2700" b="1" dirty="0" spc="-3" kern="0">
+                <a:solidFill>
+                  <a:srgbClr val="F3EEE3"/>
+                </a:solidFill>
+                <a:latin typeface="Be Vietnam Pro" pitchFamily="34" charset="0"/>
+                <a:ea typeface="Be Vietnam Pro" pitchFamily="34" charset="-122"/>
+                <a:cs typeface="Be Vietnam Pro" pitchFamily="34" charset="-120"/>
+              </a:rPr>
+              <a:t> bộ</a:t>
+            </a:r>
+            <a:r>
+              <a:rPr lang="en-US" sz="2700" b="1" dirty="0" spc="-2" kern="0">
+                <a:solidFill>
+                  <a:srgbClr val="F3EEE3"/>
+                </a:solidFill>
+                <a:latin typeface="Be Vietnam Pro" pitchFamily="34" charset="0"/>
+                <a:ea typeface="Be Vietnam Pro" pitchFamily="34" charset="-122"/>
+                <a:cs typeface="Be Vietnam Pro" pitchFamily="34" charset="-120"/>
+              </a:rPr>
+              <a:t> cấp</a:t>
+            </a:r>
+            <a:r>
+              <a:rPr lang="en-US" sz="2700" b="1" dirty="0" spc="-11" kern="0">
+                <a:solidFill>
+                  <a:srgbClr val="F3EEE3"/>
+                </a:solidFill>
+                <a:latin typeface="Be Vietnam Pro" pitchFamily="34" charset="0"/>
+                <a:ea typeface="Be Vietnam Pro" pitchFamily="34" charset="-122"/>
+                <a:cs typeface="Be Vietnam Pro" pitchFamily="34" charset="-120"/>
+              </a:rPr>
+              <a:t> phát</a:t>
+            </a:r>
+            <a:r>
               <a:rPr lang="en-US" sz="2700" b="1" dirty="0" spc="-5" kern="0">
                 <a:solidFill>
                   <a:srgbClr val="F3EEE3"/>
@@ -14752,95 +14722,7 @@
                 <a:ea typeface="Be Vietnam Pro" pitchFamily="34" charset="-122"/>
                 <a:cs typeface="Be Vietnam Pro" pitchFamily="34" charset="-120"/>
               </a:rPr>
-              <a:t>Khả</a:t>
-            </a:r>
-            <a:r>
-              <a:rPr lang="en-US" sz="2700" b="1" dirty="0" spc="-3" kern="0">
-                <a:solidFill>
-                  <a:srgbClr val="F3EEE3"/>
-                </a:solidFill>
-                <a:latin typeface="Be Vietnam Pro" pitchFamily="34" charset="0"/>
-                <a:ea typeface="Be Vietnam Pro" pitchFamily="34" charset="-122"/>
-                <a:cs typeface="Be Vietnam Pro" pitchFamily="34" charset="-120"/>
-              </a:rPr>
-              <a:t> năng</a:t>
-            </a:r>
-            <a:r>
-              <a:rPr lang="en-US" sz="2700" b="1" dirty="0" spc="15" kern="0">
-                <a:solidFill>
-                  <a:srgbClr val="F3EEE3"/>
-                </a:solidFill>
-                <a:latin typeface="Be Vietnam Pro" pitchFamily="34" charset="0"/>
-                <a:ea typeface="Be Vietnam Pro" pitchFamily="34" charset="-122"/>
-                <a:cs typeface="Be Vietnam Pro" pitchFamily="34" charset="-120"/>
-              </a:rPr>
-              <a:t> điều</a:t>
-            </a:r>
-            <a:r>
-              <a:rPr lang="en-US" sz="2700" b="1" dirty="0" spc="-1" kern="0">
-                <a:solidFill>
-                  <a:srgbClr val="F3EEE3"/>
-                </a:solidFill>
-                <a:latin typeface="Be Vietnam Pro" pitchFamily="34" charset="0"/>
-                <a:ea typeface="Be Vietnam Pro" pitchFamily="34" charset="-122"/>
-                <a:cs typeface="Be Vietnam Pro" pitchFamily="34" charset="-120"/>
-              </a:rPr>
-              <a:t> khiển chi</a:t>
-            </a:r>
-            <a:r>
-              <a:rPr lang="en-US" sz="2700" b="1" dirty="0" spc="-7" kern="0">
-                <a:solidFill>
-                  <a:srgbClr val="F3EEE3"/>
-                </a:solidFill>
-                <a:latin typeface="Be Vietnam Pro" pitchFamily="34" charset="0"/>
-                <a:ea typeface="Be Vietnam Pro" pitchFamily="34" charset="-122"/>
-                <a:cs typeface="Be Vietnam Pro" pitchFamily="34" charset="-120"/>
-              </a:rPr>
-              <a:t> tiết</a:t>
-            </a:r>
-            <a:r>
-              <a:rPr lang="en-US" sz="2700" b="1" dirty="0" spc="-5" kern="0">
-                <a:solidFill>
-                  <a:srgbClr val="F3EEE3"/>
-                </a:solidFill>
-                <a:latin typeface="Be Vietnam Pro" pitchFamily="34" charset="0"/>
-                <a:ea typeface="Be Vietnam Pro" pitchFamily="34" charset="-122"/>
-                <a:cs typeface="Be Vietnam Pro" pitchFamily="34" charset="-120"/>
-              </a:rPr>
-              <a:t> tài</a:t>
-            </a:r>
-            <a:r>
-              <a:rPr lang="en-US" sz="2700" b="1" dirty="0" spc="-15" kern="0">
-                <a:solidFill>
-                  <a:srgbClr val="F3EEE3"/>
-                </a:solidFill>
-                <a:latin typeface="Be Vietnam Pro" pitchFamily="34" charset="0"/>
-                <a:ea typeface="Be Vietnam Pro" pitchFamily="34" charset="-122"/>
-                <a:cs typeface="Be Vietnam Pro" pitchFamily="34" charset="-120"/>
-              </a:rPr>
-              <a:t> nguyên</a:t>
-            </a:r>
-            <a:r>
-              <a:rPr lang="en-US" sz="2700" b="1" dirty="0" spc="-4" kern="0">
-                <a:solidFill>
-                  <a:srgbClr val="F3EEE3"/>
-                </a:solidFill>
-                <a:latin typeface="Be Vietnam Pro" pitchFamily="34" charset="0"/>
-                <a:ea typeface="Be Vietnam Pro" pitchFamily="34" charset="-122"/>
-                <a:cs typeface="Be Vietnam Pro" pitchFamily="34" charset="-120"/>
-              </a:rPr>
-              <a:t> phần</a:t>
-            </a:r>
-            <a:r>
-              <a:rPr lang="en-US" sz="2700" b="1" dirty="0" spc="25" kern="0">
-                <a:solidFill>
-                  <a:srgbClr val="F3EEE3"/>
-                </a:solidFill>
-                <a:latin typeface="Be Vietnam Pro" pitchFamily="34" charset="0"/>
-                <a:ea typeface="Be Vietnam Pro" pitchFamily="34" charset="-122"/>
-                <a:cs typeface="Be Vietnam Pro" pitchFamily="34" charset="-120"/>
-              </a:rPr>
-              <a:t> cứng</a:t>
+              <a:t> theo hồ</a:t>
             </a:r>
             <a:endParaRPr lang="en-US" sz="2700" dirty="0"/>
           </a:p>
@@ -15409,17 +15291,8 @@
               </a:rPr>
               <a:t>Gom lại</a:t>
             </a:r>
-            <a:endParaRPr lang="en-US" sz="7500" dirty="0"/>
-          </a:p>
-          <a:p>
-            <a:pPr algn="l" indent="0" marL="0">
-              <a:lnSpc>
-                <a:spcPts val="7875"/>
-              </a:lnSpc>
-              <a:buNone/>
-            </a:pPr>
-            <a:r>
-              <a:rPr lang="en-US" sz="7500" dirty="0" spc="1" kern="0">
+            <a:r>
+              <a:rPr lang="en-US" sz="7500" dirty="0" spc="0" kern="0">
                 <a:solidFill>
                   <a:srgbClr val="14161C"/>
                 </a:solidFill>
@@ -15427,10 +15300,10 @@
                 <a:ea typeface="Bricolage Grotesque ExtraBold" pitchFamily="34" charset="-122"/>
                 <a:cs typeface="Bricolage Grotesque ExtraBold" pitchFamily="34" charset="-120"/>
               </a:rPr>
-              <a:t>theo</a:t>
-            </a:r>
-            <a:r>
-              <a:rPr lang="en-US" sz="7500" dirty="0" spc="3" kern="0">
+              <a:t> theo</a:t>
+            </a:r>
+            <a:r>
+              <a:rPr lang="en-US" sz="7500" dirty="0" spc="16" kern="0">
                 <a:solidFill>
                   <a:srgbClr val="14161C"/>
                 </a:solidFill>
@@ -15438,10 +15311,10 @@
                 <a:ea typeface="Bricolage Grotesque ExtraBold" pitchFamily="34" charset="-122"/>
                 <a:cs typeface="Bricolage Grotesque ExtraBold" pitchFamily="34" charset="-120"/>
               </a:rPr>
-              <a:t> lý</a:t>
-            </a:r>
-            <a:r>
-              <a:rPr lang="en-US" sz="7500" dirty="0" spc="-2" kern="0">
+              <a:t> đòi</a:t>
+            </a:r>
+            <a:r>
+              <a:rPr lang="en-US" sz="7500" dirty="0" spc="2" kern="0">
                 <a:solidFill>
                   <a:srgbClr val="14161C"/>
                 </a:solidFill>
@@ -15449,7 +15322,7 @@
                 <a:ea typeface="Bricolage Grotesque ExtraBold" pitchFamily="34" charset="-122"/>
                 <a:cs typeface="Bricolage Grotesque ExtraBold" pitchFamily="34" charset="-120"/>
               </a:rPr>
-              <a:t> do</a:t>
+              <a:t> hỏi</a:t>
             </a:r>
             <a:endParaRPr lang="en-US" sz="7500" dirty="0"/>
           </a:p>
@@ -15709,15 +15582,59 @@
               <a:t> này</a:t>
             </a:r>
             <a:r>
-              <a:rPr lang="en-US" sz="2700" dirty="0" spc="-16" kern="0">
-                <a:solidFill>
-                  <a:srgbClr val="14161C"/>
-                </a:solidFill>
-                <a:latin typeface="Be Vietnam Pro" pitchFamily="34" charset="0"/>
-                <a:ea typeface="Be Vietnam Pro" pitchFamily="34" charset="-122"/>
-                <a:cs typeface="Be Vietnam Pro" pitchFamily="34" charset="-120"/>
-              </a:rPr>
-              <a:t> gom</a:t>
+              <a:rPr lang="en-US" sz="2700" dirty="0" spc="-1" kern="0">
+                <a:solidFill>
+                  <a:srgbClr val="14161C"/>
+                </a:solidFill>
+                <a:latin typeface="Be Vietnam Pro" pitchFamily="34" charset="0"/>
+                <a:ea typeface="Be Vietnam Pro" pitchFamily="34" charset="-122"/>
+                <a:cs typeface="Be Vietnam Pro" pitchFamily="34" charset="-120"/>
+              </a:rPr>
+              <a:t> chỉ</a:t>
+            </a:r>
+            <a:r>
+              <a:rPr lang="en-US" sz="2700" dirty="0" spc="-2" kern="0">
+                <a:solidFill>
+                  <a:srgbClr val="14161C"/>
+                </a:solidFill>
+                <a:latin typeface="Be Vietnam Pro" pitchFamily="34" charset="0"/>
+                <a:ea typeface="Be Vietnam Pro" pitchFamily="34" charset="-122"/>
+                <a:cs typeface="Be Vietnam Pro" pitchFamily="34" charset="-120"/>
+              </a:rPr>
+              <a:t> giữ</a:t>
+            </a:r>
+            <a:r>
+              <a:rPr lang="en-US" sz="2700" dirty="0" spc="-15" kern="0">
+                <a:solidFill>
+                  <a:srgbClr val="14161C"/>
+                </a:solidFill>
+                <a:latin typeface="Be Vietnam Pro" pitchFamily="34" charset="0"/>
+                <a:ea typeface="Be Vietnam Pro" pitchFamily="34" charset="-122"/>
+                <a:cs typeface="Be Vietnam Pro" pitchFamily="34" charset="-120"/>
+              </a:rPr>
+              <a:t> tên</a:t>
+            </a:r>
+            <a:r>
+              <a:rPr lang="en-US" sz="2700" dirty="0" spc="-18" kern="0">
+                <a:solidFill>
+                  <a:srgbClr val="14161C"/>
+                </a:solidFill>
+                <a:latin typeface="Be Vietnam Pro" pitchFamily="34" charset="0"/>
+                <a:ea typeface="Be Vietnam Pro" pitchFamily="34" charset="-122"/>
+                <a:cs typeface="Be Vietnam Pro" pitchFamily="34" charset="-120"/>
+              </a:rPr>
+              <a:t> và</a:t>
+            </a:r>
+            <a:r>
+              <a:rPr lang="en-US" sz="2700" dirty="0" spc="-1" kern="0">
+                <a:solidFill>
+                  <a:srgbClr val="14161C"/>
+                </a:solidFill>
+                <a:latin typeface="Be Vietnam Pro" pitchFamily="34" charset="0"/>
+                <a:ea typeface="Be Vietnam Pro" pitchFamily="34" charset="-122"/>
+                <a:cs typeface="Be Vietnam Pro" pitchFamily="34" charset="-120"/>
+              </a:rPr>
+              <a:t> tự giải</a:t>
             </a:r>
             <a:r>
               <a:rPr lang="en-US" sz="2700" dirty="0" spc="0" kern="0">
@@ -15728,51 +15645,7 @@
                 <a:ea typeface="Be Vietnam Pro" pitchFamily="34" charset="-122"/>
                 <a:cs typeface="Be Vietnam Pro" pitchFamily="34" charset="-120"/>
               </a:rPr>
-              <a:t> lại</a:t>
-            </a:r>
-            <a:r>
-              <a:rPr lang="en-US" sz="2700" dirty="0" spc="-3" kern="0">
-                <a:solidFill>
-                  <a:srgbClr val="14161C"/>
-                </a:solidFill>
-                <a:latin typeface="Be Vietnam Pro" pitchFamily="34" charset="0"/>
-                <a:ea typeface="Be Vietnam Pro" pitchFamily="34" charset="-122"/>
-                <a:cs typeface="Be Vietnam Pro" pitchFamily="34" charset="-120"/>
-              </a:rPr>
-              <a:t> theo</a:t>
-            </a:r>
-            <a:r>
-              <a:rPr lang="en-US" sz="2700" dirty="0" spc="-1" kern="0">
-                <a:solidFill>
-                  <a:srgbClr val="14161C"/>
-                </a:solidFill>
-                <a:latin typeface="Be Vietnam Pro" pitchFamily="34" charset="0"/>
-                <a:ea typeface="Be Vietnam Pro" pitchFamily="34" charset="-122"/>
-                <a:cs typeface="Be Vietnam Pro" pitchFamily="34" charset="-120"/>
-              </a:rPr>
-              <a:t> lý</a:t>
-            </a:r>
-            <a:r>
-              <a:rPr lang="en-US" sz="2700" dirty="0" spc="-3" kern="0">
-                <a:solidFill>
-                  <a:srgbClr val="14161C"/>
-                </a:solidFill>
-                <a:latin typeface="Be Vietnam Pro" pitchFamily="34" charset="0"/>
-                <a:ea typeface="Be Vietnam Pro" pitchFamily="34" charset="-122"/>
-                <a:cs typeface="Be Vietnam Pro" pitchFamily="34" charset="-120"/>
-              </a:rPr>
-              <a:t> do</a:t>
-            </a:r>
-            <a:r>
-              <a:rPr lang="en-US" sz="2700" dirty="0" spc="-2" kern="0">
-                <a:solidFill>
-                  <a:srgbClr val="14161C"/>
-                </a:solidFill>
-                <a:latin typeface="Be Vietnam Pro" pitchFamily="34" charset="0"/>
-                <a:ea typeface="Be Vietnam Pro" pitchFamily="34" charset="-122"/>
-                <a:cs typeface="Be Vietnam Pro" pitchFamily="34" charset="-120"/>
-              </a:rPr>
-              <a:t> nguồn nêu.</a:t>
+              <a:t> thích.</a:t>
             </a:r>
             <a:endParaRPr lang="en-US" sz="2700" dirty="0"/>
           </a:p>
@@ -18199,6 +18072,50 @@
               <a:t> mềm</a:t>
             </a:r>
             <a:r>
+              <a:rPr lang="en-US" sz="2250" dirty="0" spc="-6" kern="0">
+                <a:solidFill>
+                  <a:srgbClr val="C4C8D6"/>
+                </a:solidFill>
+                <a:latin typeface="Be Vietnam Pro" pitchFamily="34" charset="0"/>
+                <a:ea typeface="Be Vietnam Pro" pitchFamily="34" charset="-122"/>
+                <a:cs typeface="Be Vietnam Pro" pitchFamily="34" charset="-120"/>
+              </a:rPr>
+              <a:t> chạy</a:t>
+            </a:r>
+            <a:r>
+              <a:rPr lang="en-US" sz="2250" dirty="0" spc="-16" kern="0">
+                <a:solidFill>
+                  <a:srgbClr val="C4C8D6"/>
+                </a:solidFill>
+                <a:latin typeface="Be Vietnam Pro" pitchFamily="34" charset="0"/>
+                <a:ea typeface="Be Vietnam Pro" pitchFamily="34" charset="-122"/>
+                <a:cs typeface="Be Vietnam Pro" pitchFamily="34" charset="-120"/>
+              </a:rPr>
+              <a:t> trong</a:t>
+            </a:r>
+            <a:r>
+              <a:rPr lang="en-US" sz="2250" dirty="0" spc="-5" kern="0">
+                <a:solidFill>
+                  <a:srgbClr val="C4C8D6"/>
+                </a:solidFill>
+                <a:latin typeface="Be Vietnam Pro" pitchFamily="34" charset="0"/>
+                <a:ea typeface="Be Vietnam Pro" pitchFamily="34" charset="-122"/>
+                <a:cs typeface="Be Vietnam Pro" pitchFamily="34" charset="-120"/>
+              </a:rPr>
+              <a:t> thiết</a:t>
+            </a:r>
+            <a:r>
+              <a:rPr lang="en-US" sz="2250" dirty="0" spc="2" kern="0">
+                <a:solidFill>
+                  <a:srgbClr val="C4C8D6"/>
+                </a:solidFill>
+                <a:latin typeface="Be Vietnam Pro" pitchFamily="34" charset="0"/>
+                <a:ea typeface="Be Vietnam Pro" pitchFamily="34" charset="-122"/>
+                <a:cs typeface="Be Vietnam Pro" pitchFamily="34" charset="-120"/>
+              </a:rPr>
+              <a:t> bị</a:t>
+            </a:r>
+            <a:r>
               <a:rPr lang="en-US" sz="2250" dirty="0" spc="1" kern="0">
                 <a:solidFill>
                   <a:srgbClr val="C4C8D6"/>
@@ -18207,10 +18124,10 @@
                 <a:ea typeface="Be Vietnam Pro" pitchFamily="34" charset="-122"/>
                 <a:cs typeface="Be Vietnam Pro" pitchFamily="34" charset="-120"/>
               </a:rPr>
-              <a:t> cho</a:t>
-            </a:r>
-            <a:r>
-              <a:rPr lang="en-US" sz="2250" dirty="0" spc="-5" kern="0">
+              <a:t> nhỏ,</a:t>
+            </a:r>
+            <a:r>
+              <a:rPr lang="en-US" sz="2250" dirty="0" spc="0" kern="0">
                 <a:solidFill>
                   <a:srgbClr val="C4C8D6"/>
                 </a:solidFill>
@@ -18218,10 +18135,10 @@
                 <a:ea typeface="Be Vietnam Pro" pitchFamily="34" charset="-122"/>
                 <a:cs typeface="Be Vietnam Pro" pitchFamily="34" charset="-120"/>
               </a:rPr>
-              <a:t> thiết</a:t>
-            </a:r>
-            <a:r>
-              <a:rPr lang="en-US" sz="2250" dirty="0" spc="2" kern="0">
+              <a:t> ít</a:t>
+            </a:r>
+            <a:r>
+              <a:rPr lang="en-US" sz="2250" dirty="0" spc="1" kern="0">
                 <a:solidFill>
                   <a:srgbClr val="C4C8D6"/>
                 </a:solidFill>
@@ -18229,10 +18146,10 @@
                 <a:ea typeface="Be Vietnam Pro" pitchFamily="34" charset="-122"/>
                 <a:cs typeface="Be Vietnam Pro" pitchFamily="34" charset="-120"/>
               </a:rPr>
-              <a:t> bị</a:t>
-            </a:r>
-            <a:r>
-              <a:rPr lang="en-US" sz="2250" dirty="0" spc="1" kern="0">
+              <a:t> bộ</a:t>
+            </a:r>
+            <a:r>
+              <a:rPr lang="en-US" sz="2250" dirty="0" spc="3" kern="0">
                 <a:solidFill>
                   <a:srgbClr val="C4C8D6"/>
                 </a:solidFill>
@@ -18240,62 +18157,7 @@
                 <a:ea typeface="Be Vietnam Pro" pitchFamily="34" charset="-122"/>
                 <a:cs typeface="Be Vietnam Pro" pitchFamily="34" charset="-120"/>
               </a:rPr>
-              <a:t> nhỏ,</a:t>
-            </a:r>
-            <a:r>
-              <a:rPr lang="en-US" sz="2250" dirty="0" spc="17" kern="0">
-                <a:solidFill>
-                  <a:srgbClr val="C4C8D6"/>
-                </a:solidFill>
-                <a:latin typeface="Be Vietnam Pro" pitchFamily="34" charset="0"/>
-                <a:ea typeface="Be Vietnam Pro" pitchFamily="34" charset="-122"/>
-                <a:cs typeface="Be Vietnam Pro" pitchFamily="34" charset="-120"/>
-              </a:rPr>
-              <a:t> điều</a:t>
-            </a:r>
-            <a:r>
-              <a:rPr lang="en-US" sz="2250" dirty="0" spc="-1" kern="0">
-                <a:solidFill>
-                  <a:srgbClr val="C4C8D6"/>
-                </a:solidFill>
-                <a:latin typeface="Be Vietnam Pro" pitchFamily="34" charset="0"/>
-                <a:ea typeface="Be Vietnam Pro" pitchFamily="34" charset="-122"/>
-                <a:cs typeface="Be Vietnam Pro" pitchFamily="34" charset="-120"/>
-              </a:rPr>
-              <a:t> khiển</a:t>
-            </a:r>
-            <a:r>
-              <a:rPr lang="en-US" sz="2250" dirty="0" spc="1" kern="0">
-                <a:solidFill>
-                  <a:srgbClr val="C4C8D6"/>
-                </a:solidFill>
-                <a:latin typeface="Be Vietnam Pro" pitchFamily="34" charset="0"/>
-                <a:ea typeface="Be Vietnam Pro" pitchFamily="34" charset="-122"/>
-                <a:cs typeface="Be Vietnam Pro" pitchFamily="34" charset="-120"/>
-              </a:rPr>
-              <a:t> phần</a:t>
-            </a:r>
-            <a:r>
-              <a:rPr lang="en-US" sz="2250" dirty="0" spc="20" kern="0">
-                <a:solidFill>
-                  <a:srgbClr val="C4C8D6"/>
-                </a:solidFill>
-                <a:latin typeface="Be Vietnam Pro" pitchFamily="34" charset="0"/>
-                <a:ea typeface="Be Vietnam Pro" pitchFamily="34" charset="-122"/>
-                <a:cs typeface="Be Vietnam Pro" pitchFamily="34" charset="-120"/>
-              </a:rPr>
-              <a:t> cứng</a:t>
-            </a:r>
-            <a:r>
-              <a:rPr lang="en-US" sz="2250" dirty="0" spc="-11" kern="0">
-                <a:solidFill>
-                  <a:srgbClr val="C4C8D6"/>
-                </a:solidFill>
-                <a:latin typeface="Be Vietnam Pro" pitchFamily="34" charset="0"/>
-                <a:ea typeface="Be Vietnam Pro" pitchFamily="34" charset="-122"/>
-                <a:cs typeface="Be Vietnam Pro" pitchFamily="34" charset="-120"/>
-              </a:rPr>
-              <a:t> sát.</a:t>
+              <a:t> nhớ.</a:t>
             </a:r>
             <a:endParaRPr lang="en-US" sz="2250" dirty="0"/>
           </a:p>
@@ -18390,7 +18252,7 @@
               <a:buNone/>
             </a:pPr>
             <a:r>
-              <a:rPr lang="en-US" sz="4200" dirty="0" spc="1" kern="0">
+              <a:rPr lang="en-US" sz="4200" dirty="0" spc="2" kern="0">
                 <a:solidFill>
                   <a:srgbClr val="F3EEE3"/>
                 </a:solidFill>
@@ -18398,10 +18260,10 @@
                 <a:ea typeface="Bricolage Grotesque ExtraBold" pitchFamily="34" charset="-122"/>
                 <a:cs typeface="Bricolage Grotesque ExtraBold" pitchFamily="34" charset="-120"/>
               </a:rPr>
-              <a:t>tiện</a:t>
-            </a:r>
-            <a:r>
-              <a:rPr lang="en-US" sz="4200" dirty="0" spc="-1" kern="0">
+              <a:t>cấp phát</a:t>
+            </a:r>
+            <a:r>
+              <a:rPr lang="en-US" sz="4200" dirty="0" spc="7" kern="0">
                 <a:solidFill>
                   <a:srgbClr val="F3EEE3"/>
                 </a:solidFill>
@@ -18409,51 +18271,7 @@
                 <a:ea typeface="Bricolage Grotesque ExtraBold" pitchFamily="34" charset="-122"/>
                 <a:cs typeface="Bricolage Grotesque ExtraBold" pitchFamily="34" charset="-120"/>
               </a:rPr>
-              <a:t> ích</a:t>
-            </a:r>
-            <a:r>
-              <a:rPr lang="en-US" sz="4200" dirty="0" spc="2" kern="0">
-                <a:solidFill>
-                  <a:srgbClr val="F3EEE3"/>
-                </a:solidFill>
-                <a:latin typeface="Bricolage Grotesque ExtraBold" pitchFamily="34" charset="0"/>
-                <a:ea typeface="Bricolage Grotesque ExtraBold" pitchFamily="34" charset="-122"/>
-                <a:cs typeface="Bricolage Grotesque ExtraBold" pitchFamily="34" charset="-120"/>
-              </a:rPr>
-              <a:t> hệ</a:t>
-            </a:r>
-            <a:r>
-              <a:rPr lang="en-US" sz="4200" dirty="0" spc="-1" kern="0">
-                <a:solidFill>
-                  <a:srgbClr val="F3EEE3"/>
-                </a:solidFill>
-                <a:latin typeface="Bricolage Grotesque ExtraBold" pitchFamily="34" charset="0"/>
-                <a:ea typeface="Bricolage Grotesque ExtraBold" pitchFamily="34" charset="-122"/>
-                <a:cs typeface="Bricolage Grotesque ExtraBold" pitchFamily="34" charset="-120"/>
-              </a:rPr>
-              <a:t> thống</a:t>
-            </a:r>
-            <a:r>
-              <a:rPr lang="en-US" sz="4200" dirty="0" spc="-40" kern="0">
-                <a:solidFill>
-                  <a:srgbClr val="F3EEE3"/>
-                </a:solidFill>
-                <a:latin typeface="Bricolage Grotesque ExtraBold" pitchFamily="34" charset="0"/>
-                <a:ea typeface="Bricolage Grotesque ExtraBold" pitchFamily="34" charset="-122"/>
-                <a:cs typeface="Bricolage Grotesque ExtraBold" pitchFamily="34" charset="-120"/>
-              </a:rPr>
-              <a:t> mức</a:t>
-            </a:r>
-            <a:r>
-              <a:rPr lang="en-US" sz="4200" dirty="0" spc="0" kern="0">
-                <a:solidFill>
-                  <a:srgbClr val="F3EEE3"/>
-                </a:solidFill>
-                <a:latin typeface="Bricolage Grotesque ExtraBold" pitchFamily="34" charset="0"/>
-                <a:ea typeface="Bricolage Grotesque ExtraBold" pitchFamily="34" charset="-122"/>
-                <a:cs typeface="Bricolage Grotesque ExtraBold" pitchFamily="34" charset="-120"/>
-              </a:rPr>
-              <a:t> thấp</a:t>
+              <a:t> động</a:t>
             </a:r>
             <a:endParaRPr lang="en-US" sz="4200" dirty="0"/>
           </a:p>
@@ -18506,7 +18324,7 @@
               <a:buNone/>
             </a:pPr>
             <a:r>
-              <a:rPr lang="en-US" sz="1800" b="1" spc="226" kern="0" dirty="0">
+              <a:rPr lang="en-US" sz="1800" b="1" spc="229" kern="0" dirty="0">
                 <a:solidFill>
                   <a:srgbClr val="FFB454"/>
                 </a:solidFill>
@@ -18514,7 +18332,18 @@
                 <a:ea typeface="Be Vietnam Pro" pitchFamily="34" charset="-122"/>
                 <a:cs typeface="Be Vietnam Pro" pitchFamily="34" charset="-120"/>
               </a:rPr>
-              <a:t>NHÓM 3</a:t>
+              <a:t>NGUYÊN</a:t>
+            </a:r>
+            <a:r>
+              <a:rPr lang="en-US" sz="1800" b="1" spc="165" kern="0" dirty="0">
+                <a:solidFill>
+                  <a:srgbClr val="FFB454"/>
+                </a:solidFill>
+                <a:latin typeface="Be Vietnam Pro" pitchFamily="34" charset="0"/>
+                <a:ea typeface="Be Vietnam Pro" pitchFamily="34" charset="-122"/>
+                <a:cs typeface="Be Vietnam Pro" pitchFamily="34" charset="-120"/>
+              </a:rPr>
+              <a:t> TẮC</a:t>
             </a:r>
             <a:endParaRPr lang="en-US" sz="1800" dirty="0"/>
           </a:p>
@@ -18548,7 +18377,7 @@
               <a:buNone/>
             </a:pPr>
             <a:r>
-              <a:rPr lang="en-US" sz="4200" dirty="0" spc="-6" kern="0">
+              <a:rPr lang="en-US" sz="4200" dirty="0" spc="-1" kern="0">
                 <a:solidFill>
                   <a:srgbClr val="F3EEE3"/>
                 </a:solidFill>
@@ -18556,10 +18385,10 @@
                 <a:ea typeface="Bricolage Grotesque ExtraBold" pitchFamily="34" charset="-122"/>
                 <a:cs typeface="Bricolage Grotesque ExtraBold" pitchFamily="34" charset="-120"/>
               </a:rPr>
-              <a:t>bộ</a:t>
-            </a:r>
-            <a:r>
-              <a:rPr lang="en-US" sz="4200" dirty="0" spc="3" kern="0">
+              <a:t>không</a:t>
+            </a:r>
+            <a:r>
+              <a:rPr lang="en-US" sz="4200" dirty="0" spc="-16" kern="0">
                 <a:solidFill>
                   <a:srgbClr val="F3EEE3"/>
                 </a:solidFill>
@@ -18567,10 +18396,10 @@
                 <a:ea typeface="Bricolage Grotesque ExtraBold" pitchFamily="34" charset="-122"/>
                 <a:cs typeface="Bricolage Grotesque ExtraBold" pitchFamily="34" charset="-120"/>
               </a:rPr>
-              <a:t> máy</a:t>
-            </a:r>
-            <a:r>
-              <a:rPr lang="en-US" sz="4200" dirty="0" spc="6" kern="0">
+              <a:t> trả</a:t>
+            </a:r>
+            <a:r>
+              <a:rPr lang="en-US" sz="4200" dirty="0" spc="2" kern="0">
                 <a:solidFill>
                   <a:srgbClr val="F3EEE3"/>
                 </a:solidFill>
@@ -18578,18 +18407,7 @@
                 <a:ea typeface="Bricolage Grotesque ExtraBold" pitchFamily="34" charset="-122"/>
                 <a:cs typeface="Bricolage Grotesque ExtraBold" pitchFamily="34" charset="-120"/>
               </a:rPr>
-              <a:t> dựng</a:t>
-            </a:r>
-            <a:r>
-              <a:rPr lang="en-US" sz="4200" dirty="0" spc="-10" kern="0">
-                <a:solidFill>
-                  <a:srgbClr val="F3EEE3"/>
-                </a:solidFill>
-                <a:latin typeface="Bricolage Grotesque ExtraBold" pitchFamily="34" charset="0"/>
-                <a:ea typeface="Bricolage Grotesque ExtraBold" pitchFamily="34" charset="-122"/>
-                <a:cs typeface="Bricolage Grotesque ExtraBold" pitchFamily="34" charset="-120"/>
-              </a:rPr>
-              <a:t> trang</a:t>
+              <a:t> giá</a:t>
             </a:r>
             <a:endParaRPr lang="en-US" sz="4200" dirty="0"/>
           </a:p>
@@ -18623,7 +18441,7 @@
               <a:buNone/>
             </a:pPr>
             <a:r>
-              <a:rPr lang="en-US" sz="2250" dirty="0" spc="-1" kern="0">
+              <a:rPr lang="en-US" sz="2250" dirty="0" spc="1" kern="0">
                 <a:solidFill>
                   <a:srgbClr val="C4C8D6"/>
                 </a:solidFill>
@@ -18631,7 +18449,29 @@
                 <a:ea typeface="Be Vietnam Pro" pitchFamily="34" charset="-122"/>
                 <a:cs typeface="Be Vietnam Pro" pitchFamily="34" charset="-120"/>
               </a:rPr>
-              <a:t>Thành</a:t>
+              <a:t>Dùng cơ chế</a:t>
+            </a:r>
+            <a:r>
+              <a:rPr lang="en-US" sz="2250" dirty="0" spc="14" kern="0">
+                <a:solidFill>
+                  <a:srgbClr val="C4C8D6"/>
+                </a:solidFill>
+                <a:latin typeface="Be Vietnam Pro" pitchFamily="34" charset="0"/>
+                <a:ea typeface="Be Vietnam Pro" pitchFamily="34" charset="-122"/>
+                <a:cs typeface="Be Vietnam Pro" pitchFamily="34" charset="-120"/>
+              </a:rPr>
+              <a:t> trừu</a:t>
+            </a:r>
+            <a:r>
+              <a:rPr lang="en-US" sz="2250" dirty="0" spc="7" kern="0">
+                <a:solidFill>
+                  <a:srgbClr val="C4C8D6"/>
+                </a:solidFill>
+                <a:latin typeface="Be Vietnam Pro" pitchFamily="34" charset="0"/>
+                <a:ea typeface="Be Vietnam Pro" pitchFamily="34" charset="-122"/>
+                <a:cs typeface="Be Vietnam Pro" pitchFamily="34" charset="-120"/>
+              </a:rPr>
+              <a:t> tượng</a:t>
             </a:r>
             <a:r>
               <a:rPr lang="en-US" sz="2250" dirty="0" spc="1" kern="0">
@@ -18642,7 +18482,7 @@
                 <a:ea typeface="Be Vietnam Pro" pitchFamily="34" charset="-122"/>
                 <a:cs typeface="Be Vietnam Pro" pitchFamily="34" charset="-120"/>
               </a:rPr>
-              <a:t> phần</a:t>
+              <a:t> đúng</a:t>
             </a:r>
             <a:r>
               <a:rPr lang="en-US" sz="2250" dirty="0" spc="2" kern="0">
@@ -18653,10 +18493,10 @@
                 <a:ea typeface="Be Vietnam Pro" pitchFamily="34" charset="-122"/>
                 <a:cs typeface="Be Vietnam Pro" pitchFamily="34" charset="-120"/>
               </a:rPr>
-              <a:t> của</a:t>
-            </a:r>
-            <a:r>
-              <a:rPr lang="en-US" sz="2250" dirty="0" spc="7" kern="0">
+              <a:t> cách</a:t>
+            </a:r>
+            <a:r>
+              <a:rPr lang="en-US" sz="2250" dirty="0" spc="0" kern="0">
                 <a:solidFill>
                   <a:srgbClr val="C4C8D6"/>
                 </a:solidFill>
@@ -18664,10 +18504,10 @@
                 <a:ea typeface="Be Vietnam Pro" pitchFamily="34" charset="-122"/>
                 <a:cs typeface="Be Vietnam Pro" pitchFamily="34" charset="-120"/>
               </a:rPr>
-              <a:t> trình</a:t>
-            </a:r>
-            <a:r>
-              <a:rPr lang="en-US" sz="2250" dirty="0" spc="-16" kern="0">
+              <a:t> thì</a:t>
+            </a:r>
+            <a:r>
+              <a:rPr lang="en-US" sz="2250" dirty="0" spc="-2" kern="0">
                 <a:solidFill>
                   <a:srgbClr val="C4C8D6"/>
                 </a:solidFill>
@@ -18675,10 +18515,10 @@
                 <a:ea typeface="Be Vietnam Pro" pitchFamily="34" charset="-122"/>
                 <a:cs typeface="Be Vietnam Pro" pitchFamily="34" charset="-120"/>
               </a:rPr>
-              <a:t> duyệt</a:t>
-            </a:r>
-            <a:r>
-              <a:rPr lang="en-US" sz="2250" dirty="0" spc="-11" kern="0">
+              <a:t> hiệu</a:t>
+            </a:r>
+            <a:r>
+              <a:rPr lang="en-US" sz="2250" dirty="0" spc="0" kern="0">
                 <a:solidFill>
                   <a:srgbClr val="C4C8D6"/>
                 </a:solidFill>
@@ -18686,7 +18526,29 @@
                 <a:ea typeface="Be Vietnam Pro" pitchFamily="34" charset="-122"/>
                 <a:cs typeface="Be Vietnam Pro" pitchFamily="34" charset="-120"/>
               </a:rPr>
-              <a:t> web</a:t>
+              <a:t> năng</a:t>
+            </a:r>
+            <a:r>
+              <a:rPr lang="en-US" sz="2250" dirty="0" spc="1" kern="0">
+                <a:solidFill>
+                  <a:srgbClr val="C4C8D6"/>
+                </a:solidFill>
+                <a:latin typeface="Be Vietnam Pro" pitchFamily="34" charset="0"/>
+                <a:ea typeface="Be Vietnam Pro" pitchFamily="34" charset="-122"/>
+                <a:cs typeface="Be Vietnam Pro" pitchFamily="34" charset="-120"/>
+              </a:rPr>
+              <a:t> ít</a:t>
+            </a:r>
+            <a:r>
+              <a:rPr lang="en-US" sz="2250" dirty="0" spc="-9" kern="0">
+                <a:solidFill>
+                  <a:srgbClr val="C4C8D6"/>
+                </a:solidFill>
+                <a:latin typeface="Be Vietnam Pro" pitchFamily="34" charset="0"/>
+                <a:ea typeface="Be Vietnam Pro" pitchFamily="34" charset="-122"/>
+                <a:cs typeface="Be Vietnam Pro" pitchFamily="34" charset="-120"/>
+              </a:rPr>
+              <a:t> nhất</a:t>
             </a:r>
             <a:r>
               <a:rPr lang="en-US" sz="2250" dirty="0" spc="-2" kern="0">
@@ -18697,10 +18559,10 @@
                 <a:ea typeface="Be Vietnam Pro" pitchFamily="34" charset="-122"/>
                 <a:cs typeface="Be Vietnam Pro" pitchFamily="34" charset="-120"/>
               </a:rPr>
-              <a:t> mà</a:t>
-            </a:r>
-            <a:r>
-              <a:rPr lang="en-US" sz="2250" dirty="0" spc="1" kern="0">
+              <a:t> bằng</a:t>
+            </a:r>
+            <a:r>
+              <a:rPr lang="en-US" sz="2250" dirty="0" spc="-6" kern="0">
                 <a:solidFill>
                   <a:srgbClr val="C4C8D6"/>
                 </a:solidFill>
@@ -18708,10 +18570,10 @@
                 <a:ea typeface="Be Vietnam Pro" pitchFamily="34" charset="-122"/>
                 <a:cs typeface="Be Vietnam Pro" pitchFamily="34" charset="-120"/>
               </a:rPr>
-              <a:t> nguồn nêu</a:t>
-            </a:r>
-            <a:r>
-              <a:rPr lang="en-US" sz="2250" dirty="0" spc="-1" kern="0">
+              <a:t> viết</a:t>
+            </a:r>
+            <a:r>
+              <a:rPr lang="en-US" sz="2250" dirty="0" spc="-15" kern="0">
                 <a:solidFill>
                   <a:srgbClr val="C4C8D6"/>
                 </a:solidFill>
@@ -18719,29 +18581,7 @@
                 <a:ea typeface="Be Vietnam Pro" pitchFamily="34" charset="-122"/>
                 <a:cs typeface="Be Vietnam Pro" pitchFamily="34" charset="-120"/>
               </a:rPr>
-              <a:t> làm</a:t>
-            </a:r>
-            <a:r>
-              <a:rPr lang="en-US" sz="2250" dirty="0" spc="-2" kern="0">
-                <a:solidFill>
-                  <a:srgbClr val="C4C8D6"/>
-                </a:solidFill>
-                <a:latin typeface="Be Vietnam Pro" pitchFamily="34" charset="0"/>
-                <a:ea typeface="Be Vietnam Pro" pitchFamily="34" charset="-122"/>
-                <a:cs typeface="Be Vietnam Pro" pitchFamily="34" charset="-120"/>
-              </a:rPr>
-              <a:t> ví</a:t>
-            </a:r>
-            <a:r>
-              <a:rPr lang="en-US" sz="2250" dirty="0" spc="5" kern="0">
-                <a:solidFill>
-                  <a:srgbClr val="C4C8D6"/>
-                </a:solidFill>
-                <a:latin typeface="Be Vietnam Pro" pitchFamily="34" charset="0"/>
-                <a:ea typeface="Be Vietnam Pro" pitchFamily="34" charset="-122"/>
-                <a:cs typeface="Be Vietnam Pro" pitchFamily="34" charset="-120"/>
-              </a:rPr>
-              <a:t> dụ.</a:t>
+              <a:t> tay.</a:t>
             </a:r>
             <a:endParaRPr lang="en-US" sz="2250" dirty="0"/>
           </a:p>
@@ -18866,7 +18706,7 @@
               <a:t> system-design-101</a:t>
             </a:r>
             <a:r>
-              <a:rPr lang="en-US" sz="2550" b="1" dirty="0" spc="3" kern="0">
+              <a:rPr lang="en-US" sz="2550" b="1" dirty="0" spc="-4" kern="0">
                 <a:solidFill>
                   <a:srgbClr val="F3EEE3"/>
                 </a:solidFill>
@@ -18874,10 +18714,54 @@
                 <a:ea typeface="Be Vietnam Pro" pitchFamily="34" charset="-122"/>
                 <a:cs typeface="Be Vietnam Pro" pitchFamily="34" charset="-120"/>
               </a:rPr>
+              <a:t> (tên</a:t>
+            </a:r>
+            <a:r>
+              <a:rPr lang="en-US" sz="2550" b="1" dirty="0" spc="-3" kern="0">
+                <a:solidFill>
+                  <a:srgbClr val="F3EEE3"/>
+                </a:solidFill>
+                <a:latin typeface="Be Vietnam Pro" pitchFamily="34" charset="0"/>
+                <a:ea typeface="Be Vietnam Pro" pitchFamily="34" charset="-122"/>
+                <a:cs typeface="Be Vietnam Pro" pitchFamily="34" charset="-120"/>
+              </a:rPr>
+              <a:t> tám</a:t>
+            </a:r>
+            <a:r>
+              <a:rPr lang="en-US" sz="2550" b="1" dirty="0" spc="-1" kern="0">
+                <a:solidFill>
+                  <a:srgbClr val="F3EEE3"/>
+                </a:solidFill>
+                <a:latin typeface="Be Vietnam Pro" pitchFamily="34" charset="0"/>
+                <a:ea typeface="Be Vietnam Pro" pitchFamily="34" charset="-122"/>
+                <a:cs typeface="Be Vietnam Pro" pitchFamily="34" charset="-120"/>
+              </a:rPr>
+              <a:t> lĩnh</a:t>
+            </a:r>
+            <a:r>
+              <a:rPr lang="en-US" sz="2550" b="1" dirty="0" spc="11" kern="0">
+                <a:solidFill>
+                  <a:srgbClr val="F3EEE3"/>
+                </a:solidFill>
+                <a:latin typeface="Be Vietnam Pro" pitchFamily="34" charset="0"/>
+                <a:ea typeface="Be Vietnam Pro" pitchFamily="34" charset="-122"/>
+                <a:cs typeface="Be Vietnam Pro" pitchFamily="34" charset="-120"/>
+              </a:rPr>
+              <a:t> vực)</a:t>
+            </a:r>
+            <a:r>
+              <a:rPr lang="en-US" sz="2550" b="1" dirty="0" spc="2" kern="0">
+                <a:solidFill>
+                  <a:srgbClr val="F3EEE3"/>
+                </a:solidFill>
+                <a:latin typeface="Be Vietnam Pro" pitchFamily="34" charset="0"/>
+                <a:ea typeface="Be Vietnam Pro" pitchFamily="34" charset="-122"/>
+                <a:cs typeface="Be Vietnam Pro" pitchFamily="34" charset="-120"/>
+              </a:rPr>
               <a:t> ·</a:t>
             </a:r>
             <a:r>
-              <a:rPr lang="en-US" sz="2550" b="1" dirty="0" spc="-2" kern="0">
+              <a:rPr lang="en-US" sz="2550" b="1" dirty="0" spc="0" kern="0">
                 <a:solidFill>
                   <a:srgbClr val="F3EEE3"/>
                 </a:solidFill>
@@ -18885,10 +18769,10 @@
                 <a:ea typeface="Be Vietnam Pro" pitchFamily="34" charset="-122"/>
                 <a:cs typeface="Be Vietnam Pro" pitchFamily="34" charset="-120"/>
               </a:rPr>
-              <a:t> tám lĩnh</a:t>
-            </a:r>
-            <a:r>
-              <a:rPr lang="en-US" sz="2550" b="1" dirty="0" spc="14" kern="0">
+              <a:t> C++</a:t>
+            </a:r>
+            <a:r>
+              <a:rPr lang="en-US" sz="2550" b="1" dirty="0" spc="-12" kern="0">
                 <a:solidFill>
                   <a:srgbClr val="F3EEE3"/>
                 </a:solidFill>
@@ -18896,7 +18780,7 @@
                 <a:ea typeface="Be Vietnam Pro" pitchFamily="34" charset="-122"/>
                 <a:cs typeface="Be Vietnam Pro" pitchFamily="34" charset="-120"/>
               </a:rPr>
-              <a:t> vực</a:t>
+              <a:t> Core</a:t>
             </a:r>
             <a:r>
               <a:rPr lang="en-US" sz="2550" b="1" dirty="0" spc="-3" kern="0">
@@ -18907,18 +18791,7 @@
                 <a:ea typeface="Be Vietnam Pro" pitchFamily="34" charset="-122"/>
                 <a:cs typeface="Be Vietnam Pro" pitchFamily="34" charset="-120"/>
               </a:rPr>
-              <a:t> dùng</a:t>
-            </a:r>
-            <a:r>
-              <a:rPr lang="en-US" sz="2550" b="1" dirty="0" spc="0" kern="0">
-                <a:solidFill>
-                  <a:srgbClr val="F3EEE3"/>
-                </a:solidFill>
-                <a:latin typeface="Be Vietnam Pro" pitchFamily="34" charset="0"/>
-                <a:ea typeface="Be Vietnam Pro" pitchFamily="34" charset="-122"/>
-                <a:cs typeface="Be Vietnam Pro" pitchFamily="34" charset="-120"/>
-              </a:rPr>
-              <a:t> C++</a:t>
+              <a:t> Guidelines</a:t>
             </a:r>
             <a:endParaRPr lang="en-US" sz="2550" dirty="0"/>
           </a:p>
@@ -18993,6 +18866,28 @@
               <a:t> ngày</a:t>
             </a:r>
             <a:r>
+              <a:rPr lang="en-US" sz="2100" dirty="0" spc="0" kern="0">
+                <a:solidFill>
+                  <a:srgbClr val="9AA0B5"/>
+                </a:solidFill>
+                <a:latin typeface="Be Vietnam Pro" pitchFamily="34" charset="0"/>
+                <a:ea typeface="Be Vietnam Pro" pitchFamily="34" charset="-122"/>
+                <a:cs typeface="Be Vietnam Pro" pitchFamily="34" charset="-120"/>
+              </a:rPr>
+              <a:t> 2026-10-19.</a:t>
+            </a:r>
+            <a:r>
+              <a:rPr lang="en-US" sz="2100" dirty="0" spc="-2" kern="0">
+                <a:solidFill>
+                  <a:srgbClr val="9AA0B5"/>
+                </a:solidFill>
+                <a:latin typeface="Be Vietnam Pro" pitchFamily="34" charset="0"/>
+                <a:ea typeface="Be Vietnam Pro" pitchFamily="34" charset="-122"/>
+                <a:cs typeface="Be Vietnam Pro" pitchFamily="34" charset="-120"/>
+              </a:rPr>
+              <a:t> Phần</a:t>
+            </a:r>
+            <a:r>
               <a:rPr lang="en-US" sz="2100" dirty="0" spc="-1" kern="0">
                 <a:solidFill>
                   <a:srgbClr val="9AA0B5"/>
@@ -19001,7 +18896,51 @@
                 <a:ea typeface="Be Vietnam Pro" pitchFamily="34" charset="-122"/>
                 <a:cs typeface="Be Vietnam Pro" pitchFamily="34" charset="-120"/>
               </a:rPr>
-              <a:t> 2026-10-18.</a:t>
+              <a:t> còn</a:t>
+            </a:r>
+            <a:r>
+              <a:rPr lang="en-US" sz="2100" dirty="0" spc="-2" kern="0">
+                <a:solidFill>
+                  <a:srgbClr val="9AA0B5"/>
+                </a:solidFill>
+                <a:latin typeface="Be Vietnam Pro" pitchFamily="34" charset="0"/>
+                <a:ea typeface="Be Vietnam Pro" pitchFamily="34" charset="-122"/>
+                <a:cs typeface="Be Vietnam Pro" pitchFamily="34" charset="-120"/>
+              </a:rPr>
+              <a:t> lại</a:t>
+            </a:r>
+            <a:r>
+              <a:rPr lang="en-US" sz="2100" dirty="0" spc="-3" kern="0">
+                <a:solidFill>
+                  <a:srgbClr val="9AA0B5"/>
+                </a:solidFill>
+                <a:latin typeface="Be Vietnam Pro" pitchFamily="34" charset="0"/>
+                <a:ea typeface="Be Vietnam Pro" pitchFamily="34" charset="-122"/>
+                <a:cs typeface="Be Vietnam Pro" pitchFamily="34" charset="-120"/>
+              </a:rPr>
+              <a:t> là</a:t>
+            </a:r>
+            <a:r>
+              <a:rPr lang="en-US" sz="2100" dirty="0" spc="2" kern="0">
+                <a:solidFill>
+                  <a:srgbClr val="9AA0B5"/>
+                </a:solidFill>
+                <a:latin typeface="Be Vietnam Pro" pitchFamily="34" charset="0"/>
+                <a:ea typeface="Be Vietnam Pro" pitchFamily="34" charset="-122"/>
+                <a:cs typeface="Be Vietnam Pro" pitchFamily="34" charset="-120"/>
+              </a:rPr>
+              <a:t> kiến</a:t>
+            </a:r>
+            <a:r>
+              <a:rPr lang="en-US" sz="2100" dirty="0" spc="6" kern="0">
+                <a:solidFill>
+                  <a:srgbClr val="9AA0B5"/>
+                </a:solidFill>
+                <a:latin typeface="Be Vietnam Pro" pitchFamily="34" charset="0"/>
+                <a:ea typeface="Be Vietnam Pro" pitchFamily="34" charset="-122"/>
+                <a:cs typeface="Be Vietnam Pro" pitchFamily="34" charset="-120"/>
+              </a:rPr>
+              <a:t> thức</a:t>
             </a:r>
             <a:r>
               <a:rPr lang="en-US" sz="2100" dirty="0" spc="0" kern="0">
@@ -19012,10 +18951,10 @@
                 <a:ea typeface="Be Vietnam Pro" pitchFamily="34" charset="-122"/>
                 <a:cs typeface="Be Vietnam Pro" pitchFamily="34" charset="-120"/>
               </a:rPr>
-              <a:t> Hình</a:t>
-            </a:r>
-            <a:r>
-              <a:rPr lang="en-US" sz="2100" dirty="0" spc="1" kern="0">
+              <a:t> chung</a:t>
+            </a:r>
+            <a:r>
+              <a:rPr lang="en-US" sz="2100" dirty="0" spc="-1" kern="0">
                 <a:solidFill>
                   <a:srgbClr val="9AA0B5"/>
                 </a:solidFill>
@@ -19023,10 +18962,10 @@
                 <a:ea typeface="Be Vietnam Pro" pitchFamily="34" charset="-122"/>
                 <a:cs typeface="Be Vietnam Pro" pitchFamily="34" charset="-120"/>
               </a:rPr>
-              <a:t> minh</a:t>
-            </a:r>
-            <a:r>
-              <a:rPr lang="en-US" sz="2100" dirty="0" spc="-6" kern="0">
+              <a:t> của</a:t>
+            </a:r>
+            <a:r>
+              <a:rPr lang="en-US" sz="2100" dirty="0" spc="4" kern="0">
                 <a:solidFill>
                   <a:srgbClr val="9AA0B5"/>
                 </a:solidFill>
@@ -19034,10 +18973,10 @@
                 <a:ea typeface="Be Vietnam Pro" pitchFamily="34" charset="-122"/>
                 <a:cs typeface="Be Vietnam Pro" pitchFamily="34" charset="-120"/>
               </a:rPr>
-              <a:t> họa</a:t>
-            </a:r>
-            <a:r>
-              <a:rPr lang="en-US" sz="2100" dirty="0" spc="-3" kern="0">
+              <a:t> người</a:t>
+            </a:r>
+            <a:r>
+              <a:rPr lang="en-US" sz="2100" dirty="0" spc="0" kern="0">
                 <a:solidFill>
                   <a:srgbClr val="9AA0B5"/>
                 </a:solidFill>
@@ -19045,10 +18984,10 @@
                 <a:ea typeface="Be Vietnam Pro" pitchFamily="34" charset="-122"/>
                 <a:cs typeface="Be Vietnam Pro" pitchFamily="34" charset="-120"/>
               </a:rPr>
-              <a:t> là</a:t>
-            </a:r>
-            <a:r>
-              <a:rPr lang="en-US" sz="2100" dirty="0" spc="-4" kern="0">
+              <a:t> biên</a:t>
+            </a:r>
+            <a:r>
+              <a:rPr lang="en-US" sz="2100" dirty="0" spc="-5" kern="0">
                 <a:solidFill>
                   <a:srgbClr val="9AA0B5"/>
                 </a:solidFill>
@@ -19056,29 +18995,7 @@
                 <a:ea typeface="Be Vietnam Pro" pitchFamily="34" charset="-122"/>
                 <a:cs typeface="Be Vietnam Pro" pitchFamily="34" charset="-120"/>
               </a:rPr>
-              <a:t> thiết</a:t>
-            </a:r>
-            <a:r>
-              <a:rPr lang="en-US" sz="2100" dirty="0" spc="-30" kern="0">
-                <a:solidFill>
-                  <a:srgbClr val="9AA0B5"/>
-                </a:solidFill>
-                <a:latin typeface="Be Vietnam Pro" pitchFamily="34" charset="0"/>
-                <a:ea typeface="Be Vietnam Pro" pitchFamily="34" charset="-122"/>
-                <a:cs typeface="Be Vietnam Pro" pitchFamily="34" charset="-120"/>
-              </a:rPr>
-              <a:t> kế</a:t>
-            </a:r>
-            <a:r>
-              <a:rPr lang="en-US" sz="2100" dirty="0" spc="-1" kern="0">
-                <a:solidFill>
-                  <a:srgbClr val="9AA0B5"/>
-                </a:solidFill>
-                <a:latin typeface="Be Vietnam Pro" pitchFamily="34" charset="0"/>
-                <a:ea typeface="Be Vietnam Pro" pitchFamily="34" charset="-122"/>
-                <a:cs typeface="Be Vietnam Pro" pitchFamily="34" charset="-120"/>
-              </a:rPr>
-              <a:t> mới.</a:t>
+              <a:t> soạn.</a:t>
             </a:r>
             <a:endParaRPr lang="en-US" sz="2100" dirty="0"/>
           </a:p>
@@ -19453,7 +19370,7 @@
               <a:buNone/>
             </a:pPr>
             <a:r>
-              <a:rPr lang="en-US" sz="2250" dirty="0" spc="-2" kern="0">
+              <a:rPr lang="en-US" sz="2250" dirty="0" spc="-21" kern="0">
                 <a:solidFill>
                   <a:srgbClr val="C4C8D6"/>
                 </a:solidFill>
@@ -19461,7 +19378,95 @@
                 <a:ea typeface="Be Vietnam Pro" pitchFamily="34" charset="-122"/>
                 <a:cs typeface="Be Vietnam Pro" pitchFamily="34" charset="-120"/>
               </a:rPr>
-              <a:t>Tiện</a:t>
+              <a:t>Vùng</a:t>
+            </a:r>
+            <a:r>
+              <a:rPr lang="en-US" sz="2250" dirty="0" spc="2" kern="0">
+                <a:solidFill>
+                  <a:srgbClr val="C4C8D6"/>
+                </a:solidFill>
+                <a:latin typeface="Be Vietnam Pro" pitchFamily="34" charset="0"/>
+                <a:ea typeface="Be Vietnam Pro" pitchFamily="34" charset="-122"/>
+                <a:cs typeface="Be Vietnam Pro" pitchFamily="34" charset="-120"/>
+              </a:rPr>
+              <a:t> nhớ cấp</a:t>
+            </a:r>
+            <a:r>
+              <a:rPr lang="en-US" sz="2250" dirty="0" spc="-32" kern="0">
+                <a:solidFill>
+                  <a:srgbClr val="C4C8D6"/>
+                </a:solidFill>
+                <a:latin typeface="Be Vietnam Pro" pitchFamily="34" charset="0"/>
+                <a:ea typeface="Be Vietnam Pro" pitchFamily="34" charset="-122"/>
+                <a:cs typeface="Be Vietnam Pro" pitchFamily="34" charset="-120"/>
+              </a:rPr>
+              <a:t> ra</a:t>
+            </a:r>
+            <a:r>
+              <a:rPr lang="en-US" sz="2250" dirty="0" spc="3" kern="0">
+                <a:solidFill>
+                  <a:srgbClr val="C4C8D6"/>
+                </a:solidFill>
+                <a:latin typeface="Be Vietnam Pro" pitchFamily="34" charset="0"/>
+                <a:ea typeface="Be Vietnam Pro" pitchFamily="34" charset="-122"/>
+                <a:cs typeface="Be Vietnam Pro" pitchFamily="34" charset="-120"/>
+              </a:rPr>
+              <a:t> lúc</a:t>
+            </a:r>
+            <a:r>
+              <a:rPr lang="en-US" sz="2250" dirty="0" spc="-6" kern="0">
+                <a:solidFill>
+                  <a:srgbClr val="C4C8D6"/>
+                </a:solidFill>
+                <a:latin typeface="Be Vietnam Pro" pitchFamily="34" charset="0"/>
+                <a:ea typeface="Be Vietnam Pro" pitchFamily="34" charset="-122"/>
+                <a:cs typeface="Be Vietnam Pro" pitchFamily="34" charset="-120"/>
+              </a:rPr>
+              <a:t> chạy</a:t>
+            </a:r>
+            <a:r>
+              <a:rPr lang="en-US" sz="2250" dirty="0" spc="-17" kern="0">
+                <a:solidFill>
+                  <a:srgbClr val="C4C8D6"/>
+                </a:solidFill>
+                <a:latin typeface="Be Vietnam Pro" pitchFamily="34" charset="0"/>
+                <a:ea typeface="Be Vietnam Pro" pitchFamily="34" charset="-122"/>
+                <a:cs typeface="Be Vietnam Pro" pitchFamily="34" charset="-120"/>
+              </a:rPr>
+              <a:t> (free</a:t>
+            </a:r>
+            <a:r>
+              <a:rPr lang="en-US" sz="2250" dirty="0" spc="-20" kern="0">
+                <a:solidFill>
+                  <a:srgbClr val="C4C8D6"/>
+                </a:solidFill>
+                <a:latin typeface="Be Vietnam Pro" pitchFamily="34" charset="0"/>
+                <a:ea typeface="Be Vietnam Pro" pitchFamily="34" charset="-122"/>
+                <a:cs typeface="Be Vietnam Pro" pitchFamily="34" charset="-120"/>
+              </a:rPr>
+              <a:t> store);</a:t>
+            </a:r>
+            <a:r>
+              <a:rPr lang="en-US" sz="2250" dirty="0" spc="0" kern="0">
+                <a:solidFill>
+                  <a:srgbClr val="C4C8D6"/>
+                </a:solidFill>
+                <a:latin typeface="Be Vietnam Pro" pitchFamily="34" charset="0"/>
+                <a:ea typeface="Be Vietnam Pro" pitchFamily="34" charset="-122"/>
+                <a:cs typeface="Be Vietnam Pro" pitchFamily="34" charset="-120"/>
+              </a:rPr>
+              <a:t> bộ</a:t>
+            </a:r>
+            <a:r>
+              <a:rPr lang="en-US" sz="2250" dirty="0" spc="8" kern="0">
+                <a:solidFill>
+                  <a:srgbClr val="C4C8D6"/>
+                </a:solidFill>
+                <a:latin typeface="Be Vietnam Pro" pitchFamily="34" charset="0"/>
+                <a:ea typeface="Be Vietnam Pro" pitchFamily="34" charset="-122"/>
+                <a:cs typeface="Be Vietnam Pro" pitchFamily="34" charset="-120"/>
+              </a:rPr>
+              <a:t> chứa</a:t>
             </a:r>
             <a:r>
               <a:rPr lang="en-US" sz="2250" dirty="0" spc="1" kern="0">
@@ -19472,10 +19477,10 @@
                 <a:ea typeface="Be Vietnam Pro" pitchFamily="34" charset="-122"/>
                 <a:cs typeface="Be Vietnam Pro" pitchFamily="34" charset="-120"/>
               </a:rPr>
-              <a:t> ích</a:t>
-            </a:r>
-            <a:r>
-              <a:rPr lang="en-US" sz="2250" dirty="0" spc="2" kern="0">
+              <a:t> chuẩn</a:t>
+            </a:r>
+            <a:r>
+              <a:rPr lang="en-US" sz="2250" dirty="0" spc="10" kern="0">
                 <a:solidFill>
                   <a:srgbClr val="C4C8D6"/>
                 </a:solidFill>
@@ -19483,10 +19488,10 @@
                 <a:ea typeface="Be Vietnam Pro" pitchFamily="34" charset="-122"/>
                 <a:cs typeface="Be Vietnam Pro" pitchFamily="34" charset="-120"/>
               </a:rPr>
-              <a:t> của</a:t>
-            </a:r>
-            <a:r>
-              <a:rPr lang="en-US" sz="2250" dirty="0" spc="0" kern="0">
+              <a:t> dựa</a:t>
+            </a:r>
+            <a:r>
+              <a:rPr lang="en-US" sz="2250" dirty="0" spc="-14" kern="0">
                 <a:solidFill>
                   <a:srgbClr val="C4C8D6"/>
                 </a:solidFill>
@@ -19494,10 +19499,10 @@
                 <a:ea typeface="Be Vietnam Pro" pitchFamily="34" charset="-122"/>
                 <a:cs typeface="Be Vietnam Pro" pitchFamily="34" charset="-120"/>
               </a:rPr>
-              <a:t> hệ</a:t>
-            </a:r>
-            <a:r>
-              <a:rPr lang="en-US" sz="2250" dirty="0" spc="1" kern="0">
+              <a:t> vào</a:t>
+            </a:r>
+            <a:r>
+              <a:rPr lang="en-US" sz="2250" dirty="0" spc="5" kern="0">
                 <a:solidFill>
                   <a:srgbClr val="C4C8D6"/>
                 </a:solidFill>
@@ -19505,84 +19510,7 @@
                 <a:ea typeface="Be Vietnam Pro" pitchFamily="34" charset="-122"/>
                 <a:cs typeface="Be Vietnam Pro" pitchFamily="34" charset="-120"/>
               </a:rPr>
-              <a:t> thống</a:t>
-            </a:r>
-            <a:r>
-              <a:rPr lang="en-US" sz="2250" dirty="0" spc="5" kern="0">
-                <a:solidFill>
-                  <a:srgbClr val="C4C8D6"/>
-                </a:solidFill>
-                <a:latin typeface="Be Vietnam Pro" pitchFamily="34" charset="0"/>
-                <a:ea typeface="Be Vietnam Pro" pitchFamily="34" charset="-122"/>
-                <a:cs typeface="Be Vietnam Pro" pitchFamily="34" charset="-120"/>
-              </a:rPr>
-              <a:t> ở</a:t>
-            </a:r>
-            <a:r>
-              <a:rPr lang="en-US" sz="2250" dirty="0" spc="11" kern="0">
-                <a:solidFill>
-                  <a:srgbClr val="C4C8D6"/>
-                </a:solidFill>
-                <a:latin typeface="Be Vietnam Pro" pitchFamily="34" charset="0"/>
-                <a:ea typeface="Be Vietnam Pro" pitchFamily="34" charset="-122"/>
-                <a:cs typeface="Be Vietnam Pro" pitchFamily="34" charset="-120"/>
-              </a:rPr>
-              <a:t> mức</a:t>
-            </a:r>
-            <a:r>
-              <a:rPr lang="en-US" sz="2250" dirty="0" spc="0" kern="0">
-                <a:solidFill>
-                  <a:srgbClr val="C4C8D6"/>
-                </a:solidFill>
-                <a:latin typeface="Be Vietnam Pro" pitchFamily="34" charset="0"/>
-                <a:ea typeface="Be Vietnam Pro" pitchFamily="34" charset="-122"/>
-                <a:cs typeface="Be Vietnam Pro" pitchFamily="34" charset="-120"/>
-              </a:rPr>
-              <a:t> thấp,</a:t>
-            </a:r>
-            <a:r>
-              <a:rPr lang="en-US" sz="2250" dirty="0" spc="1" kern="0">
-                <a:solidFill>
-                  <a:srgbClr val="C4C8D6"/>
-                </a:solidFill>
-                <a:latin typeface="Be Vietnam Pro" pitchFamily="34" charset="0"/>
-                <a:ea typeface="Be Vietnam Pro" pitchFamily="34" charset="-122"/>
-                <a:cs typeface="Be Vietnam Pro" pitchFamily="34" charset="-120"/>
-              </a:rPr>
-              <a:t> nguồn</a:t>
-            </a:r>
-            <a:r>
-              <a:rPr lang="en-US" sz="2250" dirty="0" spc="0" kern="0">
-                <a:solidFill>
-                  <a:srgbClr val="C4C8D6"/>
-                </a:solidFill>
-                <a:latin typeface="Be Vietnam Pro" pitchFamily="34" charset="0"/>
-                <a:ea typeface="Be Vietnam Pro" pitchFamily="34" charset="-122"/>
-                <a:cs typeface="Be Vietnam Pro" pitchFamily="34" charset="-120"/>
-              </a:rPr>
-              <a:t> nêu</a:t>
-            </a:r>
-            <a:r>
-              <a:rPr lang="en-US" sz="2250" dirty="0" spc="3" kern="0">
-                <a:solidFill>
-                  <a:srgbClr val="C4C8D6"/>
-                </a:solidFill>
-                <a:latin typeface="Be Vietnam Pro" pitchFamily="34" charset="0"/>
-                <a:ea typeface="Be Vietnam Pro" pitchFamily="34" charset="-122"/>
-                <a:cs typeface="Be Vietnam Pro" pitchFamily="34" charset="-120"/>
-              </a:rPr>
-              <a:t> cùng</a:t>
-            </a:r>
-            <a:r>
-              <a:rPr lang="en-US" sz="2250" dirty="0" spc="6" kern="0">
-                <a:solidFill>
-                  <a:srgbClr val="C4C8D6"/>
-                </a:solidFill>
-                <a:latin typeface="Be Vietnam Pro" pitchFamily="34" charset="0"/>
-                <a:ea typeface="Be Vietnam Pro" pitchFamily="34" charset="-122"/>
-                <a:cs typeface="Be Vietnam Pro" pitchFamily="34" charset="-120"/>
-              </a:rPr>
-              <a:t> hệ điều hành.</a:t>
+              <a:t> nó.</a:t>
             </a:r>
             <a:endParaRPr lang="en-US" sz="2250" dirty="0"/>
           </a:p>
